--- a/docs/Presentation.pptx
+++ b/docs/Presentation.pptx
@@ -8,16 +8,19 @@
     <p:sldId id="270" r:id="rId2"/>
     <p:sldId id="257" r:id="rId3"/>
     <p:sldId id="258" r:id="rId4"/>
-    <p:sldId id="259" r:id="rId5"/>
-    <p:sldId id="260" r:id="rId6"/>
-    <p:sldId id="261" r:id="rId7"/>
-    <p:sldId id="262" r:id="rId8"/>
-    <p:sldId id="264" r:id="rId9"/>
-    <p:sldId id="265" r:id="rId10"/>
-    <p:sldId id="266" r:id="rId11"/>
-    <p:sldId id="267" r:id="rId12"/>
-    <p:sldId id="268" r:id="rId13"/>
-    <p:sldId id="269" r:id="rId14"/>
+    <p:sldId id="260" r:id="rId5"/>
+    <p:sldId id="261" r:id="rId6"/>
+    <p:sldId id="262" r:id="rId7"/>
+    <p:sldId id="264" r:id="rId8"/>
+    <p:sldId id="271" r:id="rId9"/>
+    <p:sldId id="272" r:id="rId10"/>
+    <p:sldId id="273" r:id="rId11"/>
+    <p:sldId id="274" r:id="rId12"/>
+    <p:sldId id="276" r:id="rId13"/>
+    <p:sldId id="277" r:id="rId14"/>
+    <p:sldId id="278" r:id="rId15"/>
+    <p:sldId id="279" r:id="rId16"/>
+    <p:sldId id="280" r:id="rId17"/>
   </p:sldIdLst>
   <p:sldSz cx="12192000" cy="6858000"/>
   <p:notesSz cx="6858000" cy="9144000"/>
@@ -116,6 +119,11 @@
       </a:defRPr>
     </a:lvl9pPr>
   </p:defaultTextStyle>
+  <p:extLst>
+    <p:ext uri="{EFAFB233-063F-42B5-8137-9DF3F51BA10A}">
+      <p15:sldGuideLst xmlns:p15="http://schemas.microsoft.com/office/powerpoint/2012/main"/>
+    </p:ext>
+  </p:extLst>
 </p:presentation>
 </file>
 
@@ -268,7 +276,7 @@
           <a:p>
             <a:fld id="{DDD41B7D-1623-4CFD-8766-1AB5B831B954}" type="datetimeFigureOut">
               <a:rPr lang="en-IN" smtClean="0"/>
-              <a:t>19-08-2026</a:t>
+              <a:t>17-09-2026</a:t>
             </a:fld>
             <a:endParaRPr lang="en-IN"/>
           </a:p>
@@ -468,7 +476,7 @@
           <a:p>
             <a:fld id="{DDD41B7D-1623-4CFD-8766-1AB5B831B954}" type="datetimeFigureOut">
               <a:rPr lang="en-IN" smtClean="0"/>
-              <a:t>19-08-2026</a:t>
+              <a:t>17-09-2026</a:t>
             </a:fld>
             <a:endParaRPr lang="en-IN"/>
           </a:p>
@@ -678,7 +686,7 @@
           <a:p>
             <a:fld id="{DDD41B7D-1623-4CFD-8766-1AB5B831B954}" type="datetimeFigureOut">
               <a:rPr lang="en-IN" smtClean="0"/>
-              <a:t>19-08-2026</a:t>
+              <a:t>17-09-2026</a:t>
             </a:fld>
             <a:endParaRPr lang="en-IN"/>
           </a:p>
@@ -878,7 +886,7 @@
           <a:p>
             <a:fld id="{DDD41B7D-1623-4CFD-8766-1AB5B831B954}" type="datetimeFigureOut">
               <a:rPr lang="en-IN" smtClean="0"/>
-              <a:t>19-08-2026</a:t>
+              <a:t>17-09-2026</a:t>
             </a:fld>
             <a:endParaRPr lang="en-IN"/>
           </a:p>
@@ -1154,7 +1162,7 @@
           <a:p>
             <a:fld id="{DDD41B7D-1623-4CFD-8766-1AB5B831B954}" type="datetimeFigureOut">
               <a:rPr lang="en-IN" smtClean="0"/>
-              <a:t>19-08-2026</a:t>
+              <a:t>17-09-2026</a:t>
             </a:fld>
             <a:endParaRPr lang="en-IN"/>
           </a:p>
@@ -1422,7 +1430,7 @@
           <a:p>
             <a:fld id="{DDD41B7D-1623-4CFD-8766-1AB5B831B954}" type="datetimeFigureOut">
               <a:rPr lang="en-IN" smtClean="0"/>
-              <a:t>19-08-2026</a:t>
+              <a:t>17-09-2026</a:t>
             </a:fld>
             <a:endParaRPr lang="en-IN"/>
           </a:p>
@@ -1837,7 +1845,7 @@
           <a:p>
             <a:fld id="{DDD41B7D-1623-4CFD-8766-1AB5B831B954}" type="datetimeFigureOut">
               <a:rPr lang="en-IN" smtClean="0"/>
-              <a:t>19-08-2026</a:t>
+              <a:t>17-09-2026</a:t>
             </a:fld>
             <a:endParaRPr lang="en-IN"/>
           </a:p>
@@ -1979,7 +1987,7 @@
           <a:p>
             <a:fld id="{DDD41B7D-1623-4CFD-8766-1AB5B831B954}" type="datetimeFigureOut">
               <a:rPr lang="en-IN" smtClean="0"/>
-              <a:t>19-08-2026</a:t>
+              <a:t>17-09-2026</a:t>
             </a:fld>
             <a:endParaRPr lang="en-IN"/>
           </a:p>
@@ -2092,7 +2100,7 @@
           <a:p>
             <a:fld id="{DDD41B7D-1623-4CFD-8766-1AB5B831B954}" type="datetimeFigureOut">
               <a:rPr lang="en-IN" smtClean="0"/>
-              <a:t>19-08-2026</a:t>
+              <a:t>17-09-2026</a:t>
             </a:fld>
             <a:endParaRPr lang="en-IN"/>
           </a:p>
@@ -2405,7 +2413,7 @@
           <a:p>
             <a:fld id="{DDD41B7D-1623-4CFD-8766-1AB5B831B954}" type="datetimeFigureOut">
               <a:rPr lang="en-IN" smtClean="0"/>
-              <a:t>19-08-2026</a:t>
+              <a:t>17-09-2026</a:t>
             </a:fld>
             <a:endParaRPr lang="en-IN"/>
           </a:p>
@@ -2694,7 +2702,7 @@
           <a:p>
             <a:fld id="{DDD41B7D-1623-4CFD-8766-1AB5B831B954}" type="datetimeFigureOut">
               <a:rPr lang="en-IN" smtClean="0"/>
-              <a:t>19-08-2026</a:t>
+              <a:t>17-09-2026</a:t>
             </a:fld>
             <a:endParaRPr lang="en-IN"/>
           </a:p>
@@ -2937,7 +2945,7 @@
           <a:p>
             <a:fld id="{DDD41B7D-1623-4CFD-8766-1AB5B831B954}" type="datetimeFigureOut">
               <a:rPr lang="en-IN" smtClean="0"/>
-              <a:t>19-08-2026</a:t>
+              <a:t>17-09-2026</a:t>
             </a:fld>
             <a:endParaRPr lang="en-IN"/>
           </a:p>
@@ -3964,13 +3972,7 @@
   <p:cSld>
     <p:spTree>
       <p:nvGrpSpPr>
-        <p:cNvPr id="1" name="">
-          <a:extLst>
-            <a:ext uri="{FF2B5EF4-FFF2-40B4-BE49-F238E27FC236}">
-              <a16:creationId xmlns:a16="http://schemas.microsoft.com/office/drawing/2014/main" id="{F0C8263B-E681-C72F-ADBD-6C523415220E}"/>
-            </a:ext>
-          </a:extLst>
-        </p:cNvPr>
+        <p:cNvPr id="1" name=""/>
         <p:cNvGrpSpPr/>
         <p:nvPr/>
       </p:nvGrpSpPr>
@@ -3987,7 +3989,7 @@
           <p:cNvPr id="2" name="Title 1">
             <a:extLst>
               <a:ext uri="{FF2B5EF4-FFF2-40B4-BE49-F238E27FC236}">
-                <a16:creationId xmlns:a16="http://schemas.microsoft.com/office/drawing/2014/main" id="{18B23AE2-D1B1-5186-AD21-F4917EB2EF54}"/>
+                <a16:creationId xmlns:a16="http://schemas.microsoft.com/office/drawing/2014/main" id="{D2C4F0D0-7E3A-82A4-1F47-C857D77E6872}"/>
               </a:ext>
             </a:extLst>
           </p:cNvPr>
@@ -4000,264 +4002,509 @@
         </p:nvSpPr>
         <p:spPr>
           <a:xfrm>
-            <a:off x="627807" y="146641"/>
-            <a:ext cx="10515600" cy="743484"/>
+            <a:off x="0" y="58933"/>
+            <a:ext cx="11208143" cy="500723"/>
           </a:xfrm>
         </p:spPr>
         <p:txBody>
           <a:bodyPr>
-            <a:normAutofit/>
+            <a:noAutofit/>
           </a:bodyPr>
           <a:lstStyle/>
           <a:p>
             <a:r>
-              <a:rPr lang="en-IN" sz="3200" dirty="0"/>
-              <a:t>Proposed Framework</a:t>
-            </a:r>
-            <a:endParaRPr lang="en-IN" sz="3200" dirty="0">
-              <a:latin typeface="Times New Roman" panose="02020603050405020304" pitchFamily="18" charset="0"/>
-              <a:cs typeface="Times New Roman" panose="02020603050405020304" pitchFamily="18" charset="0"/>
-            </a:endParaRPr>
-          </a:p>
-        </p:txBody>
-      </p:sp>
-      <p:sp>
-        <p:nvSpPr>
-          <p:cNvPr id="3" name="Content Placeholder 2">
-            <a:extLst>
-              <a:ext uri="{FF2B5EF4-FFF2-40B4-BE49-F238E27FC236}">
-                <a16:creationId xmlns:a16="http://schemas.microsoft.com/office/drawing/2014/main" id="{6A5458AE-CF16-EE79-B59C-3D5EE785E5C5}"/>
-              </a:ext>
-            </a:extLst>
-          </p:cNvPr>
-          <p:cNvSpPr>
-            <a:spLocks noGrp="1"/>
-          </p:cNvSpPr>
-          <p:nvPr>
-            <p:ph idx="1"/>
-          </p:nvPr>
-        </p:nvSpPr>
-        <p:spPr>
-          <a:xfrm>
-            <a:off x="627808" y="1051965"/>
-            <a:ext cx="10733410" cy="5502583"/>
-          </a:xfrm>
-        </p:spPr>
-        <p:txBody>
-          <a:bodyPr>
-            <a:normAutofit fontScale="70000" lnSpcReduction="20000"/>
-          </a:bodyPr>
-          <a:lstStyle/>
-          <a:p>
-            <a:pPr marL="0" indent="0">
-              <a:buNone/>
-            </a:pPr>
-            <a:r>
-              <a:rPr lang="en-IN" sz="2400" dirty="0">
-                <a:latin typeface="Times New Roman" panose="02020603050405020304" pitchFamily="18" charset="0"/>
-                <a:cs typeface="Times New Roman" panose="02020603050405020304" pitchFamily="18" charset="0"/>
-              </a:rPr>
-              <a:t>IBM HR Dataset</a:t>
-            </a:r>
-          </a:p>
-          <a:p>
-            <a:pPr marL="0" indent="0">
-              <a:buNone/>
-            </a:pPr>
-            <a:r>
-              <a:rPr lang="en-IN" sz="2400" dirty="0">
-                <a:latin typeface="Times New Roman" panose="02020603050405020304" pitchFamily="18" charset="0"/>
-                <a:cs typeface="Times New Roman" panose="02020603050405020304" pitchFamily="18" charset="0"/>
-              </a:rPr>
-              <a:t>       ↓</a:t>
-            </a:r>
-          </a:p>
-          <a:p>
-            <a:pPr marL="0" indent="0">
-              <a:buNone/>
-            </a:pPr>
-            <a:r>
-              <a:rPr lang="en-IN" sz="2400" dirty="0">
-                <a:latin typeface="Times New Roman" panose="02020603050405020304" pitchFamily="18" charset="0"/>
-                <a:cs typeface="Times New Roman" panose="02020603050405020304" pitchFamily="18" charset="0"/>
-              </a:rPr>
-              <a:t>Data Preprocessing</a:t>
-            </a:r>
-          </a:p>
-          <a:p>
-            <a:pPr marL="0" indent="0">
-              <a:buNone/>
-            </a:pPr>
-            <a:r>
-              <a:rPr lang="en-IN" sz="2400" dirty="0">
-                <a:latin typeface="Times New Roman" panose="02020603050405020304" pitchFamily="18" charset="0"/>
-                <a:cs typeface="Times New Roman" panose="02020603050405020304" pitchFamily="18" charset="0"/>
-              </a:rPr>
-              <a:t>       ↓</a:t>
-            </a:r>
-          </a:p>
-          <a:p>
-            <a:pPr marL="0" indent="0">
-              <a:buNone/>
-            </a:pPr>
-            <a:r>
-              <a:rPr lang="en-IN" sz="2400" dirty="0">
-                <a:latin typeface="Times New Roman" panose="02020603050405020304" pitchFamily="18" charset="0"/>
-                <a:cs typeface="Times New Roman" panose="02020603050405020304" pitchFamily="18" charset="0"/>
-              </a:rPr>
-              <a:t>Feature Selection</a:t>
-            </a:r>
-          </a:p>
-          <a:p>
-            <a:pPr marL="0" indent="0">
-              <a:buNone/>
-            </a:pPr>
-            <a:r>
-              <a:rPr lang="en-IN" sz="2400" dirty="0">
-                <a:latin typeface="Times New Roman" panose="02020603050405020304" pitchFamily="18" charset="0"/>
-                <a:cs typeface="Times New Roman" panose="02020603050405020304" pitchFamily="18" charset="0"/>
-              </a:rPr>
-              <a:t>       ↓</a:t>
-            </a:r>
-          </a:p>
-          <a:p>
-            <a:pPr marL="0" indent="0">
-              <a:buNone/>
-            </a:pPr>
-            <a:r>
-              <a:rPr lang="en-IN" sz="2400" dirty="0">
-                <a:latin typeface="Times New Roman" panose="02020603050405020304" pitchFamily="18" charset="0"/>
-                <a:cs typeface="Times New Roman" panose="02020603050405020304" pitchFamily="18" charset="0"/>
-              </a:rPr>
-              <a:t>Machine Learning Model</a:t>
-            </a:r>
-          </a:p>
-          <a:p>
-            <a:pPr marL="0" indent="0">
-              <a:buNone/>
-            </a:pPr>
-            <a:r>
-              <a:rPr lang="en-IN" sz="2400" dirty="0">
-                <a:latin typeface="Times New Roman" panose="02020603050405020304" pitchFamily="18" charset="0"/>
-                <a:cs typeface="Times New Roman" panose="02020603050405020304" pitchFamily="18" charset="0"/>
-              </a:rPr>
-              <a:t>       ↓</a:t>
-            </a:r>
-          </a:p>
-          <a:p>
-            <a:pPr marL="0" indent="0">
-              <a:buNone/>
-            </a:pPr>
-            <a:r>
-              <a:rPr lang="en-IN" sz="2400" dirty="0">
-                <a:latin typeface="Times New Roman" panose="02020603050405020304" pitchFamily="18" charset="0"/>
-                <a:cs typeface="Times New Roman" panose="02020603050405020304" pitchFamily="18" charset="0"/>
-              </a:rPr>
-              <a:t>Attrition Prediction</a:t>
-            </a:r>
-          </a:p>
-          <a:p>
-            <a:pPr marL="0" indent="0">
-              <a:buNone/>
-            </a:pPr>
-            <a:r>
-              <a:rPr lang="en-IN" sz="2400" dirty="0">
-                <a:latin typeface="Times New Roman" panose="02020603050405020304" pitchFamily="18" charset="0"/>
-                <a:cs typeface="Times New Roman" panose="02020603050405020304" pitchFamily="18" charset="0"/>
-              </a:rPr>
-              <a:t>       ↓</a:t>
-            </a:r>
-          </a:p>
-          <a:p>
-            <a:pPr marL="0" indent="0">
-              <a:buNone/>
-            </a:pPr>
-            <a:r>
-              <a:rPr lang="en-IN" sz="2400" dirty="0">
-                <a:latin typeface="Times New Roman" panose="02020603050405020304" pitchFamily="18" charset="0"/>
-                <a:cs typeface="Times New Roman" panose="02020603050405020304" pitchFamily="18" charset="0"/>
-              </a:rPr>
-              <a:t>Risk Probability</a:t>
-            </a:r>
-          </a:p>
-          <a:p>
-            <a:pPr marL="0" indent="0">
-              <a:buNone/>
-            </a:pPr>
-            <a:r>
-              <a:rPr lang="en-IN" sz="2400" dirty="0">
-                <a:latin typeface="Times New Roman" panose="02020603050405020304" pitchFamily="18" charset="0"/>
-                <a:cs typeface="Times New Roman" panose="02020603050405020304" pitchFamily="18" charset="0"/>
-              </a:rPr>
-              <a:t>       ↓</a:t>
-            </a:r>
-          </a:p>
-          <a:p>
-            <a:pPr marL="0" indent="0">
-              <a:buNone/>
-            </a:pPr>
-            <a:r>
-              <a:rPr lang="en-IN" sz="2400" dirty="0">
-                <a:latin typeface="Times New Roman" panose="02020603050405020304" pitchFamily="18" charset="0"/>
-                <a:cs typeface="Times New Roman" panose="02020603050405020304" pitchFamily="18" charset="0"/>
-              </a:rPr>
-              <a:t>SHAP + LIME</a:t>
-            </a:r>
-          </a:p>
-          <a:p>
-            <a:pPr marL="0" indent="0">
-              <a:buNone/>
-            </a:pPr>
-            <a:r>
-              <a:rPr lang="en-IN" sz="2400" dirty="0">
-                <a:latin typeface="Times New Roman" panose="02020603050405020304" pitchFamily="18" charset="0"/>
-                <a:cs typeface="Times New Roman" panose="02020603050405020304" pitchFamily="18" charset="0"/>
-              </a:rPr>
-              <a:t>       ↓</a:t>
-            </a:r>
-          </a:p>
-          <a:p>
-            <a:pPr marL="0" indent="0">
-              <a:buNone/>
-            </a:pPr>
-            <a:r>
-              <a:rPr lang="en-IN" sz="2400" dirty="0">
-                <a:latin typeface="Times New Roman" panose="02020603050405020304" pitchFamily="18" charset="0"/>
-                <a:cs typeface="Times New Roman" panose="02020603050405020304" pitchFamily="18" charset="0"/>
-              </a:rPr>
-              <a:t>Employee Risk Profile</a:t>
-            </a:r>
-          </a:p>
-          <a:p>
-            <a:pPr marL="0" indent="0">
-              <a:buNone/>
-            </a:pPr>
-            <a:r>
-              <a:rPr lang="en-IN" sz="2400" dirty="0">
-                <a:latin typeface="Times New Roman" panose="02020603050405020304" pitchFamily="18" charset="0"/>
-                <a:cs typeface="Times New Roman" panose="02020603050405020304" pitchFamily="18" charset="0"/>
-              </a:rPr>
-              <a:t>       ↓</a:t>
-            </a:r>
-          </a:p>
-          <a:p>
-            <a:pPr marL="0" indent="0">
-              <a:buNone/>
-            </a:pPr>
-            <a:r>
-              <a:rPr lang="en-IN" sz="2400" dirty="0">
-                <a:latin typeface="Times New Roman" panose="02020603050405020304" pitchFamily="18" charset="0"/>
-                <a:cs typeface="Times New Roman" panose="02020603050405020304" pitchFamily="18" charset="0"/>
-              </a:rPr>
-              <a:t>HR Decision Support</a:t>
-            </a:r>
-          </a:p>
-        </p:txBody>
-      </p:sp>
+              <a:rPr lang="en-IN" sz="3200" dirty="0">
+                <a:latin typeface="Times New Roman" panose="02020603050405020304" pitchFamily="18" charset="0"/>
+                <a:cs typeface="Times New Roman" panose="02020603050405020304" pitchFamily="18" charset="0"/>
+              </a:rPr>
+              <a:t>Modern Tools and Technologies</a:t>
+            </a:r>
+          </a:p>
+        </p:txBody>
+      </p:sp>
+      <p:graphicFrame>
+        <p:nvGraphicFramePr>
+          <p:cNvPr id="8" name="Table 7">
+            <a:extLst>
+              <a:ext uri="{FF2B5EF4-FFF2-40B4-BE49-F238E27FC236}">
+                <a16:creationId xmlns:a16="http://schemas.microsoft.com/office/drawing/2014/main" id="{12AB4FCE-1D6E-F56E-698C-E6136EA8B7C0}"/>
+              </a:ext>
+            </a:extLst>
+          </p:cNvPr>
+          <p:cNvGraphicFramePr>
+            <a:graphicFrameLocks noGrp="1"/>
+          </p:cNvGraphicFramePr>
+          <p:nvPr>
+            <p:extLst>
+              <p:ext uri="{D42A27DB-BD31-4B8C-83A1-F6EECF244321}">
+                <p14:modId xmlns:p14="http://schemas.microsoft.com/office/powerpoint/2010/main" val="1156874235"/>
+              </p:ext>
+            </p:extLst>
+          </p:nvPr>
+        </p:nvGraphicFramePr>
+        <p:xfrm>
+          <a:off x="692543" y="1398460"/>
+          <a:ext cx="10515600" cy="4023360"/>
+        </p:xfrm>
+        <a:graphic>
+          <a:graphicData uri="http://schemas.openxmlformats.org/drawingml/2006/table">
+            <a:tbl>
+              <a:tblPr>
+                <a:tableStyleId>{5C22544A-7EE6-4342-B048-85BDC9FD1C3A}</a:tableStyleId>
+              </a:tblPr>
+              <a:tblGrid>
+                <a:gridCol w="5257800">
+                  <a:extLst>
+                    <a:ext uri="{9D8B030D-6E8A-4147-A177-3AD203B41FA5}">
+                      <a16:colId xmlns:a16="http://schemas.microsoft.com/office/drawing/2014/main" val="4128689744"/>
+                    </a:ext>
+                  </a:extLst>
+                </a:gridCol>
+                <a:gridCol w="5257800">
+                  <a:extLst>
+                    <a:ext uri="{9D8B030D-6E8A-4147-A177-3AD203B41FA5}">
+                      <a16:colId xmlns:a16="http://schemas.microsoft.com/office/drawing/2014/main" val="321721798"/>
+                    </a:ext>
+                  </a:extLst>
+                </a:gridCol>
+              </a:tblGrid>
+              <a:tr h="0">
+                <a:tc>
+                  <a:txBody>
+                    <a:bodyPr/>
+                    <a:lstStyle/>
+                    <a:p>
+                      <a:pPr>
+                        <a:buNone/>
+                      </a:pPr>
+                      <a:r>
+                        <a:rPr lang="en-IN" dirty="0"/>
+                        <a:t>Category</a:t>
+                      </a:r>
+                    </a:p>
+                  </a:txBody>
+                  <a:tcPr anchor="ctr"/>
+                </a:tc>
+                <a:tc>
+                  <a:txBody>
+                    <a:bodyPr/>
+                    <a:lstStyle/>
+                    <a:p>
+                      <a:pPr>
+                        <a:buNone/>
+                      </a:pPr>
+                      <a:r>
+                        <a:rPr lang="en-IN"/>
+                        <a:t>Technology</a:t>
+                      </a:r>
+                    </a:p>
+                  </a:txBody>
+                  <a:tcPr anchor="ctr"/>
+                </a:tc>
+                <a:extLst>
+                  <a:ext uri="{0D108BD9-81ED-4DB2-BD59-A6C34878D82A}">
+                    <a16:rowId xmlns:a16="http://schemas.microsoft.com/office/drawing/2014/main" val="4197651435"/>
+                  </a:ext>
+                </a:extLst>
+              </a:tr>
+              <a:tr h="0">
+                <a:tc>
+                  <a:txBody>
+                    <a:bodyPr/>
+                    <a:lstStyle/>
+                    <a:p>
+                      <a:pPr>
+                        <a:buNone/>
+                      </a:pPr>
+                      <a:r>
+                        <a:rPr lang="en-IN"/>
+                        <a:t>Programming</a:t>
+                      </a:r>
+                    </a:p>
+                  </a:txBody>
+                  <a:tcPr anchor="ctr"/>
+                </a:tc>
+                <a:tc>
+                  <a:txBody>
+                    <a:bodyPr/>
+                    <a:lstStyle/>
+                    <a:p>
+                      <a:pPr>
+                        <a:buNone/>
+                      </a:pPr>
+                      <a:r>
+                        <a:rPr lang="en-IN"/>
+                        <a:t>Python</a:t>
+                      </a:r>
+                    </a:p>
+                  </a:txBody>
+                  <a:tcPr anchor="ctr"/>
+                </a:tc>
+                <a:extLst>
+                  <a:ext uri="{0D108BD9-81ED-4DB2-BD59-A6C34878D82A}">
+                    <a16:rowId xmlns:a16="http://schemas.microsoft.com/office/drawing/2014/main" val="169973589"/>
+                  </a:ext>
+                </a:extLst>
+              </a:tr>
+              <a:tr h="0">
+                <a:tc>
+                  <a:txBody>
+                    <a:bodyPr/>
+                    <a:lstStyle/>
+                    <a:p>
+                      <a:pPr>
+                        <a:buNone/>
+                      </a:pPr>
+                      <a:r>
+                        <a:rPr lang="en-IN"/>
+                        <a:t>Data Processing</a:t>
+                      </a:r>
+                    </a:p>
+                  </a:txBody>
+                  <a:tcPr anchor="ctr"/>
+                </a:tc>
+                <a:tc>
+                  <a:txBody>
+                    <a:bodyPr/>
+                    <a:lstStyle/>
+                    <a:p>
+                      <a:pPr>
+                        <a:buNone/>
+                      </a:pPr>
+                      <a:r>
+                        <a:rPr lang="en-IN"/>
+                        <a:t>Pandas, NumPy</a:t>
+                      </a:r>
+                    </a:p>
+                  </a:txBody>
+                  <a:tcPr anchor="ctr"/>
+                </a:tc>
+                <a:extLst>
+                  <a:ext uri="{0D108BD9-81ED-4DB2-BD59-A6C34878D82A}">
+                    <a16:rowId xmlns:a16="http://schemas.microsoft.com/office/drawing/2014/main" val="890039811"/>
+                  </a:ext>
+                </a:extLst>
+              </a:tr>
+              <a:tr h="0">
+                <a:tc>
+                  <a:txBody>
+                    <a:bodyPr/>
+                    <a:lstStyle/>
+                    <a:p>
+                      <a:pPr>
+                        <a:buNone/>
+                      </a:pPr>
+                      <a:r>
+                        <a:rPr lang="en-IN"/>
+                        <a:t>Machine Learning</a:t>
+                      </a:r>
+                    </a:p>
+                  </a:txBody>
+                  <a:tcPr anchor="ctr"/>
+                </a:tc>
+                <a:tc>
+                  <a:txBody>
+                    <a:bodyPr/>
+                    <a:lstStyle/>
+                    <a:p>
+                      <a:pPr>
+                        <a:buNone/>
+                      </a:pPr>
+                      <a:r>
+                        <a:rPr lang="en-IN"/>
+                        <a:t>Scikit-learn, XGBoost</a:t>
+                      </a:r>
+                    </a:p>
+                  </a:txBody>
+                  <a:tcPr anchor="ctr"/>
+                </a:tc>
+                <a:extLst>
+                  <a:ext uri="{0D108BD9-81ED-4DB2-BD59-A6C34878D82A}">
+                    <a16:rowId xmlns:a16="http://schemas.microsoft.com/office/drawing/2014/main" val="72366965"/>
+                  </a:ext>
+                </a:extLst>
+              </a:tr>
+              <a:tr h="0">
+                <a:tc>
+                  <a:txBody>
+                    <a:bodyPr/>
+                    <a:lstStyle/>
+                    <a:p>
+                      <a:pPr>
+                        <a:buNone/>
+                      </a:pPr>
+                      <a:r>
+                        <a:rPr lang="en-IN"/>
+                        <a:t>Data Balancing</a:t>
+                      </a:r>
+                    </a:p>
+                  </a:txBody>
+                  <a:tcPr anchor="ctr"/>
+                </a:tc>
+                <a:tc>
+                  <a:txBody>
+                    <a:bodyPr/>
+                    <a:lstStyle/>
+                    <a:p>
+                      <a:pPr>
+                        <a:buNone/>
+                      </a:pPr>
+                      <a:r>
+                        <a:rPr lang="en-IN"/>
+                        <a:t>SMOTE</a:t>
+                      </a:r>
+                    </a:p>
+                  </a:txBody>
+                  <a:tcPr anchor="ctr"/>
+                </a:tc>
+                <a:extLst>
+                  <a:ext uri="{0D108BD9-81ED-4DB2-BD59-A6C34878D82A}">
+                    <a16:rowId xmlns:a16="http://schemas.microsoft.com/office/drawing/2014/main" val="1708051317"/>
+                  </a:ext>
+                </a:extLst>
+              </a:tr>
+              <a:tr h="0">
+                <a:tc>
+                  <a:txBody>
+                    <a:bodyPr/>
+                    <a:lstStyle/>
+                    <a:p>
+                      <a:pPr>
+                        <a:buNone/>
+                      </a:pPr>
+                      <a:r>
+                        <a:rPr lang="en-IN"/>
+                        <a:t>Explainable AI</a:t>
+                      </a:r>
+                    </a:p>
+                  </a:txBody>
+                  <a:tcPr anchor="ctr"/>
+                </a:tc>
+                <a:tc>
+                  <a:txBody>
+                    <a:bodyPr/>
+                    <a:lstStyle/>
+                    <a:p>
+                      <a:pPr>
+                        <a:buNone/>
+                      </a:pPr>
+                      <a:r>
+                        <a:rPr lang="en-IN"/>
+                        <a:t>SHAP, LIME</a:t>
+                      </a:r>
+                    </a:p>
+                  </a:txBody>
+                  <a:tcPr anchor="ctr"/>
+                </a:tc>
+                <a:extLst>
+                  <a:ext uri="{0D108BD9-81ED-4DB2-BD59-A6C34878D82A}">
+                    <a16:rowId xmlns:a16="http://schemas.microsoft.com/office/drawing/2014/main" val="3152121311"/>
+                  </a:ext>
+                </a:extLst>
+              </a:tr>
+              <a:tr h="0">
+                <a:tc>
+                  <a:txBody>
+                    <a:bodyPr/>
+                    <a:lstStyle/>
+                    <a:p>
+                      <a:pPr>
+                        <a:buNone/>
+                      </a:pPr>
+                      <a:r>
+                        <a:rPr lang="en-IN"/>
+                        <a:t>Backend</a:t>
+                      </a:r>
+                    </a:p>
+                  </a:txBody>
+                  <a:tcPr anchor="ctr"/>
+                </a:tc>
+                <a:tc>
+                  <a:txBody>
+                    <a:bodyPr/>
+                    <a:lstStyle/>
+                    <a:p>
+                      <a:pPr>
+                        <a:buNone/>
+                      </a:pPr>
+                      <a:r>
+                        <a:rPr lang="en-IN"/>
+                        <a:t>Flask, Flask-CORS</a:t>
+                      </a:r>
+                    </a:p>
+                  </a:txBody>
+                  <a:tcPr anchor="ctr"/>
+                </a:tc>
+                <a:extLst>
+                  <a:ext uri="{0D108BD9-81ED-4DB2-BD59-A6C34878D82A}">
+                    <a16:rowId xmlns:a16="http://schemas.microsoft.com/office/drawing/2014/main" val="3862956121"/>
+                  </a:ext>
+                </a:extLst>
+              </a:tr>
+              <a:tr h="0">
+                <a:tc>
+                  <a:txBody>
+                    <a:bodyPr/>
+                    <a:lstStyle/>
+                    <a:p>
+                      <a:pPr>
+                        <a:buNone/>
+                      </a:pPr>
+                      <a:r>
+                        <a:rPr lang="en-IN"/>
+                        <a:t>Frontend</a:t>
+                      </a:r>
+                    </a:p>
+                  </a:txBody>
+                  <a:tcPr anchor="ctr"/>
+                </a:tc>
+                <a:tc>
+                  <a:txBody>
+                    <a:bodyPr/>
+                    <a:lstStyle/>
+                    <a:p>
+                      <a:pPr>
+                        <a:buNone/>
+                      </a:pPr>
+                      <a:r>
+                        <a:rPr lang="en-IN"/>
+                        <a:t>HTML, CSS, JavaScript</a:t>
+                      </a:r>
+                    </a:p>
+                  </a:txBody>
+                  <a:tcPr anchor="ctr"/>
+                </a:tc>
+                <a:extLst>
+                  <a:ext uri="{0D108BD9-81ED-4DB2-BD59-A6C34878D82A}">
+                    <a16:rowId xmlns:a16="http://schemas.microsoft.com/office/drawing/2014/main" val="222661625"/>
+                  </a:ext>
+                </a:extLst>
+              </a:tr>
+              <a:tr h="0">
+                <a:tc>
+                  <a:txBody>
+                    <a:bodyPr/>
+                    <a:lstStyle/>
+                    <a:p>
+                      <a:pPr>
+                        <a:buNone/>
+                      </a:pPr>
+                      <a:r>
+                        <a:rPr lang="en-IN"/>
+                        <a:t>Dataset</a:t>
+                      </a:r>
+                    </a:p>
+                  </a:txBody>
+                  <a:tcPr anchor="ctr"/>
+                </a:tc>
+                <a:tc>
+                  <a:txBody>
+                    <a:bodyPr/>
+                    <a:lstStyle/>
+                    <a:p>
+                      <a:pPr>
+                        <a:buNone/>
+                      </a:pPr>
+                      <a:r>
+                        <a:rPr lang="en-IN"/>
+                        <a:t>IBM HR Employee Attrition Dataset</a:t>
+                      </a:r>
+                    </a:p>
+                  </a:txBody>
+                  <a:tcPr anchor="ctr"/>
+                </a:tc>
+                <a:extLst>
+                  <a:ext uri="{0D108BD9-81ED-4DB2-BD59-A6C34878D82A}">
+                    <a16:rowId xmlns:a16="http://schemas.microsoft.com/office/drawing/2014/main" val="332650076"/>
+                  </a:ext>
+                </a:extLst>
+              </a:tr>
+              <a:tr h="0">
+                <a:tc>
+                  <a:txBody>
+                    <a:bodyPr/>
+                    <a:lstStyle/>
+                    <a:p>
+                      <a:pPr>
+                        <a:buNone/>
+                      </a:pPr>
+                      <a:r>
+                        <a:rPr lang="en-IN"/>
+                        <a:t>Model Saving</a:t>
+                      </a:r>
+                    </a:p>
+                  </a:txBody>
+                  <a:tcPr anchor="ctr"/>
+                </a:tc>
+                <a:tc>
+                  <a:txBody>
+                    <a:bodyPr/>
+                    <a:lstStyle/>
+                    <a:p>
+                      <a:pPr>
+                        <a:buNone/>
+                      </a:pPr>
+                      <a:r>
+                        <a:rPr lang="en-IN"/>
+                        <a:t>Joblib</a:t>
+                      </a:r>
+                    </a:p>
+                  </a:txBody>
+                  <a:tcPr anchor="ctr"/>
+                </a:tc>
+                <a:extLst>
+                  <a:ext uri="{0D108BD9-81ED-4DB2-BD59-A6C34878D82A}">
+                    <a16:rowId xmlns:a16="http://schemas.microsoft.com/office/drawing/2014/main" val="2868944486"/>
+                  </a:ext>
+                </a:extLst>
+              </a:tr>
+              <a:tr h="0">
+                <a:tc>
+                  <a:txBody>
+                    <a:bodyPr/>
+                    <a:lstStyle/>
+                    <a:p>
+                      <a:pPr>
+                        <a:buNone/>
+                      </a:pPr>
+                      <a:r>
+                        <a:rPr lang="en-IN"/>
+                        <a:t>Development</a:t>
+                      </a:r>
+                    </a:p>
+                  </a:txBody>
+                  <a:tcPr anchor="ctr"/>
+                </a:tc>
+                <a:tc>
+                  <a:txBody>
+                    <a:bodyPr/>
+                    <a:lstStyle/>
+                    <a:p>
+                      <a:pPr>
+                        <a:buNone/>
+                      </a:pPr>
+                      <a:r>
+                        <a:rPr lang="en-IN" dirty="0"/>
+                        <a:t>VS Code, Git/GitHub</a:t>
+                      </a:r>
+                    </a:p>
+                  </a:txBody>
+                  <a:tcPr anchor="ctr"/>
+                </a:tc>
+                <a:extLst>
+                  <a:ext uri="{0D108BD9-81ED-4DB2-BD59-A6C34878D82A}">
+                    <a16:rowId xmlns:a16="http://schemas.microsoft.com/office/drawing/2014/main" val="3291513295"/>
+                  </a:ext>
+                </a:extLst>
+              </a:tr>
+            </a:tbl>
+          </a:graphicData>
+        </a:graphic>
+      </p:graphicFrame>
     </p:spTree>
     <p:extLst>
       <p:ext uri="{BB962C8B-B14F-4D97-AF65-F5344CB8AC3E}">
-        <p14:creationId xmlns:p14="http://schemas.microsoft.com/office/powerpoint/2010/main" val="2478956785"/>
+        <p14:creationId xmlns:p14="http://schemas.microsoft.com/office/powerpoint/2010/main" val="1284231773"/>
       </p:ext>
     </p:extLst>
   </p:cSld>
@@ -4272,13 +4519,7 @@
   <p:cSld>
     <p:spTree>
       <p:nvGrpSpPr>
-        <p:cNvPr id="1" name="">
-          <a:extLst>
-            <a:ext uri="{FF2B5EF4-FFF2-40B4-BE49-F238E27FC236}">
-              <a16:creationId xmlns:a16="http://schemas.microsoft.com/office/drawing/2014/main" id="{865EAF96-3E88-0E2A-C6D8-CD4151FF1A7F}"/>
-            </a:ext>
-          </a:extLst>
-        </p:cNvPr>
+        <p:cNvPr id="1" name=""/>
         <p:cNvGrpSpPr/>
         <p:nvPr/>
       </p:nvGrpSpPr>
@@ -4295,7 +4536,7 @@
           <p:cNvPr id="2" name="Title 1">
             <a:extLst>
               <a:ext uri="{FF2B5EF4-FFF2-40B4-BE49-F238E27FC236}">
-                <a16:creationId xmlns:a16="http://schemas.microsoft.com/office/drawing/2014/main" id="{CF799099-5CFA-CB3E-FBD7-CC71A9ABD9E3}"/>
+                <a16:creationId xmlns:a16="http://schemas.microsoft.com/office/drawing/2014/main" id="{14ADCE34-63FA-9D00-FA96-752C163EBDE1}"/>
               </a:ext>
             </a:extLst>
           </p:cNvPr>
@@ -4308,8 +4549,8 @@
         </p:nvSpPr>
         <p:spPr>
           <a:xfrm>
-            <a:off x="627807" y="146641"/>
-            <a:ext cx="10515600" cy="743484"/>
+            <a:off x="0" y="0"/>
+            <a:ext cx="10876371" cy="605920"/>
           </a:xfrm>
         </p:spPr>
         <p:txBody>
@@ -4323,7 +4564,7 @@
                 <a:latin typeface="Times New Roman" panose="02020603050405020304" pitchFamily="18" charset="0"/>
                 <a:cs typeface="Times New Roman" panose="02020603050405020304" pitchFamily="18" charset="0"/>
               </a:rPr>
-              <a:t>Feasibility</a:t>
+              <a:t>Implementation</a:t>
             </a:r>
           </a:p>
         </p:txBody>
@@ -4333,7 +4574,7 @@
           <p:cNvPr id="3" name="Content Placeholder 2">
             <a:extLst>
               <a:ext uri="{FF2B5EF4-FFF2-40B4-BE49-F238E27FC236}">
-                <a16:creationId xmlns:a16="http://schemas.microsoft.com/office/drawing/2014/main" id="{EDD6571A-B0C6-F641-0642-22EDEBF7C229}"/>
+                <a16:creationId xmlns:a16="http://schemas.microsoft.com/office/drawing/2014/main" id="{D312FA67-81E0-8FEC-B590-D7CA0FA3B65F}"/>
               </a:ext>
             </a:extLst>
           </p:cNvPr>
@@ -4346,13 +4587,13 @@
         </p:nvSpPr>
         <p:spPr>
           <a:xfrm>
-            <a:off x="563072" y="1586040"/>
-            <a:ext cx="4373070" cy="4968509"/>
+            <a:off x="695916" y="1011503"/>
+            <a:ext cx="5494492" cy="5165459"/>
           </a:xfrm>
         </p:spPr>
         <p:txBody>
           <a:bodyPr>
-            <a:normAutofit/>
+            <a:normAutofit lnSpcReduction="10000"/>
           </a:bodyPr>
           <a:lstStyle/>
           <a:p>
@@ -4360,114 +4601,198 @@
               <a:buNone/>
             </a:pPr>
             <a:r>
-              <a:rPr lang="en-IN" b="1" dirty="0">
-                <a:latin typeface="Times New Roman" panose="02020603050405020304" pitchFamily="18" charset="0"/>
-                <a:cs typeface="Times New Roman" panose="02020603050405020304" pitchFamily="18" charset="0"/>
-              </a:rPr>
-              <a:t>Technical Feasibility</a:t>
-            </a:r>
-          </a:p>
-          <a:p>
-            <a:pPr lvl="0"/>
-            <a:r>
-              <a:rPr lang="en-IN" dirty="0">
-                <a:latin typeface="Times New Roman" panose="02020603050405020304" pitchFamily="18" charset="0"/>
-                <a:cs typeface="Times New Roman" panose="02020603050405020304" pitchFamily="18" charset="0"/>
-              </a:rPr>
-              <a:t>Python </a:t>
-            </a:r>
-          </a:p>
-          <a:p>
-            <a:pPr lvl="0"/>
-            <a:r>
-              <a:rPr lang="en-IN" dirty="0">
-                <a:latin typeface="Times New Roman" panose="02020603050405020304" pitchFamily="18" charset="0"/>
-                <a:cs typeface="Times New Roman" panose="02020603050405020304" pitchFamily="18" charset="0"/>
-              </a:rPr>
-              <a:t>Pandas </a:t>
-            </a:r>
-          </a:p>
-          <a:p>
-            <a:pPr lvl="0"/>
-            <a:r>
-              <a:rPr lang="en-IN" dirty="0">
-                <a:latin typeface="Times New Roman" panose="02020603050405020304" pitchFamily="18" charset="0"/>
-                <a:cs typeface="Times New Roman" panose="02020603050405020304" pitchFamily="18" charset="0"/>
-              </a:rPr>
-              <a:t>Scikit-learn </a:t>
-            </a:r>
-          </a:p>
-          <a:p>
-            <a:pPr lvl="0"/>
-            <a:r>
-              <a:rPr lang="en-IN" dirty="0" err="1">
-                <a:latin typeface="Times New Roman" panose="02020603050405020304" pitchFamily="18" charset="0"/>
-                <a:cs typeface="Times New Roman" panose="02020603050405020304" pitchFamily="18" charset="0"/>
-              </a:rPr>
-              <a:t>XGBoost</a:t>
-            </a:r>
-            <a:r>
-              <a:rPr lang="en-IN" dirty="0">
-                <a:latin typeface="Times New Roman" panose="02020603050405020304" pitchFamily="18" charset="0"/>
-                <a:cs typeface="Times New Roman" panose="02020603050405020304" pitchFamily="18" charset="0"/>
-              </a:rPr>
-              <a:t> / Random Forest </a:t>
-            </a:r>
-          </a:p>
-          <a:p>
-            <a:pPr lvl="0"/>
-            <a:r>
-              <a:rPr lang="en-IN" dirty="0">
-                <a:latin typeface="Times New Roman" panose="02020603050405020304" pitchFamily="18" charset="0"/>
-                <a:cs typeface="Times New Roman" panose="02020603050405020304" pitchFamily="18" charset="0"/>
-              </a:rPr>
-              <a:t>SHAP </a:t>
-            </a:r>
-          </a:p>
-          <a:p>
-            <a:pPr lvl="0"/>
-            <a:r>
-              <a:rPr lang="en-IN" dirty="0">
-                <a:latin typeface="Times New Roman" panose="02020603050405020304" pitchFamily="18" charset="0"/>
-                <a:cs typeface="Times New Roman" panose="02020603050405020304" pitchFamily="18" charset="0"/>
-              </a:rPr>
-              <a:t>LIME </a:t>
-            </a:r>
-          </a:p>
-          <a:p>
-            <a:pPr lvl="0"/>
-            <a:r>
-              <a:rPr lang="en-IN" dirty="0" err="1">
-                <a:latin typeface="Times New Roman" panose="02020603050405020304" pitchFamily="18" charset="0"/>
-                <a:cs typeface="Times New Roman" panose="02020603050405020304" pitchFamily="18" charset="0"/>
-              </a:rPr>
-              <a:t>Streamlit</a:t>
-            </a:r>
-            <a:r>
-              <a:rPr lang="en-IN" dirty="0">
-                <a:latin typeface="Times New Roman" panose="02020603050405020304" pitchFamily="18" charset="0"/>
-                <a:cs typeface="Times New Roman" panose="02020603050405020304" pitchFamily="18" charset="0"/>
-              </a:rPr>
-              <a:t> </a:t>
-            </a:r>
-          </a:p>
-          <a:p>
-            <a:pPr marL="0" indent="0">
-              <a:buNone/>
-            </a:pPr>
-            <a:endParaRPr lang="en-IN" sz="2400" dirty="0">
+              <a:rPr lang="en-IN" sz="2000" b="1" dirty="0">
+                <a:latin typeface="Times New Roman" panose="02020603050405020304" pitchFamily="18" charset="0"/>
+                <a:cs typeface="Times New Roman" panose="02020603050405020304" pitchFamily="18" charset="0"/>
+              </a:rPr>
+              <a:t>Dataset</a:t>
+            </a:r>
+            <a:endParaRPr lang="en-IN" sz="2000" dirty="0">
               <a:latin typeface="Times New Roman" panose="02020603050405020304" pitchFamily="18" charset="0"/>
               <a:cs typeface="Times New Roman" panose="02020603050405020304" pitchFamily="18" charset="0"/>
             </a:endParaRPr>
           </a:p>
-        </p:txBody>
-      </p:sp>
-      <p:sp>
-        <p:nvSpPr>
-          <p:cNvPr id="4" name="TextBox 3">
-            <a:extLst>
-              <a:ext uri="{FF2B5EF4-FFF2-40B4-BE49-F238E27FC236}">
-                <a16:creationId xmlns:a16="http://schemas.microsoft.com/office/drawing/2014/main" id="{649C47B0-2189-15C2-37CE-6DFB73469F8A}"/>
+          <a:p>
+            <a:pPr lvl="0"/>
+            <a:r>
+              <a:rPr lang="en-IN" sz="2000" dirty="0">
+                <a:latin typeface="Times New Roman" panose="02020603050405020304" pitchFamily="18" charset="0"/>
+                <a:cs typeface="Times New Roman" panose="02020603050405020304" pitchFamily="18" charset="0"/>
+              </a:rPr>
+              <a:t>IBM HR Employee Attrition Dataset </a:t>
+            </a:r>
+          </a:p>
+          <a:p>
+            <a:pPr lvl="0"/>
+            <a:r>
+              <a:rPr lang="en-IN" sz="2000" b="1" dirty="0">
+                <a:latin typeface="Times New Roman" panose="02020603050405020304" pitchFamily="18" charset="0"/>
+                <a:cs typeface="Times New Roman" panose="02020603050405020304" pitchFamily="18" charset="0"/>
+              </a:rPr>
+              <a:t>1,470 employees</a:t>
+            </a:r>
+            <a:r>
+              <a:rPr lang="en-IN" sz="2000" dirty="0">
+                <a:latin typeface="Times New Roman" panose="02020603050405020304" pitchFamily="18" charset="0"/>
+                <a:cs typeface="Times New Roman" panose="02020603050405020304" pitchFamily="18" charset="0"/>
+              </a:rPr>
+              <a:t> </a:t>
+            </a:r>
+          </a:p>
+          <a:p>
+            <a:pPr lvl="0"/>
+            <a:r>
+              <a:rPr lang="en-IN" sz="2000" b="1" dirty="0">
+                <a:latin typeface="Times New Roman" panose="02020603050405020304" pitchFamily="18" charset="0"/>
+                <a:cs typeface="Times New Roman" panose="02020603050405020304" pitchFamily="18" charset="0"/>
+              </a:rPr>
+              <a:t>35 original features</a:t>
+            </a:r>
+            <a:r>
+              <a:rPr lang="en-IN" sz="2000" dirty="0">
+                <a:latin typeface="Times New Roman" panose="02020603050405020304" pitchFamily="18" charset="0"/>
+                <a:cs typeface="Times New Roman" panose="02020603050405020304" pitchFamily="18" charset="0"/>
+              </a:rPr>
+              <a:t> </a:t>
+            </a:r>
+          </a:p>
+          <a:p>
+            <a:pPr marL="0" indent="0">
+              <a:buNone/>
+            </a:pPr>
+            <a:r>
+              <a:rPr lang="en-IN" sz="2000" b="1" dirty="0">
+                <a:latin typeface="Times New Roman" panose="02020603050405020304" pitchFamily="18" charset="0"/>
+                <a:cs typeface="Times New Roman" panose="02020603050405020304" pitchFamily="18" charset="0"/>
+              </a:rPr>
+              <a:t>Preprocessing</a:t>
+            </a:r>
+            <a:endParaRPr lang="en-IN" sz="2000" dirty="0">
+              <a:latin typeface="Times New Roman" panose="02020603050405020304" pitchFamily="18" charset="0"/>
+              <a:cs typeface="Times New Roman" panose="02020603050405020304" pitchFamily="18" charset="0"/>
+            </a:endParaRPr>
+          </a:p>
+          <a:p>
+            <a:pPr lvl="0"/>
+            <a:r>
+              <a:rPr lang="en-IN" sz="2000" dirty="0">
+                <a:latin typeface="Times New Roman" panose="02020603050405020304" pitchFamily="18" charset="0"/>
+                <a:cs typeface="Times New Roman" panose="02020603050405020304" pitchFamily="18" charset="0"/>
+              </a:rPr>
+              <a:t>Removed unnecessary columns </a:t>
+            </a:r>
+          </a:p>
+          <a:p>
+            <a:pPr lvl="0"/>
+            <a:r>
+              <a:rPr lang="en-IN" sz="2000" dirty="0">
+                <a:latin typeface="Times New Roman" panose="02020603050405020304" pitchFamily="18" charset="0"/>
+                <a:cs typeface="Times New Roman" panose="02020603050405020304" pitchFamily="18" charset="0"/>
+              </a:rPr>
+              <a:t>One-hot encoded categorical features </a:t>
+            </a:r>
+          </a:p>
+          <a:p>
+            <a:pPr lvl="0"/>
+            <a:r>
+              <a:rPr lang="en-IN" sz="2000" dirty="0">
+                <a:latin typeface="Times New Roman" panose="02020603050405020304" pitchFamily="18" charset="0"/>
+                <a:cs typeface="Times New Roman" panose="02020603050405020304" pitchFamily="18" charset="0"/>
+              </a:rPr>
+              <a:t>Final model features: </a:t>
+            </a:r>
+            <a:r>
+              <a:rPr lang="en-IN" sz="2000" b="1" dirty="0">
+                <a:latin typeface="Times New Roman" panose="02020603050405020304" pitchFamily="18" charset="0"/>
+                <a:cs typeface="Times New Roman" panose="02020603050405020304" pitchFamily="18" charset="0"/>
+              </a:rPr>
+              <a:t>44</a:t>
+            </a:r>
+            <a:r>
+              <a:rPr lang="en-IN" sz="2000" dirty="0">
+                <a:latin typeface="Times New Roman" panose="02020603050405020304" pitchFamily="18" charset="0"/>
+                <a:cs typeface="Times New Roman" panose="02020603050405020304" pitchFamily="18" charset="0"/>
+              </a:rPr>
+              <a:t> </a:t>
+            </a:r>
+          </a:p>
+          <a:p>
+            <a:pPr lvl="0"/>
+            <a:r>
+              <a:rPr lang="en-IN" sz="2000" dirty="0">
+                <a:latin typeface="Times New Roman" panose="02020603050405020304" pitchFamily="18" charset="0"/>
+                <a:cs typeface="Times New Roman" panose="02020603050405020304" pitchFamily="18" charset="0"/>
+              </a:rPr>
+              <a:t>Applied SMOTE to training data </a:t>
+            </a:r>
+          </a:p>
+          <a:p>
+            <a:pPr marL="0" indent="0">
+              <a:buNone/>
+            </a:pPr>
+            <a:r>
+              <a:rPr lang="en-IN" sz="2000" b="1" dirty="0">
+                <a:latin typeface="Times New Roman" panose="02020603050405020304" pitchFamily="18" charset="0"/>
+                <a:cs typeface="Times New Roman" panose="02020603050405020304" pitchFamily="18" charset="0"/>
+              </a:rPr>
+              <a:t>Models</a:t>
+            </a:r>
+            <a:endParaRPr lang="en-IN" sz="2000" dirty="0">
+              <a:latin typeface="Times New Roman" panose="02020603050405020304" pitchFamily="18" charset="0"/>
+              <a:cs typeface="Times New Roman" panose="02020603050405020304" pitchFamily="18" charset="0"/>
+            </a:endParaRPr>
+          </a:p>
+          <a:p>
+            <a:pPr lvl="0"/>
+            <a:r>
+              <a:rPr lang="en-IN" sz="2000" dirty="0">
+                <a:latin typeface="Times New Roman" panose="02020603050405020304" pitchFamily="18" charset="0"/>
+                <a:cs typeface="Times New Roman" panose="02020603050405020304" pitchFamily="18" charset="0"/>
+              </a:rPr>
+              <a:t>Logistic Regression </a:t>
+            </a:r>
+          </a:p>
+          <a:p>
+            <a:pPr lvl="0"/>
+            <a:r>
+              <a:rPr lang="en-IN" sz="2000" dirty="0">
+                <a:latin typeface="Times New Roman" panose="02020603050405020304" pitchFamily="18" charset="0"/>
+                <a:cs typeface="Times New Roman" panose="02020603050405020304" pitchFamily="18" charset="0"/>
+              </a:rPr>
+              <a:t>Random Forest </a:t>
+            </a:r>
+          </a:p>
+          <a:p>
+            <a:pPr lvl="0"/>
+            <a:r>
+              <a:rPr lang="en-IN" sz="2000" dirty="0" err="1">
+                <a:latin typeface="Times New Roman" panose="02020603050405020304" pitchFamily="18" charset="0"/>
+                <a:cs typeface="Times New Roman" panose="02020603050405020304" pitchFamily="18" charset="0"/>
+              </a:rPr>
+              <a:t>XGBoost</a:t>
+            </a:r>
+            <a:r>
+              <a:rPr lang="en-IN" sz="2000" dirty="0">
+                <a:latin typeface="Times New Roman" panose="02020603050405020304" pitchFamily="18" charset="0"/>
+                <a:cs typeface="Times New Roman" panose="02020603050405020304" pitchFamily="18" charset="0"/>
+              </a:rPr>
+              <a:t> </a:t>
+            </a:r>
+          </a:p>
+          <a:p>
+            <a:endParaRPr lang="en-IN" sz="2000" dirty="0">
+              <a:latin typeface="Times New Roman" panose="02020603050405020304" pitchFamily="18" charset="0"/>
+              <a:cs typeface="Times New Roman" panose="02020603050405020304" pitchFamily="18" charset="0"/>
+            </a:endParaRPr>
+          </a:p>
+        </p:txBody>
+      </p:sp>
+      <p:sp>
+        <p:nvSpPr>
+          <p:cNvPr id="5" name="TextBox 4">
+            <a:extLst>
+              <a:ext uri="{FF2B5EF4-FFF2-40B4-BE49-F238E27FC236}">
+                <a16:creationId xmlns:a16="http://schemas.microsoft.com/office/drawing/2014/main" id="{40EA8AB1-FEA4-E72E-1FC9-1F94D5A56E2D}"/>
               </a:ext>
             </a:extLst>
           </p:cNvPr>
@@ -4476,8 +4801,8 @@
         </p:nvSpPr>
         <p:spPr>
           <a:xfrm>
-            <a:off x="6876206" y="1473279"/>
-            <a:ext cx="5315794" cy="5626498"/>
+            <a:off x="6993203" y="1011503"/>
+            <a:ext cx="5004587" cy="3477875"/>
           </a:xfrm>
           <a:prstGeom prst="rect">
             <a:avLst/>
@@ -4491,135 +4816,150 @@
           <a:lstStyle/>
           <a:p>
             <a:r>
-              <a:rPr lang="en-IN" sz="2800" b="1" dirty="0">
-                <a:latin typeface="Times New Roman" panose="02020603050405020304" pitchFamily="18" charset="0"/>
-                <a:cs typeface="Times New Roman" panose="02020603050405020304" pitchFamily="18" charset="0"/>
-              </a:rPr>
-              <a:t>Economic Feasibility</a:t>
-            </a:r>
-          </a:p>
-          <a:p>
-            <a:pPr marL="457200" lvl="0" indent="-457200">
+              <a:rPr lang="en-IN" sz="2000" b="1" dirty="0">
+                <a:latin typeface="Times New Roman" panose="02020603050405020304" pitchFamily="18" charset="0"/>
+                <a:cs typeface="Times New Roman" panose="02020603050405020304" pitchFamily="18" charset="0"/>
+              </a:rPr>
+              <a:t>Explainability</a:t>
+            </a:r>
+            <a:endParaRPr lang="en-IN" sz="2000" dirty="0">
+              <a:latin typeface="Times New Roman" panose="02020603050405020304" pitchFamily="18" charset="0"/>
+              <a:cs typeface="Times New Roman" panose="02020603050405020304" pitchFamily="18" charset="0"/>
+            </a:endParaRPr>
+          </a:p>
+          <a:p>
+            <a:pPr marL="342900" lvl="0" indent="-342900">
               <a:buFont typeface="Arial" panose="020B0604020202020204" pitchFamily="34" charset="0"/>
               <a:buChar char="•"/>
             </a:pPr>
             <a:r>
-              <a:rPr lang="en-IN" sz="2800" dirty="0">
-                <a:latin typeface="Times New Roman" panose="02020603050405020304" pitchFamily="18" charset="0"/>
-                <a:cs typeface="Times New Roman" panose="02020603050405020304" pitchFamily="18" charset="0"/>
-              </a:rPr>
-              <a:t>Public dataset </a:t>
-            </a:r>
-          </a:p>
-          <a:p>
-            <a:pPr marL="457200" lvl="0" indent="-457200">
+              <a:rPr lang="en-IN" sz="2000" dirty="0">
+                <a:latin typeface="Times New Roman" panose="02020603050405020304" pitchFamily="18" charset="0"/>
+                <a:cs typeface="Times New Roman" panose="02020603050405020304" pitchFamily="18" charset="0"/>
+              </a:rPr>
+              <a:t>SHAP </a:t>
+            </a:r>
+          </a:p>
+          <a:p>
+            <a:pPr marL="342900" lvl="0" indent="-342900">
               <a:buFont typeface="Arial" panose="020B0604020202020204" pitchFamily="34" charset="0"/>
               <a:buChar char="•"/>
             </a:pPr>
             <a:r>
-              <a:rPr lang="en-IN" sz="2800" dirty="0">
-                <a:latin typeface="Times New Roman" panose="02020603050405020304" pitchFamily="18" charset="0"/>
-                <a:cs typeface="Times New Roman" panose="02020603050405020304" pitchFamily="18" charset="0"/>
-              </a:rPr>
-              <a:t>Open-source libraries </a:t>
-            </a:r>
-          </a:p>
-          <a:p>
-            <a:pPr marL="457200" lvl="0" indent="-457200">
+              <a:rPr lang="en-IN" sz="2000" dirty="0">
+                <a:latin typeface="Times New Roman" panose="02020603050405020304" pitchFamily="18" charset="0"/>
+                <a:cs typeface="Times New Roman" panose="02020603050405020304" pitchFamily="18" charset="0"/>
+              </a:rPr>
+              <a:t>LIME </a:t>
+            </a:r>
+          </a:p>
+          <a:p>
+            <a:r>
+              <a:rPr lang="en-IN" sz="2000" b="1" dirty="0">
+                <a:latin typeface="Times New Roman" panose="02020603050405020304" pitchFamily="18" charset="0"/>
+                <a:cs typeface="Times New Roman" panose="02020603050405020304" pitchFamily="18" charset="0"/>
+              </a:rPr>
+              <a:t>Application</a:t>
+            </a:r>
+            <a:endParaRPr lang="en-IN" sz="2000" dirty="0">
+              <a:latin typeface="Times New Roman" panose="02020603050405020304" pitchFamily="18" charset="0"/>
+              <a:cs typeface="Times New Roman" panose="02020603050405020304" pitchFamily="18" charset="0"/>
+            </a:endParaRPr>
+          </a:p>
+          <a:p>
+            <a:pPr marL="342900" lvl="0" indent="-342900">
               <a:buFont typeface="Arial" panose="020B0604020202020204" pitchFamily="34" charset="0"/>
               <a:buChar char="•"/>
             </a:pPr>
             <a:r>
-              <a:rPr lang="en-IN" sz="2800" dirty="0">
-                <a:latin typeface="Times New Roman" panose="02020603050405020304" pitchFamily="18" charset="0"/>
-                <a:cs typeface="Times New Roman" panose="02020603050405020304" pitchFamily="18" charset="0"/>
-              </a:rPr>
-              <a:t>No expensive software required </a:t>
-            </a:r>
-          </a:p>
-          <a:p>
-            <a:pPr marL="457200" lvl="0" indent="-457200">
+              <a:rPr lang="en-IN" sz="2000" dirty="0">
+                <a:latin typeface="Times New Roman" panose="02020603050405020304" pitchFamily="18" charset="0"/>
+                <a:cs typeface="Times New Roman" panose="02020603050405020304" pitchFamily="18" charset="0"/>
+              </a:rPr>
+              <a:t>Flask backend </a:t>
+            </a:r>
+          </a:p>
+          <a:p>
+            <a:pPr marL="342900" lvl="0" indent="-342900">
               <a:buFont typeface="Arial" panose="020B0604020202020204" pitchFamily="34" charset="0"/>
               <a:buChar char="•"/>
             </a:pPr>
             <a:r>
-              <a:rPr lang="en-IN" sz="2800" dirty="0">
-                <a:latin typeface="Times New Roman" panose="02020603050405020304" pitchFamily="18" charset="0"/>
-                <a:cs typeface="Times New Roman" panose="02020603050405020304" pitchFamily="18" charset="0"/>
-              </a:rPr>
-              <a:t>Can be developed on a normal laptop </a:t>
-            </a:r>
-          </a:p>
-          <a:p>
-            <a:r>
-              <a:rPr lang="en-IN" sz="2800" b="1" dirty="0">
-                <a:latin typeface="Times New Roman" panose="02020603050405020304" pitchFamily="18" charset="0"/>
-                <a:cs typeface="Times New Roman" panose="02020603050405020304" pitchFamily="18" charset="0"/>
-              </a:rPr>
-              <a:t>Operational Feasibility</a:t>
-            </a:r>
-          </a:p>
-          <a:p>
-            <a:pPr marL="457200" lvl="0" indent="-457200">
+              <a:rPr lang="en-IN" sz="2000" dirty="0">
+                <a:latin typeface="Times New Roman" panose="02020603050405020304" pitchFamily="18" charset="0"/>
+                <a:cs typeface="Times New Roman" panose="02020603050405020304" pitchFamily="18" charset="0"/>
+              </a:rPr>
+              <a:t>HTML/CSS/JavaScript frontend </a:t>
+            </a:r>
+          </a:p>
+          <a:p>
+            <a:r>
+              <a:rPr lang="en-IN" sz="2000" b="1" dirty="0">
+                <a:latin typeface="Times New Roman" panose="02020603050405020304" pitchFamily="18" charset="0"/>
+                <a:cs typeface="Times New Roman" panose="02020603050405020304" pitchFamily="18" charset="0"/>
+              </a:rPr>
+              <a:t>Output</a:t>
+            </a:r>
+            <a:endParaRPr lang="en-IN" sz="2000" dirty="0">
+              <a:latin typeface="Times New Roman" panose="02020603050405020304" pitchFamily="18" charset="0"/>
+              <a:cs typeface="Times New Roman" panose="02020603050405020304" pitchFamily="18" charset="0"/>
+            </a:endParaRPr>
+          </a:p>
+          <a:p>
+            <a:pPr marL="342900" lvl="0" indent="-342900">
               <a:buFont typeface="Arial" panose="020B0604020202020204" pitchFamily="34" charset="0"/>
               <a:buChar char="•"/>
             </a:pPr>
             <a:r>
-              <a:rPr lang="en-IN" sz="2800" dirty="0">
-                <a:latin typeface="Times New Roman" panose="02020603050405020304" pitchFamily="18" charset="0"/>
-                <a:cs typeface="Times New Roman" panose="02020603050405020304" pitchFamily="18" charset="0"/>
-              </a:rPr>
-              <a:t>Simple HR dashboard </a:t>
-            </a:r>
-          </a:p>
-          <a:p>
-            <a:pPr marL="457200" lvl="0" indent="-457200">
+              <a:rPr lang="en-IN" sz="2000" dirty="0">
+                <a:latin typeface="Times New Roman" panose="02020603050405020304" pitchFamily="18" charset="0"/>
+                <a:cs typeface="Times New Roman" panose="02020603050405020304" pitchFamily="18" charset="0"/>
+              </a:rPr>
+              <a:t>Attrition / No Attrition </a:t>
+            </a:r>
+          </a:p>
+          <a:p>
+            <a:pPr marL="342900" lvl="0" indent="-342900">
               <a:buFont typeface="Arial" panose="020B0604020202020204" pitchFamily="34" charset="0"/>
               <a:buChar char="•"/>
             </a:pPr>
             <a:r>
-              <a:rPr lang="en-IN" sz="2800" dirty="0">
-                <a:latin typeface="Times New Roman" panose="02020603050405020304" pitchFamily="18" charset="0"/>
-                <a:cs typeface="Times New Roman" panose="02020603050405020304" pitchFamily="18" charset="0"/>
-              </a:rPr>
-              <a:t>Easy-to-understand output </a:t>
-            </a:r>
-          </a:p>
-          <a:p>
-            <a:pPr marL="457200" lvl="0" indent="-457200">
+              <a:rPr lang="en-IN" sz="2000" dirty="0">
+                <a:latin typeface="Times New Roman" panose="02020603050405020304" pitchFamily="18" charset="0"/>
+                <a:cs typeface="Times New Roman" panose="02020603050405020304" pitchFamily="18" charset="0"/>
+              </a:rPr>
+              <a:t>Attrition probability </a:t>
+            </a:r>
+          </a:p>
+          <a:p>
+            <a:pPr marL="342900" lvl="0" indent="-342900">
               <a:buFont typeface="Arial" panose="020B0604020202020204" pitchFamily="34" charset="0"/>
               <a:buChar char="•"/>
             </a:pPr>
             <a:r>
-              <a:rPr lang="en-IN" sz="2800" dirty="0">
-                <a:latin typeface="Times New Roman" panose="02020603050405020304" pitchFamily="18" charset="0"/>
-                <a:cs typeface="Times New Roman" panose="02020603050405020304" pitchFamily="18" charset="0"/>
-              </a:rPr>
-              <a:t>Can support HR analysis </a:t>
-            </a:r>
-          </a:p>
-          <a:p>
-            <a:pPr marL="457200" lvl="0" indent="-457200">
+              <a:rPr lang="en-IN" sz="2000" dirty="0">
+                <a:latin typeface="Times New Roman" panose="02020603050405020304" pitchFamily="18" charset="0"/>
+                <a:cs typeface="Times New Roman" panose="02020603050405020304" pitchFamily="18" charset="0"/>
+              </a:rPr>
+              <a:t>Top contributing factors </a:t>
+            </a:r>
+          </a:p>
+          <a:p>
+            <a:pPr marL="342900" indent="-342900">
               <a:buFont typeface="Arial" panose="020B0604020202020204" pitchFamily="34" charset="0"/>
               <a:buChar char="•"/>
             </a:pPr>
-            <a:r>
-              <a:rPr lang="en-IN" sz="2800" dirty="0">
-                <a:latin typeface="Times New Roman" panose="02020603050405020304" pitchFamily="18" charset="0"/>
-                <a:cs typeface="Times New Roman" panose="02020603050405020304" pitchFamily="18" charset="0"/>
-              </a:rPr>
-              <a:t>Can later be adapted to organization-specific data</a:t>
-            </a:r>
-          </a:p>
-          <a:p>
-            <a:endParaRPr lang="en-IN" dirty="0"/>
+            <a:endParaRPr lang="en-IN" sz="2000" dirty="0">
+              <a:latin typeface="Times New Roman" panose="02020603050405020304" pitchFamily="18" charset="0"/>
+              <a:cs typeface="Times New Roman" panose="02020603050405020304" pitchFamily="18" charset="0"/>
+            </a:endParaRPr>
           </a:p>
         </p:txBody>
       </p:sp>
     </p:spTree>
     <p:extLst>
       <p:ext uri="{BB962C8B-B14F-4D97-AF65-F5344CB8AC3E}">
-        <p14:creationId xmlns:p14="http://schemas.microsoft.com/office/powerpoint/2010/main" val="458062606"/>
+        <p14:creationId xmlns:p14="http://schemas.microsoft.com/office/powerpoint/2010/main" val="1838076557"/>
       </p:ext>
     </p:extLst>
   </p:cSld>
@@ -4634,13 +4974,7 @@
   <p:cSld>
     <p:spTree>
       <p:nvGrpSpPr>
-        <p:cNvPr id="1" name="">
-          <a:extLst>
-            <a:ext uri="{FF2B5EF4-FFF2-40B4-BE49-F238E27FC236}">
-              <a16:creationId xmlns:a16="http://schemas.microsoft.com/office/drawing/2014/main" id="{BFD09C9F-3FBC-3318-A1B3-5D49B8D20E53}"/>
-            </a:ext>
-          </a:extLst>
-        </p:cNvPr>
+        <p:cNvPr id="1" name=""/>
         <p:cNvGrpSpPr/>
         <p:nvPr/>
       </p:nvGrpSpPr>
@@ -4657,7 +4991,7 @@
           <p:cNvPr id="2" name="Title 1">
             <a:extLst>
               <a:ext uri="{FF2B5EF4-FFF2-40B4-BE49-F238E27FC236}">
-                <a16:creationId xmlns:a16="http://schemas.microsoft.com/office/drawing/2014/main" id="{374B0F76-0073-37AB-EDB8-DE5A94529686}"/>
+                <a16:creationId xmlns:a16="http://schemas.microsoft.com/office/drawing/2014/main" id="{826074BF-8971-DEFE-908D-0DBDC15BDDCE}"/>
               </a:ext>
             </a:extLst>
           </p:cNvPr>
@@ -4670,8 +5004,8 @@
         </p:nvSpPr>
         <p:spPr>
           <a:xfrm>
-            <a:off x="627807" y="146641"/>
-            <a:ext cx="10515600" cy="743484"/>
+            <a:off x="0" y="0"/>
+            <a:ext cx="10439400" cy="654907"/>
           </a:xfrm>
         </p:spPr>
         <p:txBody>
@@ -4681,22 +5015,21 @@
           <a:lstStyle/>
           <a:p>
             <a:r>
-              <a:rPr lang="en-IN" sz="3200" dirty="0"/>
-              <a:t>Project Plan</a:t>
-            </a:r>
-            <a:endParaRPr lang="en-IN" sz="3200" dirty="0">
-              <a:latin typeface="Times New Roman" panose="02020603050405020304" pitchFamily="18" charset="0"/>
-              <a:cs typeface="Times New Roman" panose="02020603050405020304" pitchFamily="18" charset="0"/>
-            </a:endParaRPr>
+              <a:rPr lang="en-IN" sz="3200" dirty="0">
+                <a:latin typeface="Times New Roman" panose="02020603050405020304" pitchFamily="18" charset="0"/>
+                <a:cs typeface="Times New Roman" panose="02020603050405020304" pitchFamily="18" charset="0"/>
+              </a:rPr>
+              <a:t>Results</a:t>
+            </a:r>
           </a:p>
         </p:txBody>
       </p:sp>
       <p:graphicFrame>
         <p:nvGraphicFramePr>
-          <p:cNvPr id="5" name="Content Placeholder 4">
-            <a:extLst>
-              <a:ext uri="{FF2B5EF4-FFF2-40B4-BE49-F238E27FC236}">
-                <a16:creationId xmlns:a16="http://schemas.microsoft.com/office/drawing/2014/main" id="{AC3C265D-39F5-677E-A7B6-FB5DA7C66CF8}"/>
+          <p:cNvPr id="4" name="Content Placeholder 3">
+            <a:extLst>
+              <a:ext uri="{FF2B5EF4-FFF2-40B4-BE49-F238E27FC236}">
+                <a16:creationId xmlns:a16="http://schemas.microsoft.com/office/drawing/2014/main" id="{1CA0775D-3821-B40A-2D82-E0A7D939CC77}"/>
               </a:ext>
             </a:extLst>
           </p:cNvPr>
@@ -4707,36 +5040,66 @@
             <p:ph idx="1"/>
             <p:extLst>
               <p:ext uri="{D42A27DB-BD31-4B8C-83A1-F6EECF244321}">
-                <p14:modId xmlns:p14="http://schemas.microsoft.com/office/powerpoint/2010/main" val="1388216484"/>
+                <p14:modId xmlns:p14="http://schemas.microsoft.com/office/powerpoint/2010/main" val="3751328306"/>
               </p:ext>
             </p:extLst>
           </p:nvPr>
         </p:nvGraphicFramePr>
         <p:xfrm>
-          <a:off x="838200" y="1011599"/>
-          <a:ext cx="10515600" cy="5699760"/>
+          <a:off x="492266" y="1432289"/>
+          <a:ext cx="11207467" cy="3566369"/>
         </p:xfrm>
         <a:graphic>
           <a:graphicData uri="http://schemas.openxmlformats.org/drawingml/2006/table">
             <a:tbl>
-              <a:tblPr/>
+              <a:tblPr>
+                <a:tableStyleId>{5C22544A-7EE6-4342-B048-85BDC9FD1C3A}</a:tableStyleId>
+              </a:tblPr>
               <a:tblGrid>
-                <a:gridCol w="5257800">
+                <a:gridCol w="2274326">
                   <a:extLst>
                     <a:ext uri="{9D8B030D-6E8A-4147-A177-3AD203B41FA5}">
-                      <a16:colId xmlns:a16="http://schemas.microsoft.com/office/drawing/2014/main" val="807730449"/>
+                      <a16:colId xmlns:a16="http://schemas.microsoft.com/office/drawing/2014/main" val="4017122256"/>
                     </a:ext>
                   </a:extLst>
                 </a:gridCol>
-                <a:gridCol w="5257800">
+                <a:gridCol w="1940017">
                   <a:extLst>
                     <a:ext uri="{9D8B030D-6E8A-4147-A177-3AD203B41FA5}">
-                      <a16:colId xmlns:a16="http://schemas.microsoft.com/office/drawing/2014/main" val="3717975933"/>
+                      <a16:colId xmlns:a16="http://schemas.microsoft.com/office/drawing/2014/main" val="1979701389"/>
+                    </a:ext>
+                  </a:extLst>
+                </a:gridCol>
+                <a:gridCol w="1940017">
+                  <a:extLst>
+                    <a:ext uri="{9D8B030D-6E8A-4147-A177-3AD203B41FA5}">
+                      <a16:colId xmlns:a16="http://schemas.microsoft.com/office/drawing/2014/main" val="2196831959"/>
+                    </a:ext>
+                  </a:extLst>
+                </a:gridCol>
+                <a:gridCol w="1684369">
+                  <a:extLst>
+                    <a:ext uri="{9D8B030D-6E8A-4147-A177-3AD203B41FA5}">
+                      <a16:colId xmlns:a16="http://schemas.microsoft.com/office/drawing/2014/main" val="1895032013"/>
+                    </a:ext>
+                  </a:extLst>
+                </a:gridCol>
+                <a:gridCol w="1684369">
+                  <a:extLst>
+                    <a:ext uri="{9D8B030D-6E8A-4147-A177-3AD203B41FA5}">
+                      <a16:colId xmlns:a16="http://schemas.microsoft.com/office/drawing/2014/main" val="2609645"/>
+                    </a:ext>
+                  </a:extLst>
+                </a:gridCol>
+                <a:gridCol w="1684369">
+                  <a:extLst>
+                    <a:ext uri="{9D8B030D-6E8A-4147-A177-3AD203B41FA5}">
+                      <a16:colId xmlns:a16="http://schemas.microsoft.com/office/drawing/2014/main" val="2383775844"/>
                     </a:ext>
                   </a:extLst>
                 </a:gridCol>
               </a:tblGrid>
-              <a:tr h="0">
+              <a:tr h="992303">
                 <a:tc>
                   <a:txBody>
                     <a:bodyPr/>
@@ -4746,30 +5109,100 @@
                         <a:buNone/>
                       </a:pPr>
                       <a:r>
-                        <a:rPr lang="en-IN" sz="2800">
-                          <a:latin typeface="Times New Roman" panose="02020603050405020304" pitchFamily="18" charset="0"/>
-                          <a:cs typeface="Times New Roman" panose="02020603050405020304" pitchFamily="18" charset="0"/>
-                        </a:rPr>
-                        <a:t>Phase</a:t>
+                        <a:rPr lang="en-IN" sz="2700" dirty="0"/>
+                        <a:t>Model</a:t>
                       </a:r>
                     </a:p>
                   </a:txBody>
-                  <a:tcPr anchor="ctr">
-                    <a:lnL>
-                      <a:noFill/>
-                    </a:lnL>
-                    <a:lnR>
-                      <a:noFill/>
-                    </a:lnR>
-                    <a:lnT>
-                      <a:noFill/>
-                    </a:lnT>
-                    <a:lnB>
-                      <a:noFill/>
-                    </a:lnB>
-                    <a:noFill/>
-                  </a:tcPr>
+                  <a:tcPr marL="136639" marR="136639" marT="68320" marB="68320" anchor="ctr"/>
                 </a:tc>
+                <a:tc>
+                  <a:txBody>
+                    <a:bodyPr/>
+                    <a:lstStyle/>
+                    <a:p>
+                      <a:pPr algn="r">
+                        <a:buNone/>
+                      </a:pPr>
+                      <a:r>
+                        <a:rPr lang="en-IN" sz="2700"/>
+                        <a:t>Accuracy</a:t>
+                      </a:r>
+                    </a:p>
+                  </a:txBody>
+                  <a:tcPr marL="136639" marR="136639" marT="68320" marB="68320" anchor="ctr"/>
+                </a:tc>
+                <a:tc>
+                  <a:txBody>
+                    <a:bodyPr/>
+                    <a:lstStyle/>
+                    <a:p>
+                      <a:pPr algn="r">
+                        <a:buNone/>
+                      </a:pPr>
+                      <a:r>
+                        <a:rPr lang="en-IN" sz="2700"/>
+                        <a:t>Precision</a:t>
+                      </a:r>
+                    </a:p>
+                  </a:txBody>
+                  <a:tcPr marL="136639" marR="136639" marT="68320" marB="68320" anchor="ctr"/>
+                </a:tc>
+                <a:tc>
+                  <a:txBody>
+                    <a:bodyPr/>
+                    <a:lstStyle/>
+                    <a:p>
+                      <a:pPr algn="r">
+                        <a:buNone/>
+                      </a:pPr>
+                      <a:r>
+                        <a:rPr lang="en-IN" sz="2700"/>
+                        <a:t>Recall</a:t>
+                      </a:r>
+                    </a:p>
+                  </a:txBody>
+                  <a:tcPr marL="136639" marR="136639" marT="68320" marB="68320" anchor="ctr"/>
+                </a:tc>
+                <a:tc>
+                  <a:txBody>
+                    <a:bodyPr/>
+                    <a:lstStyle/>
+                    <a:p>
+                      <a:pPr algn="r">
+                        <a:buNone/>
+                      </a:pPr>
+                      <a:r>
+                        <a:rPr lang="en-IN" sz="2700"/>
+                        <a:t>F1</a:t>
+                      </a:r>
+                    </a:p>
+                  </a:txBody>
+                  <a:tcPr marL="136639" marR="136639" marT="68320" marB="68320" anchor="ctr"/>
+                </a:tc>
+                <a:tc>
+                  <a:txBody>
+                    <a:bodyPr/>
+                    <a:lstStyle/>
+                    <a:p>
+                      <a:pPr algn="r">
+                        <a:buNone/>
+                      </a:pPr>
+                      <a:r>
+                        <a:rPr lang="en-IN" sz="2700"/>
+                        <a:t>ROC-AUC</a:t>
+                      </a:r>
+                    </a:p>
+                  </a:txBody>
+                  <a:tcPr marL="136639" marR="136639" marT="68320" marB="68320" anchor="ctr"/>
+                </a:tc>
+                <a:extLst>
+                  <a:ext uri="{0D108BD9-81ED-4DB2-BD59-A6C34878D82A}">
+                    <a16:rowId xmlns:a16="http://schemas.microsoft.com/office/drawing/2014/main" val="537020171"/>
+                  </a:ext>
+                </a:extLst>
+              </a:tr>
+              <a:tr h="992303">
                 <a:tc>
                   <a:txBody>
                     <a:bodyPr/>
@@ -4779,37 +5212,100 @@
                         <a:buNone/>
                       </a:pPr>
                       <a:r>
-                        <a:rPr lang="en-IN" sz="2800">
-                          <a:latin typeface="Times New Roman" panose="02020603050405020304" pitchFamily="18" charset="0"/>
-                          <a:cs typeface="Times New Roman" panose="02020603050405020304" pitchFamily="18" charset="0"/>
-                        </a:rPr>
-                        <a:t>Activity</a:t>
+                        <a:rPr lang="en-IN" sz="2700"/>
+                        <a:t>Logistic Regression</a:t>
                       </a:r>
                     </a:p>
                   </a:txBody>
-                  <a:tcPr anchor="ctr">
-                    <a:lnL>
-                      <a:noFill/>
-                    </a:lnL>
-                    <a:lnR>
-                      <a:noFill/>
-                    </a:lnR>
-                    <a:lnT>
-                      <a:noFill/>
-                    </a:lnT>
-                    <a:lnB>
-                      <a:noFill/>
-                    </a:lnB>
-                    <a:noFill/>
-                  </a:tcPr>
+                  <a:tcPr marL="136639" marR="136639" marT="68320" marB="68320" anchor="ctr"/>
+                </a:tc>
+                <a:tc>
+                  <a:txBody>
+                    <a:bodyPr/>
+                    <a:lstStyle/>
+                    <a:p>
+                      <a:pPr algn="r">
+                        <a:buNone/>
+                      </a:pPr>
+                      <a:r>
+                        <a:rPr lang="en-IN" sz="2700"/>
+                        <a:t>85.71%</a:t>
+                      </a:r>
+                    </a:p>
+                  </a:txBody>
+                  <a:tcPr marL="136639" marR="136639" marT="68320" marB="68320" anchor="ctr"/>
+                </a:tc>
+                <a:tc>
+                  <a:txBody>
+                    <a:bodyPr/>
+                    <a:lstStyle/>
+                    <a:p>
+                      <a:pPr algn="r">
+                        <a:buNone/>
+                      </a:pPr>
+                      <a:r>
+                        <a:rPr lang="en-IN" sz="2700"/>
+                        <a:t>57.14%</a:t>
+                      </a:r>
+                    </a:p>
+                  </a:txBody>
+                  <a:tcPr marL="136639" marR="136639" marT="68320" marB="68320" anchor="ctr"/>
+                </a:tc>
+                <a:tc>
+                  <a:txBody>
+                    <a:bodyPr/>
+                    <a:lstStyle/>
+                    <a:p>
+                      <a:pPr algn="r">
+                        <a:buNone/>
+                      </a:pPr>
+                      <a:r>
+                        <a:rPr lang="en-IN" sz="2700"/>
+                        <a:t>42.55%</a:t>
+                      </a:r>
+                    </a:p>
+                  </a:txBody>
+                  <a:tcPr marL="136639" marR="136639" marT="68320" marB="68320" anchor="ctr"/>
+                </a:tc>
+                <a:tc>
+                  <a:txBody>
+                    <a:bodyPr/>
+                    <a:lstStyle/>
+                    <a:p>
+                      <a:pPr algn="r">
+                        <a:buNone/>
+                      </a:pPr>
+                      <a:r>
+                        <a:rPr lang="en-IN" sz="2700"/>
+                        <a:t>48.78%</a:t>
+                      </a:r>
+                    </a:p>
+                  </a:txBody>
+                  <a:tcPr marL="136639" marR="136639" marT="68320" marB="68320" anchor="ctr"/>
+                </a:tc>
+                <a:tc>
+                  <a:txBody>
+                    <a:bodyPr/>
+                    <a:lstStyle/>
+                    <a:p>
+                      <a:pPr algn="r">
+                        <a:buNone/>
+                      </a:pPr>
+                      <a:r>
+                        <a:rPr lang="en-IN" sz="2700"/>
+                        <a:t>72.08%</a:t>
+                      </a:r>
+                    </a:p>
+                  </a:txBody>
+                  <a:tcPr marL="136639" marR="136639" marT="68320" marB="68320" anchor="ctr"/>
                 </a:tc>
                 <a:extLst>
                   <a:ext uri="{0D108BD9-81ED-4DB2-BD59-A6C34878D82A}">
-                    <a16:rowId xmlns:a16="http://schemas.microsoft.com/office/drawing/2014/main" val="1835692740"/>
+                    <a16:rowId xmlns:a16="http://schemas.microsoft.com/office/drawing/2014/main" val="1715346182"/>
                   </a:ext>
                 </a:extLst>
               </a:tr>
-              <a:tr h="0">
+              <a:tr h="992303">
                 <a:tc>
                   <a:txBody>
                     <a:bodyPr/>
@@ -4819,30 +5315,100 @@
                         <a:buNone/>
                       </a:pPr>
                       <a:r>
-                        <a:rPr lang="en-IN" sz="2800">
-                          <a:latin typeface="Times New Roman" panose="02020603050405020304" pitchFamily="18" charset="0"/>
-                          <a:cs typeface="Times New Roman" panose="02020603050405020304" pitchFamily="18" charset="0"/>
-                        </a:rPr>
-                        <a:t>Phase 1</a:t>
+                        <a:rPr lang="en-IN" sz="2700"/>
+                        <a:t>Random Forest</a:t>
                       </a:r>
                     </a:p>
                   </a:txBody>
-                  <a:tcPr anchor="ctr">
-                    <a:lnL>
-                      <a:noFill/>
-                    </a:lnL>
-                    <a:lnR>
-                      <a:noFill/>
-                    </a:lnR>
-                    <a:lnT>
-                      <a:noFill/>
-                    </a:lnT>
-                    <a:lnB>
-                      <a:noFill/>
-                    </a:lnB>
-                    <a:noFill/>
-                  </a:tcPr>
+                  <a:tcPr marL="136639" marR="136639" marT="68320" marB="68320" anchor="ctr"/>
                 </a:tc>
+                <a:tc>
+                  <a:txBody>
+                    <a:bodyPr/>
+                    <a:lstStyle/>
+                    <a:p>
+                      <a:pPr algn="r">
+                        <a:buNone/>
+                      </a:pPr>
+                      <a:r>
+                        <a:rPr lang="en-IN" sz="2700"/>
+                        <a:t>81.97%</a:t>
+                      </a:r>
+                    </a:p>
+                  </a:txBody>
+                  <a:tcPr marL="136639" marR="136639" marT="68320" marB="68320" anchor="ctr"/>
+                </a:tc>
+                <a:tc>
+                  <a:txBody>
+                    <a:bodyPr/>
+                    <a:lstStyle/>
+                    <a:p>
+                      <a:pPr algn="r">
+                        <a:buNone/>
+                      </a:pPr>
+                      <a:r>
+                        <a:rPr lang="en-IN" sz="2700"/>
+                        <a:t>39.29%</a:t>
+                      </a:r>
+                    </a:p>
+                  </a:txBody>
+                  <a:tcPr marL="136639" marR="136639" marT="68320" marB="68320" anchor="ctr"/>
+                </a:tc>
+                <a:tc>
+                  <a:txBody>
+                    <a:bodyPr/>
+                    <a:lstStyle/>
+                    <a:p>
+                      <a:pPr algn="r">
+                        <a:buNone/>
+                      </a:pPr>
+                      <a:r>
+                        <a:rPr lang="en-IN" sz="2700"/>
+                        <a:t>23.40%</a:t>
+                      </a:r>
+                    </a:p>
+                  </a:txBody>
+                  <a:tcPr marL="136639" marR="136639" marT="68320" marB="68320" anchor="ctr"/>
+                </a:tc>
+                <a:tc>
+                  <a:txBody>
+                    <a:bodyPr/>
+                    <a:lstStyle/>
+                    <a:p>
+                      <a:pPr algn="r">
+                        <a:buNone/>
+                      </a:pPr>
+                      <a:r>
+                        <a:rPr lang="en-IN" sz="2700"/>
+                        <a:t>29.33%</a:t>
+                      </a:r>
+                    </a:p>
+                  </a:txBody>
+                  <a:tcPr marL="136639" marR="136639" marT="68320" marB="68320" anchor="ctr"/>
+                </a:tc>
+                <a:tc>
+                  <a:txBody>
+                    <a:bodyPr/>
+                    <a:lstStyle/>
+                    <a:p>
+                      <a:pPr algn="r">
+                        <a:buNone/>
+                      </a:pPr>
+                      <a:r>
+                        <a:rPr lang="en-IN" sz="2700"/>
+                        <a:t>74.48%</a:t>
+                      </a:r>
+                    </a:p>
+                  </a:txBody>
+                  <a:tcPr marL="136639" marR="136639" marT="68320" marB="68320" anchor="ctr"/>
+                </a:tc>
+                <a:extLst>
+                  <a:ext uri="{0D108BD9-81ED-4DB2-BD59-A6C34878D82A}">
+                    <a16:rowId xmlns:a16="http://schemas.microsoft.com/office/drawing/2014/main" val="3690926305"/>
+                  </a:ext>
+                </a:extLst>
+              </a:tr>
+              <a:tr h="589460">
                 <a:tc>
                   <a:txBody>
                     <a:bodyPr/>
@@ -4852,690 +5418,96 @@
                         <a:buNone/>
                       </a:pPr>
                       <a:r>
-                        <a:rPr lang="en-IN" sz="2800">
-                          <a:latin typeface="Times New Roman" panose="02020603050405020304" pitchFamily="18" charset="0"/>
-                          <a:cs typeface="Times New Roman" panose="02020603050405020304" pitchFamily="18" charset="0"/>
-                        </a:rPr>
-                        <a:t>Requirement Analysis</a:t>
+                        <a:rPr lang="en-IN" sz="2700"/>
+                        <a:t>XGBoost</a:t>
                       </a:r>
                     </a:p>
                   </a:txBody>
-                  <a:tcPr anchor="ctr">
-                    <a:lnL>
-                      <a:noFill/>
-                    </a:lnL>
-                    <a:lnR>
-                      <a:noFill/>
-                    </a:lnR>
-                    <a:lnT>
-                      <a:noFill/>
-                    </a:lnT>
-                    <a:lnB>
-                      <a:noFill/>
-                    </a:lnB>
-                    <a:noFill/>
-                  </a:tcPr>
-                </a:tc>
-                <a:extLst>
-                  <a:ext uri="{0D108BD9-81ED-4DB2-BD59-A6C34878D82A}">
-                    <a16:rowId xmlns:a16="http://schemas.microsoft.com/office/drawing/2014/main" val="4017923113"/>
-                  </a:ext>
-                </a:extLst>
-              </a:tr>
-              <a:tr h="0">
-                <a:tc>
-                  <a:txBody>
-                    <a:bodyPr/>
-                    <a:lstStyle/>
-                    <a:p>
-                      <a:pPr>
-                        <a:buNone/>
-                      </a:pPr>
-                      <a:r>
-                        <a:rPr lang="en-IN" sz="2800">
-                          <a:latin typeface="Times New Roman" panose="02020603050405020304" pitchFamily="18" charset="0"/>
-                          <a:cs typeface="Times New Roman" panose="02020603050405020304" pitchFamily="18" charset="0"/>
-                        </a:rPr>
-                        <a:t>Phase 2</a:t>
-                      </a:r>
-                    </a:p>
-                  </a:txBody>
-                  <a:tcPr anchor="ctr">
-                    <a:lnL>
-                      <a:noFill/>
-                    </a:lnL>
-                    <a:lnR>
-                      <a:noFill/>
-                    </a:lnR>
-                    <a:lnT>
-                      <a:noFill/>
-                    </a:lnT>
-                    <a:lnB>
-                      <a:noFill/>
-                    </a:lnB>
-                    <a:noFill/>
-                  </a:tcPr>
+                  <a:tcPr marL="136639" marR="136639" marT="68320" marB="68320" anchor="ctr"/>
                 </a:tc>
                 <a:tc>
                   <a:txBody>
                     <a:bodyPr/>
                     <a:lstStyle/>
                     <a:p>
-                      <a:pPr>
+                      <a:pPr algn="r">
                         <a:buNone/>
                       </a:pPr>
                       <a:r>
-                        <a:rPr lang="en-IN" sz="2800">
-                          <a:latin typeface="Times New Roman" panose="02020603050405020304" pitchFamily="18" charset="0"/>
-                          <a:cs typeface="Times New Roman" panose="02020603050405020304" pitchFamily="18" charset="0"/>
-                        </a:rPr>
-                        <a:t>Literature Survey</a:t>
+                        <a:rPr lang="en-IN" sz="2700"/>
+                        <a:t>85.71%</a:t>
                       </a:r>
                     </a:p>
                   </a:txBody>
-                  <a:tcPr anchor="ctr">
-                    <a:lnL>
-                      <a:noFill/>
-                    </a:lnL>
-                    <a:lnR>
-                      <a:noFill/>
-                    </a:lnR>
-                    <a:lnT>
-                      <a:noFill/>
-                    </a:lnT>
-                    <a:lnB>
-                      <a:noFill/>
-                    </a:lnB>
-                    <a:noFill/>
-                  </a:tcPr>
-                </a:tc>
-                <a:extLst>
-                  <a:ext uri="{0D108BD9-81ED-4DB2-BD59-A6C34878D82A}">
-                    <a16:rowId xmlns:a16="http://schemas.microsoft.com/office/drawing/2014/main" val="1923241242"/>
-                  </a:ext>
-                </a:extLst>
-              </a:tr>
-              <a:tr h="0">
-                <a:tc>
-                  <a:txBody>
-                    <a:bodyPr/>
-                    <a:lstStyle/>
-                    <a:p>
-                      <a:pPr>
-                        <a:buNone/>
-                      </a:pPr>
-                      <a:r>
-                        <a:rPr lang="en-IN" sz="2800">
-                          <a:latin typeface="Times New Roman" panose="02020603050405020304" pitchFamily="18" charset="0"/>
-                          <a:cs typeface="Times New Roman" panose="02020603050405020304" pitchFamily="18" charset="0"/>
-                        </a:rPr>
-                        <a:t>Phase 3</a:t>
-                      </a:r>
-                    </a:p>
-                  </a:txBody>
-                  <a:tcPr anchor="ctr">
-                    <a:lnL>
-                      <a:noFill/>
-                    </a:lnL>
-                    <a:lnR>
-                      <a:noFill/>
-                    </a:lnR>
-                    <a:lnT>
-                      <a:noFill/>
-                    </a:lnT>
-                    <a:lnB>
-                      <a:noFill/>
-                    </a:lnB>
-                    <a:noFill/>
-                  </a:tcPr>
+                  <a:tcPr marL="136639" marR="136639" marT="68320" marB="68320" anchor="ctr"/>
                 </a:tc>
                 <a:tc>
                   <a:txBody>
                     <a:bodyPr/>
                     <a:lstStyle/>
                     <a:p>
-                      <a:pPr>
+                      <a:pPr algn="r">
                         <a:buNone/>
                       </a:pPr>
                       <a:r>
-                        <a:rPr lang="en-IN" sz="2800">
-                          <a:latin typeface="Times New Roman" panose="02020603050405020304" pitchFamily="18" charset="0"/>
-                          <a:cs typeface="Times New Roman" panose="02020603050405020304" pitchFamily="18" charset="0"/>
-                        </a:rPr>
-                        <a:t>Dataset Collection</a:t>
+                        <a:rPr lang="en-IN" sz="2700"/>
+                        <a:t>58.62%</a:t>
                       </a:r>
                     </a:p>
                   </a:txBody>
-                  <a:tcPr anchor="ctr">
-                    <a:lnL>
-                      <a:noFill/>
-                    </a:lnL>
-                    <a:lnR>
-                      <a:noFill/>
-                    </a:lnR>
-                    <a:lnT>
-                      <a:noFill/>
-                    </a:lnT>
-                    <a:lnB>
-                      <a:noFill/>
-                    </a:lnB>
-                    <a:noFill/>
-                  </a:tcPr>
-                </a:tc>
-                <a:extLst>
-                  <a:ext uri="{0D108BD9-81ED-4DB2-BD59-A6C34878D82A}">
-                    <a16:rowId xmlns:a16="http://schemas.microsoft.com/office/drawing/2014/main" val="1382090353"/>
-                  </a:ext>
-                </a:extLst>
-              </a:tr>
-              <a:tr h="0">
-                <a:tc>
-                  <a:txBody>
-                    <a:bodyPr/>
-                    <a:lstStyle/>
-                    <a:p>
-                      <a:pPr>
-                        <a:buNone/>
-                      </a:pPr>
-                      <a:r>
-                        <a:rPr lang="en-IN" sz="2800">
-                          <a:latin typeface="Times New Roman" panose="02020603050405020304" pitchFamily="18" charset="0"/>
-                          <a:cs typeface="Times New Roman" panose="02020603050405020304" pitchFamily="18" charset="0"/>
-                        </a:rPr>
-                        <a:t>Phase 4</a:t>
-                      </a:r>
-                    </a:p>
-                  </a:txBody>
-                  <a:tcPr anchor="ctr">
-                    <a:lnL>
-                      <a:noFill/>
-                    </a:lnL>
-                    <a:lnR>
-                      <a:noFill/>
-                    </a:lnR>
-                    <a:lnT>
-                      <a:noFill/>
-                    </a:lnT>
-                    <a:lnB>
-                      <a:noFill/>
-                    </a:lnB>
-                    <a:noFill/>
-                  </a:tcPr>
+                  <a:tcPr marL="136639" marR="136639" marT="68320" marB="68320" anchor="ctr"/>
                 </a:tc>
                 <a:tc>
                   <a:txBody>
                     <a:bodyPr/>
                     <a:lstStyle/>
                     <a:p>
-                      <a:pPr>
+                      <a:pPr algn="r">
                         <a:buNone/>
                       </a:pPr>
                       <a:r>
-                        <a:rPr lang="en-IN" sz="2800">
-                          <a:latin typeface="Times New Roman" panose="02020603050405020304" pitchFamily="18" charset="0"/>
-                          <a:cs typeface="Times New Roman" panose="02020603050405020304" pitchFamily="18" charset="0"/>
-                        </a:rPr>
-                        <a:t>Data Preprocessing</a:t>
+                        <a:rPr lang="en-IN" sz="2700"/>
+                        <a:t>36.17%</a:t>
                       </a:r>
                     </a:p>
                   </a:txBody>
-                  <a:tcPr anchor="ctr">
-                    <a:lnL>
-                      <a:noFill/>
-                    </a:lnL>
-                    <a:lnR>
-                      <a:noFill/>
-                    </a:lnR>
-                    <a:lnT>
-                      <a:noFill/>
-                    </a:lnT>
-                    <a:lnB>
-                      <a:noFill/>
-                    </a:lnB>
-                    <a:noFill/>
-                  </a:tcPr>
-                </a:tc>
-                <a:extLst>
-                  <a:ext uri="{0D108BD9-81ED-4DB2-BD59-A6C34878D82A}">
-                    <a16:rowId xmlns:a16="http://schemas.microsoft.com/office/drawing/2014/main" val="1154731016"/>
-                  </a:ext>
-                </a:extLst>
-              </a:tr>
-              <a:tr h="0">
-                <a:tc>
-                  <a:txBody>
-                    <a:bodyPr/>
-                    <a:lstStyle/>
-                    <a:p>
-                      <a:pPr>
-                        <a:buNone/>
-                      </a:pPr>
-                      <a:r>
-                        <a:rPr lang="en-IN" sz="2800">
-                          <a:latin typeface="Times New Roman" panose="02020603050405020304" pitchFamily="18" charset="0"/>
-                          <a:cs typeface="Times New Roman" panose="02020603050405020304" pitchFamily="18" charset="0"/>
-                        </a:rPr>
-                        <a:t>Phase 5</a:t>
-                      </a:r>
-                    </a:p>
-                  </a:txBody>
-                  <a:tcPr anchor="ctr">
-                    <a:lnL>
-                      <a:noFill/>
-                    </a:lnL>
-                    <a:lnR>
-                      <a:noFill/>
-                    </a:lnR>
-                    <a:lnT>
-                      <a:noFill/>
-                    </a:lnT>
-                    <a:lnB>
-                      <a:noFill/>
-                    </a:lnB>
-                    <a:noFill/>
-                  </a:tcPr>
+                  <a:tcPr marL="136639" marR="136639" marT="68320" marB="68320" anchor="ctr"/>
                 </a:tc>
                 <a:tc>
                   <a:txBody>
                     <a:bodyPr/>
                     <a:lstStyle/>
                     <a:p>
-                      <a:pPr>
+                      <a:pPr algn="r">
                         <a:buNone/>
                       </a:pPr>
                       <a:r>
-                        <a:rPr lang="en-IN" sz="2800">
-                          <a:latin typeface="Times New Roman" panose="02020603050405020304" pitchFamily="18" charset="0"/>
-                          <a:cs typeface="Times New Roman" panose="02020603050405020304" pitchFamily="18" charset="0"/>
-                        </a:rPr>
-                        <a:t>ML Model Development</a:t>
+                        <a:rPr lang="en-IN" sz="2700"/>
+                        <a:t>44.74%</a:t>
                       </a:r>
                     </a:p>
                   </a:txBody>
-                  <a:tcPr anchor="ctr">
-                    <a:lnL>
-                      <a:noFill/>
-                    </a:lnL>
-                    <a:lnR>
-                      <a:noFill/>
-                    </a:lnR>
-                    <a:lnT>
-                      <a:noFill/>
-                    </a:lnT>
-                    <a:lnB>
-                      <a:noFill/>
-                    </a:lnB>
-                    <a:noFill/>
-                  </a:tcPr>
-                </a:tc>
-                <a:extLst>
-                  <a:ext uri="{0D108BD9-81ED-4DB2-BD59-A6C34878D82A}">
-                    <a16:rowId xmlns:a16="http://schemas.microsoft.com/office/drawing/2014/main" val="1779051262"/>
-                  </a:ext>
-                </a:extLst>
-              </a:tr>
-              <a:tr h="0">
-                <a:tc>
-                  <a:txBody>
-                    <a:bodyPr/>
-                    <a:lstStyle/>
-                    <a:p>
-                      <a:pPr>
-                        <a:buNone/>
-                      </a:pPr>
-                      <a:r>
-                        <a:rPr lang="en-IN" sz="2800">
-                          <a:latin typeface="Times New Roman" panose="02020603050405020304" pitchFamily="18" charset="0"/>
-                          <a:cs typeface="Times New Roman" panose="02020603050405020304" pitchFamily="18" charset="0"/>
-                        </a:rPr>
-                        <a:t>Phase 6</a:t>
-                      </a:r>
-                    </a:p>
-                  </a:txBody>
-                  <a:tcPr anchor="ctr">
-                    <a:lnL>
-                      <a:noFill/>
-                    </a:lnL>
-                    <a:lnR>
-                      <a:noFill/>
-                    </a:lnR>
-                    <a:lnT>
-                      <a:noFill/>
-                    </a:lnT>
-                    <a:lnB>
-                      <a:noFill/>
-                    </a:lnB>
-                    <a:noFill/>
-                  </a:tcPr>
+                  <a:tcPr marL="136639" marR="136639" marT="68320" marB="68320" anchor="ctr"/>
                 </a:tc>
                 <a:tc>
                   <a:txBody>
                     <a:bodyPr/>
                     <a:lstStyle/>
                     <a:p>
-                      <a:pPr>
+                      <a:pPr algn="r">
                         <a:buNone/>
                       </a:pPr>
                       <a:r>
-                        <a:rPr lang="en-IN" sz="2800">
-                          <a:latin typeface="Times New Roman" panose="02020603050405020304" pitchFamily="18" charset="0"/>
-                          <a:cs typeface="Times New Roman" panose="02020603050405020304" pitchFamily="18" charset="0"/>
-                        </a:rPr>
-                        <a:t>SHAP &amp; LIME Integration</a:t>
+                        <a:rPr lang="en-IN" sz="2700" dirty="0"/>
+                        <a:t>76.17%</a:t>
                       </a:r>
                     </a:p>
                   </a:txBody>
-                  <a:tcPr anchor="ctr">
-                    <a:lnL>
-                      <a:noFill/>
-                    </a:lnL>
-                    <a:lnR>
-                      <a:noFill/>
-                    </a:lnR>
-                    <a:lnT>
-                      <a:noFill/>
-                    </a:lnT>
-                    <a:lnB>
-                      <a:noFill/>
-                    </a:lnB>
-                    <a:noFill/>
-                  </a:tcPr>
+                  <a:tcPr marL="136639" marR="136639" marT="68320" marB="68320" anchor="ctr"/>
                 </a:tc>
                 <a:extLst>
                   <a:ext uri="{0D108BD9-81ED-4DB2-BD59-A6C34878D82A}">
-                    <a16:rowId xmlns:a16="http://schemas.microsoft.com/office/drawing/2014/main" val="1107853729"/>
-                  </a:ext>
-                </a:extLst>
-              </a:tr>
-              <a:tr h="0">
-                <a:tc>
-                  <a:txBody>
-                    <a:bodyPr/>
-                    <a:lstStyle/>
-                    <a:p>
-                      <a:pPr>
-                        <a:buNone/>
-                      </a:pPr>
-                      <a:r>
-                        <a:rPr lang="en-IN" sz="2800">
-                          <a:latin typeface="Times New Roman" panose="02020603050405020304" pitchFamily="18" charset="0"/>
-                          <a:cs typeface="Times New Roman" panose="02020603050405020304" pitchFamily="18" charset="0"/>
-                        </a:rPr>
-                        <a:t>Phase 7</a:t>
-                      </a:r>
-                    </a:p>
-                  </a:txBody>
-                  <a:tcPr anchor="ctr">
-                    <a:lnL>
-                      <a:noFill/>
-                    </a:lnL>
-                    <a:lnR>
-                      <a:noFill/>
-                    </a:lnR>
-                    <a:lnT>
-                      <a:noFill/>
-                    </a:lnT>
-                    <a:lnB>
-                      <a:noFill/>
-                    </a:lnB>
-                    <a:noFill/>
-                  </a:tcPr>
-                </a:tc>
-                <a:tc>
-                  <a:txBody>
-                    <a:bodyPr/>
-                    <a:lstStyle/>
-                    <a:p>
-                      <a:pPr>
-                        <a:buNone/>
-                      </a:pPr>
-                      <a:r>
-                        <a:rPr lang="en-IN" sz="2800">
-                          <a:latin typeface="Times New Roman" panose="02020603050405020304" pitchFamily="18" charset="0"/>
-                          <a:cs typeface="Times New Roman" panose="02020603050405020304" pitchFamily="18" charset="0"/>
-                        </a:rPr>
-                        <a:t>Risk Profile Development</a:t>
-                      </a:r>
-                    </a:p>
-                  </a:txBody>
-                  <a:tcPr anchor="ctr">
-                    <a:lnL>
-                      <a:noFill/>
-                    </a:lnL>
-                    <a:lnR>
-                      <a:noFill/>
-                    </a:lnR>
-                    <a:lnT>
-                      <a:noFill/>
-                    </a:lnT>
-                    <a:lnB>
-                      <a:noFill/>
-                    </a:lnB>
-                    <a:noFill/>
-                  </a:tcPr>
-                </a:tc>
-                <a:extLst>
-                  <a:ext uri="{0D108BD9-81ED-4DB2-BD59-A6C34878D82A}">
-                    <a16:rowId xmlns:a16="http://schemas.microsoft.com/office/drawing/2014/main" val="1080741784"/>
-                  </a:ext>
-                </a:extLst>
-              </a:tr>
-              <a:tr h="0">
-                <a:tc>
-                  <a:txBody>
-                    <a:bodyPr/>
-                    <a:lstStyle/>
-                    <a:p>
-                      <a:pPr>
-                        <a:buNone/>
-                      </a:pPr>
-                      <a:r>
-                        <a:rPr lang="en-IN" sz="2800">
-                          <a:latin typeface="Times New Roman" panose="02020603050405020304" pitchFamily="18" charset="0"/>
-                          <a:cs typeface="Times New Roman" panose="02020603050405020304" pitchFamily="18" charset="0"/>
-                        </a:rPr>
-                        <a:t>Phase 8</a:t>
-                      </a:r>
-                    </a:p>
-                  </a:txBody>
-                  <a:tcPr anchor="ctr">
-                    <a:lnL>
-                      <a:noFill/>
-                    </a:lnL>
-                    <a:lnR>
-                      <a:noFill/>
-                    </a:lnR>
-                    <a:lnT>
-                      <a:noFill/>
-                    </a:lnT>
-                    <a:lnB>
-                      <a:noFill/>
-                    </a:lnB>
-                    <a:noFill/>
-                  </a:tcPr>
-                </a:tc>
-                <a:tc>
-                  <a:txBody>
-                    <a:bodyPr/>
-                    <a:lstStyle/>
-                    <a:p>
-                      <a:pPr>
-                        <a:buNone/>
-                      </a:pPr>
-                      <a:r>
-                        <a:rPr lang="en-IN" sz="2800">
-                          <a:latin typeface="Times New Roman" panose="02020603050405020304" pitchFamily="18" charset="0"/>
-                          <a:cs typeface="Times New Roman" panose="02020603050405020304" pitchFamily="18" charset="0"/>
-                        </a:rPr>
-                        <a:t>Model Evaluation</a:t>
-                      </a:r>
-                    </a:p>
-                  </a:txBody>
-                  <a:tcPr anchor="ctr">
-                    <a:lnL>
-                      <a:noFill/>
-                    </a:lnL>
-                    <a:lnR>
-                      <a:noFill/>
-                    </a:lnR>
-                    <a:lnT>
-                      <a:noFill/>
-                    </a:lnT>
-                    <a:lnB>
-                      <a:noFill/>
-                    </a:lnB>
-                    <a:noFill/>
-                  </a:tcPr>
-                </a:tc>
-                <a:extLst>
-                  <a:ext uri="{0D108BD9-81ED-4DB2-BD59-A6C34878D82A}">
-                    <a16:rowId xmlns:a16="http://schemas.microsoft.com/office/drawing/2014/main" val="682916503"/>
-                  </a:ext>
-                </a:extLst>
-              </a:tr>
-              <a:tr h="0">
-                <a:tc>
-                  <a:txBody>
-                    <a:bodyPr/>
-                    <a:lstStyle/>
-                    <a:p>
-                      <a:pPr>
-                        <a:buNone/>
-                      </a:pPr>
-                      <a:r>
-                        <a:rPr lang="en-IN" sz="2800">
-                          <a:latin typeface="Times New Roman" panose="02020603050405020304" pitchFamily="18" charset="0"/>
-                          <a:cs typeface="Times New Roman" panose="02020603050405020304" pitchFamily="18" charset="0"/>
-                        </a:rPr>
-                        <a:t>Phase 9</a:t>
-                      </a:r>
-                    </a:p>
-                  </a:txBody>
-                  <a:tcPr anchor="ctr">
-                    <a:lnL>
-                      <a:noFill/>
-                    </a:lnL>
-                    <a:lnR>
-                      <a:noFill/>
-                    </a:lnR>
-                    <a:lnT>
-                      <a:noFill/>
-                    </a:lnT>
-                    <a:lnB>
-                      <a:noFill/>
-                    </a:lnB>
-                    <a:noFill/>
-                  </a:tcPr>
-                </a:tc>
-                <a:tc>
-                  <a:txBody>
-                    <a:bodyPr/>
-                    <a:lstStyle/>
-                    <a:p>
-                      <a:pPr>
-                        <a:buNone/>
-                      </a:pPr>
-                      <a:r>
-                        <a:rPr lang="en-IN" sz="2800">
-                          <a:latin typeface="Times New Roman" panose="02020603050405020304" pitchFamily="18" charset="0"/>
-                          <a:cs typeface="Times New Roman" panose="02020603050405020304" pitchFamily="18" charset="0"/>
-                        </a:rPr>
-                        <a:t>Streamlit Dashboard</a:t>
-                      </a:r>
-                    </a:p>
-                  </a:txBody>
-                  <a:tcPr anchor="ctr">
-                    <a:lnL>
-                      <a:noFill/>
-                    </a:lnL>
-                    <a:lnR>
-                      <a:noFill/>
-                    </a:lnR>
-                    <a:lnT>
-                      <a:noFill/>
-                    </a:lnT>
-                    <a:lnB>
-                      <a:noFill/>
-                    </a:lnB>
-                    <a:noFill/>
-                  </a:tcPr>
-                </a:tc>
-                <a:extLst>
-                  <a:ext uri="{0D108BD9-81ED-4DB2-BD59-A6C34878D82A}">
-                    <a16:rowId xmlns:a16="http://schemas.microsoft.com/office/drawing/2014/main" val="3246512898"/>
-                  </a:ext>
-                </a:extLst>
-              </a:tr>
-              <a:tr h="0">
-                <a:tc>
-                  <a:txBody>
-                    <a:bodyPr/>
-                    <a:lstStyle/>
-                    <a:p>
-                      <a:pPr>
-                        <a:buNone/>
-                      </a:pPr>
-                      <a:r>
-                        <a:rPr lang="en-IN" sz="2800">
-                          <a:latin typeface="Times New Roman" panose="02020603050405020304" pitchFamily="18" charset="0"/>
-                          <a:cs typeface="Times New Roman" panose="02020603050405020304" pitchFamily="18" charset="0"/>
-                        </a:rPr>
-                        <a:t>Phase 10</a:t>
-                      </a:r>
-                    </a:p>
-                  </a:txBody>
-                  <a:tcPr anchor="ctr">
-                    <a:lnL>
-                      <a:noFill/>
-                    </a:lnL>
-                    <a:lnR>
-                      <a:noFill/>
-                    </a:lnR>
-                    <a:lnT>
-                      <a:noFill/>
-                    </a:lnT>
-                    <a:lnB>
-                      <a:noFill/>
-                    </a:lnB>
-                    <a:noFill/>
-                  </a:tcPr>
-                </a:tc>
-                <a:tc>
-                  <a:txBody>
-                    <a:bodyPr/>
-                    <a:lstStyle/>
-                    <a:p>
-                      <a:pPr>
-                        <a:buNone/>
-                      </a:pPr>
-                      <a:r>
-                        <a:rPr lang="en-IN" sz="2800" dirty="0">
-                          <a:latin typeface="Times New Roman" panose="02020603050405020304" pitchFamily="18" charset="0"/>
-                          <a:cs typeface="Times New Roman" panose="02020603050405020304" pitchFamily="18" charset="0"/>
-                        </a:rPr>
-                        <a:t>Testing &amp; Documentation</a:t>
-                      </a:r>
-                    </a:p>
-                  </a:txBody>
-                  <a:tcPr anchor="ctr">
-                    <a:lnL>
-                      <a:noFill/>
-                    </a:lnL>
-                    <a:lnR>
-                      <a:noFill/>
-                    </a:lnR>
-                    <a:lnT>
-                      <a:noFill/>
-                    </a:lnT>
-                    <a:lnB>
-                      <a:noFill/>
-                    </a:lnB>
-                    <a:noFill/>
-                  </a:tcPr>
-                </a:tc>
-                <a:extLst>
-                  <a:ext uri="{0D108BD9-81ED-4DB2-BD59-A6C34878D82A}">
-                    <a16:rowId xmlns:a16="http://schemas.microsoft.com/office/drawing/2014/main" val="4172596847"/>
+                    <a16:rowId xmlns:a16="http://schemas.microsoft.com/office/drawing/2014/main" val="684235651"/>
                   </a:ext>
                 </a:extLst>
               </a:tr>
@@ -5546,7 +5518,7 @@
     </p:spTree>
     <p:extLst>
       <p:ext uri="{BB962C8B-B14F-4D97-AF65-F5344CB8AC3E}">
-        <p14:creationId xmlns:p14="http://schemas.microsoft.com/office/powerpoint/2010/main" val="79530342"/>
+        <p14:creationId xmlns:p14="http://schemas.microsoft.com/office/powerpoint/2010/main" val="3432301486"/>
       </p:ext>
     </p:extLst>
   </p:cSld>
@@ -5561,13 +5533,7 @@
   <p:cSld>
     <p:spTree>
       <p:nvGrpSpPr>
-        <p:cNvPr id="1" name="">
-          <a:extLst>
-            <a:ext uri="{FF2B5EF4-FFF2-40B4-BE49-F238E27FC236}">
-              <a16:creationId xmlns:a16="http://schemas.microsoft.com/office/drawing/2014/main" id="{7D5308A9-8967-0352-9C0D-E3F9B834F326}"/>
-            </a:ext>
-          </a:extLst>
-        </p:cNvPr>
+        <p:cNvPr id="1" name=""/>
         <p:cNvGrpSpPr/>
         <p:nvPr/>
       </p:nvGrpSpPr>
@@ -5584,7 +5550,7 @@
           <p:cNvPr id="2" name="Title 1">
             <a:extLst>
               <a:ext uri="{FF2B5EF4-FFF2-40B4-BE49-F238E27FC236}">
-                <a16:creationId xmlns:a16="http://schemas.microsoft.com/office/drawing/2014/main" id="{4D66816D-656A-3453-CFAB-F070FCD7BD6D}"/>
+                <a16:creationId xmlns:a16="http://schemas.microsoft.com/office/drawing/2014/main" id="{F8C632F5-8C03-21C2-0AF1-453456239D4E}"/>
               </a:ext>
             </a:extLst>
           </p:cNvPr>
@@ -5597,8 +5563,8 @@
         </p:nvSpPr>
         <p:spPr>
           <a:xfrm>
-            <a:off x="627807" y="146641"/>
-            <a:ext cx="10515600" cy="743484"/>
+            <a:off x="0" y="50842"/>
+            <a:ext cx="10576965" cy="630195"/>
           </a:xfrm>
         </p:spPr>
         <p:txBody>
@@ -5608,22 +5574,306 @@
           <a:lstStyle/>
           <a:p>
             <a:r>
-              <a:rPr lang="en-IN" sz="3200" dirty="0"/>
-              <a:t>Expected Outcome</a:t>
-            </a:r>
-            <a:endParaRPr lang="en-IN" sz="3200" dirty="0">
+              <a:rPr lang="en-IN" sz="3200" dirty="0">
+                <a:latin typeface="Times New Roman" panose="02020603050405020304" pitchFamily="18" charset="0"/>
+                <a:cs typeface="Times New Roman" panose="02020603050405020304" pitchFamily="18" charset="0"/>
+              </a:rPr>
+              <a:t>Performance Evaluation</a:t>
+            </a:r>
+          </a:p>
+        </p:txBody>
+      </p:sp>
+      <p:sp>
+        <p:nvSpPr>
+          <p:cNvPr id="3" name="Content Placeholder 2">
+            <a:extLst>
+              <a:ext uri="{FF2B5EF4-FFF2-40B4-BE49-F238E27FC236}">
+                <a16:creationId xmlns:a16="http://schemas.microsoft.com/office/drawing/2014/main" id="{CE4EADA0-CAEF-177D-4BE5-0862EB34612E}"/>
+              </a:ext>
+            </a:extLst>
+          </p:cNvPr>
+          <p:cNvSpPr>
+            <a:spLocks noGrp="1"/>
+          </p:cNvSpPr>
+          <p:nvPr>
+            <p:ph idx="1"/>
+          </p:nvPr>
+        </p:nvSpPr>
+        <p:spPr>
+          <a:xfrm>
+            <a:off x="768743" y="1085639"/>
+            <a:ext cx="10900646" cy="5495926"/>
+          </a:xfrm>
+        </p:spPr>
+        <p:txBody>
+          <a:bodyPr>
+            <a:normAutofit/>
+          </a:bodyPr>
+          <a:lstStyle/>
+          <a:p>
+            <a:pPr marL="0" indent="0">
+              <a:buNone/>
+            </a:pPr>
+            <a:r>
+              <a:rPr lang="en-IN" sz="2400" b="1" dirty="0">
+                <a:latin typeface="Times New Roman" panose="02020603050405020304" pitchFamily="18" charset="0"/>
+                <a:cs typeface="Times New Roman" panose="02020603050405020304" pitchFamily="18" charset="0"/>
+              </a:rPr>
+              <a:t>Performance Evaluation</a:t>
+            </a:r>
+            <a:endParaRPr lang="en-IN" sz="2400" dirty="0">
               <a:latin typeface="Times New Roman" panose="02020603050405020304" pitchFamily="18" charset="0"/>
               <a:cs typeface="Times New Roman" panose="02020603050405020304" pitchFamily="18" charset="0"/>
             </a:endParaRPr>
           </a:p>
-        </p:txBody>
-      </p:sp>
-      <p:sp>
-        <p:nvSpPr>
-          <p:cNvPr id="4" name="Content Placeholder 3">
-            <a:extLst>
-              <a:ext uri="{FF2B5EF4-FFF2-40B4-BE49-F238E27FC236}">
-                <a16:creationId xmlns:a16="http://schemas.microsoft.com/office/drawing/2014/main" id="{E1379611-3616-5572-0C78-A3F94310D4BA}"/>
+          <a:p>
+            <a:pPr lvl="0"/>
+            <a:r>
+              <a:rPr lang="en-IN" sz="2400" b="1" dirty="0">
+                <a:latin typeface="Times New Roman" panose="02020603050405020304" pitchFamily="18" charset="0"/>
+                <a:cs typeface="Times New Roman" panose="02020603050405020304" pitchFamily="18" charset="0"/>
+              </a:rPr>
+              <a:t>Accuracy:</a:t>
+            </a:r>
+            <a:r>
+              <a:rPr lang="en-IN" sz="2400" dirty="0">
+                <a:latin typeface="Times New Roman" panose="02020603050405020304" pitchFamily="18" charset="0"/>
+                <a:cs typeface="Times New Roman" panose="02020603050405020304" pitchFamily="18" charset="0"/>
+              </a:rPr>
+              <a:t> Measures overall correct predictions. </a:t>
+            </a:r>
+          </a:p>
+          <a:p>
+            <a:pPr lvl="0"/>
+            <a:r>
+              <a:rPr lang="en-IN" sz="2400" b="1" dirty="0">
+                <a:latin typeface="Times New Roman" panose="02020603050405020304" pitchFamily="18" charset="0"/>
+                <a:cs typeface="Times New Roman" panose="02020603050405020304" pitchFamily="18" charset="0"/>
+              </a:rPr>
+              <a:t>Precision:</a:t>
+            </a:r>
+            <a:r>
+              <a:rPr lang="en-IN" sz="2400" dirty="0">
+                <a:latin typeface="Times New Roman" panose="02020603050405020304" pitchFamily="18" charset="0"/>
+                <a:cs typeface="Times New Roman" panose="02020603050405020304" pitchFamily="18" charset="0"/>
+              </a:rPr>
+              <a:t> Measures how many predicted attrition cases were actually attrition cases. </a:t>
+            </a:r>
+          </a:p>
+          <a:p>
+            <a:pPr lvl="0"/>
+            <a:r>
+              <a:rPr lang="en-IN" sz="2400" b="1" dirty="0">
+                <a:latin typeface="Times New Roman" panose="02020603050405020304" pitchFamily="18" charset="0"/>
+                <a:cs typeface="Times New Roman" panose="02020603050405020304" pitchFamily="18" charset="0"/>
+              </a:rPr>
+              <a:t>Recall:</a:t>
+            </a:r>
+            <a:r>
+              <a:rPr lang="en-IN" sz="2400" dirty="0">
+                <a:latin typeface="Times New Roman" panose="02020603050405020304" pitchFamily="18" charset="0"/>
+                <a:cs typeface="Times New Roman" panose="02020603050405020304" pitchFamily="18" charset="0"/>
+              </a:rPr>
+              <a:t> Measures how many actual attrition cases were identified. </a:t>
+            </a:r>
+          </a:p>
+          <a:p>
+            <a:pPr lvl="0"/>
+            <a:r>
+              <a:rPr lang="en-IN" sz="2400" b="1" dirty="0">
+                <a:latin typeface="Times New Roman" panose="02020603050405020304" pitchFamily="18" charset="0"/>
+                <a:cs typeface="Times New Roman" panose="02020603050405020304" pitchFamily="18" charset="0"/>
+              </a:rPr>
+              <a:t>F1-Score:</a:t>
+            </a:r>
+            <a:r>
+              <a:rPr lang="en-IN" sz="2400" dirty="0">
+                <a:latin typeface="Times New Roman" panose="02020603050405020304" pitchFamily="18" charset="0"/>
+                <a:cs typeface="Times New Roman" panose="02020603050405020304" pitchFamily="18" charset="0"/>
+              </a:rPr>
+              <a:t> Balances Precision and Recall. </a:t>
+            </a:r>
+          </a:p>
+          <a:p>
+            <a:pPr lvl="0"/>
+            <a:r>
+              <a:rPr lang="en-IN" sz="2400" b="1" dirty="0">
+                <a:latin typeface="Times New Roman" panose="02020603050405020304" pitchFamily="18" charset="0"/>
+                <a:cs typeface="Times New Roman" panose="02020603050405020304" pitchFamily="18" charset="0"/>
+              </a:rPr>
+              <a:t>ROC-AUC:</a:t>
+            </a:r>
+            <a:r>
+              <a:rPr lang="en-IN" sz="2400" dirty="0">
+                <a:latin typeface="Times New Roman" panose="02020603050405020304" pitchFamily="18" charset="0"/>
+                <a:cs typeface="Times New Roman" panose="02020603050405020304" pitchFamily="18" charset="0"/>
+              </a:rPr>
+              <a:t> Measures the model's ability to distinguish between attrition and non-attrition cases. </a:t>
+            </a:r>
+          </a:p>
+          <a:p>
+            <a:pPr marL="0" indent="0">
+              <a:buNone/>
+            </a:pPr>
+            <a:r>
+              <a:rPr lang="en-IN" sz="2400" b="1" dirty="0">
+                <a:latin typeface="Times New Roman" panose="02020603050405020304" pitchFamily="18" charset="0"/>
+                <a:cs typeface="Times New Roman" panose="02020603050405020304" pitchFamily="18" charset="0"/>
+              </a:rPr>
+              <a:t>Observed Results</a:t>
+            </a:r>
+          </a:p>
+          <a:p>
+            <a:pPr lvl="0"/>
+            <a:r>
+              <a:rPr lang="en-IN" sz="2400" dirty="0" err="1">
+                <a:latin typeface="Times New Roman" panose="02020603050405020304" pitchFamily="18" charset="0"/>
+                <a:cs typeface="Times New Roman" panose="02020603050405020304" pitchFamily="18" charset="0"/>
+              </a:rPr>
+              <a:t>XGBoost</a:t>
+            </a:r>
+            <a:r>
+              <a:rPr lang="en-IN" sz="2400" dirty="0">
+                <a:latin typeface="Times New Roman" panose="02020603050405020304" pitchFamily="18" charset="0"/>
+                <a:cs typeface="Times New Roman" panose="02020603050405020304" pitchFamily="18" charset="0"/>
+              </a:rPr>
+              <a:t> achieved </a:t>
+            </a:r>
+            <a:r>
+              <a:rPr lang="en-IN" sz="2400" b="1" dirty="0">
+                <a:latin typeface="Times New Roman" panose="02020603050405020304" pitchFamily="18" charset="0"/>
+                <a:cs typeface="Times New Roman" panose="02020603050405020304" pitchFamily="18" charset="0"/>
+              </a:rPr>
+              <a:t>85.71% Accuracy</a:t>
+            </a:r>
+            <a:r>
+              <a:rPr lang="en-IN" sz="2400" dirty="0">
+                <a:latin typeface="Times New Roman" panose="02020603050405020304" pitchFamily="18" charset="0"/>
+                <a:cs typeface="Times New Roman" panose="02020603050405020304" pitchFamily="18" charset="0"/>
+              </a:rPr>
+              <a:t>. </a:t>
+            </a:r>
+          </a:p>
+          <a:p>
+            <a:pPr lvl="0"/>
+            <a:r>
+              <a:rPr lang="en-IN" sz="2400" dirty="0" err="1">
+                <a:latin typeface="Times New Roman" panose="02020603050405020304" pitchFamily="18" charset="0"/>
+                <a:cs typeface="Times New Roman" panose="02020603050405020304" pitchFamily="18" charset="0"/>
+              </a:rPr>
+              <a:t>XGBoost</a:t>
+            </a:r>
+            <a:r>
+              <a:rPr lang="en-IN" sz="2400" dirty="0">
+                <a:latin typeface="Times New Roman" panose="02020603050405020304" pitchFamily="18" charset="0"/>
+                <a:cs typeface="Times New Roman" panose="02020603050405020304" pitchFamily="18" charset="0"/>
+              </a:rPr>
+              <a:t> achieved the highest </a:t>
+            </a:r>
+            <a:r>
+              <a:rPr lang="en-IN" sz="2400" b="1" dirty="0">
+                <a:latin typeface="Times New Roman" panose="02020603050405020304" pitchFamily="18" charset="0"/>
+                <a:cs typeface="Times New Roman" panose="02020603050405020304" pitchFamily="18" charset="0"/>
+              </a:rPr>
+              <a:t>ROC-AUC of 76.17%</a:t>
+            </a:r>
+            <a:r>
+              <a:rPr lang="en-IN" sz="2400" dirty="0">
+                <a:latin typeface="Times New Roman" panose="02020603050405020304" pitchFamily="18" charset="0"/>
+                <a:cs typeface="Times New Roman" panose="02020603050405020304" pitchFamily="18" charset="0"/>
+              </a:rPr>
+              <a:t> among the three models. </a:t>
+            </a:r>
+          </a:p>
+          <a:p>
+            <a:pPr lvl="0"/>
+            <a:r>
+              <a:rPr lang="en-IN" sz="2400" dirty="0">
+                <a:latin typeface="Times New Roman" panose="02020603050405020304" pitchFamily="18" charset="0"/>
+                <a:cs typeface="Times New Roman" panose="02020603050405020304" pitchFamily="18" charset="0"/>
+              </a:rPr>
+              <a:t>Logistic Regression achieved </a:t>
+            </a:r>
+            <a:r>
+              <a:rPr lang="en-IN" sz="2400" b="1" dirty="0">
+                <a:latin typeface="Times New Roman" panose="02020603050405020304" pitchFamily="18" charset="0"/>
+                <a:cs typeface="Times New Roman" panose="02020603050405020304" pitchFamily="18" charset="0"/>
+              </a:rPr>
+              <a:t>42.55% Recall</a:t>
+            </a:r>
+            <a:r>
+              <a:rPr lang="en-IN" sz="2400" dirty="0">
+                <a:latin typeface="Times New Roman" panose="02020603050405020304" pitchFamily="18" charset="0"/>
+                <a:cs typeface="Times New Roman" panose="02020603050405020304" pitchFamily="18" charset="0"/>
+              </a:rPr>
+              <a:t> and </a:t>
+            </a:r>
+            <a:r>
+              <a:rPr lang="en-IN" sz="2400" b="1" dirty="0">
+                <a:latin typeface="Times New Roman" panose="02020603050405020304" pitchFamily="18" charset="0"/>
+                <a:cs typeface="Times New Roman" panose="02020603050405020304" pitchFamily="18" charset="0"/>
+              </a:rPr>
+              <a:t>48.78% F1-Score</a:t>
+            </a:r>
+            <a:r>
+              <a:rPr lang="en-IN" sz="2400" dirty="0">
+                <a:latin typeface="Times New Roman" panose="02020603050405020304" pitchFamily="18" charset="0"/>
+                <a:cs typeface="Times New Roman" panose="02020603050405020304" pitchFamily="18" charset="0"/>
+              </a:rPr>
+              <a:t>. </a:t>
+            </a:r>
+          </a:p>
+          <a:p>
+            <a:pPr lvl="0"/>
+            <a:r>
+              <a:rPr lang="en-IN" sz="2400" dirty="0">
+                <a:latin typeface="Times New Roman" panose="02020603050405020304" pitchFamily="18" charset="0"/>
+                <a:cs typeface="Times New Roman" panose="02020603050405020304" pitchFamily="18" charset="0"/>
+              </a:rPr>
+              <a:t>The results show that model performance differs depending on the evaluation metric. </a:t>
+            </a:r>
+          </a:p>
+          <a:p>
+            <a:endParaRPr lang="en-IN" dirty="0"/>
+          </a:p>
+        </p:txBody>
+      </p:sp>
+    </p:spTree>
+    <p:extLst>
+      <p:ext uri="{BB962C8B-B14F-4D97-AF65-F5344CB8AC3E}">
+        <p14:creationId xmlns:p14="http://schemas.microsoft.com/office/powerpoint/2010/main" val="1395504212"/>
+      </p:ext>
+    </p:extLst>
+  </p:cSld>
+  <p:clrMapOvr>
+    <a:masterClrMapping/>
+  </p:clrMapOvr>
+</p:sld>
+</file>
+
+<file path=ppt/slides/slide14.xml><?xml version="1.0" encoding="utf-8"?>
+<p:sld xmlns:a="http://schemas.openxmlformats.org/drawingml/2006/main" xmlns:r="http://schemas.openxmlformats.org/officeDocument/2006/relationships" xmlns:p="http://schemas.openxmlformats.org/presentationml/2006/main">
+  <p:cSld>
+    <p:spTree>
+      <p:nvGrpSpPr>
+        <p:cNvPr id="1" name=""/>
+        <p:cNvGrpSpPr/>
+        <p:nvPr/>
+      </p:nvGrpSpPr>
+      <p:grpSpPr>
+        <a:xfrm>
+          <a:off x="0" y="0"/>
+          <a:ext cx="0" cy="0"/>
+          <a:chOff x="0" y="0"/>
+          <a:chExt cx="0" cy="0"/>
+        </a:xfrm>
+      </p:grpSpPr>
+      <p:sp>
+        <p:nvSpPr>
+          <p:cNvPr id="2" name="Title 1">
+            <a:extLst>
+              <a:ext uri="{FF2B5EF4-FFF2-40B4-BE49-F238E27FC236}">
+                <a16:creationId xmlns:a16="http://schemas.microsoft.com/office/drawing/2014/main" id="{D51AD10F-4CE1-8D22-CC26-B50D5F11686E}"/>
               </a:ext>
             </a:extLst>
           </p:cNvPr>
@@ -5631,18 +5881,443 @@
             <a:spLocks noGrp="1"/>
           </p:cNvSpPr>
           <p:nvPr>
-            <p:ph idx="1"/>
+            <p:ph type="title"/>
           </p:nvPr>
         </p:nvSpPr>
         <p:spPr>
           <a:xfrm>
-            <a:off x="757280" y="1429115"/>
+            <a:off x="0" y="65719"/>
+            <a:ext cx="11030119" cy="533091"/>
+          </a:xfrm>
+        </p:spPr>
+        <p:txBody>
+          <a:bodyPr>
+            <a:normAutofit/>
+          </a:bodyPr>
+          <a:lstStyle/>
+          <a:p>
+            <a:r>
+              <a:rPr lang="en-IN" sz="3200" dirty="0">
+                <a:latin typeface="Times New Roman" panose="02020603050405020304" pitchFamily="18" charset="0"/>
+                <a:cs typeface="Times New Roman" panose="02020603050405020304" pitchFamily="18" charset="0"/>
+              </a:rPr>
+              <a:t>Explainability Results</a:t>
+            </a:r>
+          </a:p>
+        </p:txBody>
+      </p:sp>
+      <p:sp>
+        <p:nvSpPr>
+          <p:cNvPr id="3" name="Content Placeholder 2">
+            <a:extLst>
+              <a:ext uri="{FF2B5EF4-FFF2-40B4-BE49-F238E27FC236}">
+                <a16:creationId xmlns:a16="http://schemas.microsoft.com/office/drawing/2014/main" id="{5FABC326-7AAD-F105-379D-ACF1A17FC07A}"/>
+              </a:ext>
+            </a:extLst>
+          </p:cNvPr>
+          <p:cNvSpPr>
+            <a:spLocks noGrp="1"/>
+          </p:cNvSpPr>
+          <p:nvPr>
+            <p:ph idx="1"/>
+          </p:nvPr>
+        </p:nvSpPr>
+        <p:spPr>
+          <a:xfrm>
+            <a:off x="323681" y="784927"/>
+            <a:ext cx="11030119" cy="5392036"/>
+          </a:xfrm>
+        </p:spPr>
+        <p:txBody>
+          <a:bodyPr>
+            <a:normAutofit/>
+          </a:bodyPr>
+          <a:lstStyle/>
+          <a:p>
+            <a:pPr marL="0" indent="0">
+              <a:buNone/>
+            </a:pPr>
+            <a:r>
+              <a:rPr lang="en-IN" sz="2400" b="1" dirty="0">
+                <a:latin typeface="Times New Roman" panose="02020603050405020304" pitchFamily="18" charset="0"/>
+                <a:cs typeface="Times New Roman" panose="02020603050405020304" pitchFamily="18" charset="0"/>
+              </a:rPr>
+              <a:t>SHAP Results</a:t>
+            </a:r>
+            <a:endParaRPr lang="en-IN" sz="2400" dirty="0">
+              <a:latin typeface="Times New Roman" panose="02020603050405020304" pitchFamily="18" charset="0"/>
+              <a:cs typeface="Times New Roman" panose="02020603050405020304" pitchFamily="18" charset="0"/>
+            </a:endParaRPr>
+          </a:p>
+          <a:p>
+            <a:pPr lvl="0"/>
+            <a:r>
+              <a:rPr lang="en-IN" sz="2400" dirty="0">
+                <a:latin typeface="Times New Roman" panose="02020603050405020304" pitchFamily="18" charset="0"/>
+                <a:cs typeface="Times New Roman" panose="02020603050405020304" pitchFamily="18" charset="0"/>
+              </a:rPr>
+              <a:t>Identifies features contributing to the prediction. </a:t>
+            </a:r>
+          </a:p>
+          <a:p>
+            <a:pPr lvl="0"/>
+            <a:r>
+              <a:rPr lang="en-IN" sz="2400" dirty="0">
+                <a:latin typeface="Times New Roman" panose="02020603050405020304" pitchFamily="18" charset="0"/>
+                <a:cs typeface="Times New Roman" panose="02020603050405020304" pitchFamily="18" charset="0"/>
+              </a:rPr>
+              <a:t>Positive SHAP values increase the predicted attrition risk. </a:t>
+            </a:r>
+          </a:p>
+          <a:p>
+            <a:pPr lvl="0"/>
+            <a:r>
+              <a:rPr lang="en-IN" sz="2400" dirty="0">
+                <a:latin typeface="Times New Roman" panose="02020603050405020304" pitchFamily="18" charset="0"/>
+                <a:cs typeface="Times New Roman" panose="02020603050405020304" pitchFamily="18" charset="0"/>
+              </a:rPr>
+              <a:t>Negative SHAP values decrease the predicted attrition risk. </a:t>
+            </a:r>
+          </a:p>
+          <a:p>
+            <a:pPr marL="0" indent="0">
+              <a:buNone/>
+            </a:pPr>
+            <a:r>
+              <a:rPr lang="en-IN" sz="2400" b="1" dirty="0">
+                <a:latin typeface="Times New Roman" panose="02020603050405020304" pitchFamily="18" charset="0"/>
+                <a:cs typeface="Times New Roman" panose="02020603050405020304" pitchFamily="18" charset="0"/>
+              </a:rPr>
+              <a:t>LIME Results</a:t>
+            </a:r>
+            <a:endParaRPr lang="en-IN" sz="2400" dirty="0">
+              <a:latin typeface="Times New Roman" panose="02020603050405020304" pitchFamily="18" charset="0"/>
+              <a:cs typeface="Times New Roman" panose="02020603050405020304" pitchFamily="18" charset="0"/>
+            </a:endParaRPr>
+          </a:p>
+          <a:p>
+            <a:pPr lvl="0"/>
+            <a:r>
+              <a:rPr lang="en-IN" sz="2400" dirty="0">
+                <a:latin typeface="Times New Roman" panose="02020603050405020304" pitchFamily="18" charset="0"/>
+                <a:cs typeface="Times New Roman" panose="02020603050405020304" pitchFamily="18" charset="0"/>
+              </a:rPr>
+              <a:t>Provides an individual prediction explanation. </a:t>
+            </a:r>
+          </a:p>
+          <a:p>
+            <a:pPr lvl="0"/>
+            <a:r>
+              <a:rPr lang="en-IN" sz="2400" dirty="0">
+                <a:latin typeface="Times New Roman" panose="02020603050405020304" pitchFamily="18" charset="0"/>
+                <a:cs typeface="Times New Roman" panose="02020603050405020304" pitchFamily="18" charset="0"/>
+              </a:rPr>
+              <a:t>Shows which input factors influenced a particular employee prediction. </a:t>
+            </a:r>
+          </a:p>
+          <a:p>
+            <a:pPr marL="0" indent="0">
+              <a:buNone/>
+            </a:pPr>
+            <a:r>
+              <a:rPr lang="en-IN" sz="2400" dirty="0">
+                <a:latin typeface="Times New Roman" panose="02020603050405020304" pitchFamily="18" charset="0"/>
+                <a:cs typeface="Times New Roman" panose="02020603050405020304" pitchFamily="18" charset="0"/>
+              </a:rPr>
+              <a:t>Put your generated:</a:t>
+            </a:r>
+          </a:p>
+          <a:p>
+            <a:pPr lvl="0"/>
+            <a:r>
+              <a:rPr lang="en-IN" sz="2400" dirty="0">
+                <a:latin typeface="Times New Roman" panose="02020603050405020304" pitchFamily="18" charset="0"/>
+                <a:cs typeface="Times New Roman" panose="02020603050405020304" pitchFamily="18" charset="0"/>
+              </a:rPr>
+              <a:t>shap_summary.png </a:t>
+            </a:r>
+          </a:p>
+          <a:p>
+            <a:pPr lvl="0"/>
+            <a:r>
+              <a:rPr lang="en-IN" sz="2400" dirty="0">
+                <a:latin typeface="Times New Roman" panose="02020603050405020304" pitchFamily="18" charset="0"/>
+                <a:cs typeface="Times New Roman" panose="02020603050405020304" pitchFamily="18" charset="0"/>
+              </a:rPr>
+              <a:t>shap_feature_importance.png </a:t>
+            </a:r>
+          </a:p>
+          <a:p>
+            <a:pPr lvl="0"/>
+            <a:r>
+              <a:rPr lang="en-IN" sz="2400" dirty="0">
+                <a:latin typeface="Times New Roman" panose="02020603050405020304" pitchFamily="18" charset="0"/>
+                <a:cs typeface="Times New Roman" panose="02020603050405020304" pitchFamily="18" charset="0"/>
+              </a:rPr>
+              <a:t>LIME explanation</a:t>
+            </a:r>
+          </a:p>
+          <a:p>
+            <a:endParaRPr lang="en-IN" sz="2400" dirty="0">
+              <a:latin typeface="Times New Roman" panose="02020603050405020304" pitchFamily="18" charset="0"/>
+              <a:cs typeface="Times New Roman" panose="02020603050405020304" pitchFamily="18" charset="0"/>
+            </a:endParaRPr>
+          </a:p>
+        </p:txBody>
+      </p:sp>
+    </p:spTree>
+    <p:extLst>
+      <p:ext uri="{BB962C8B-B14F-4D97-AF65-F5344CB8AC3E}">
+        <p14:creationId xmlns:p14="http://schemas.microsoft.com/office/powerpoint/2010/main" val="2347228900"/>
+      </p:ext>
+    </p:extLst>
+  </p:cSld>
+  <p:clrMapOvr>
+    <a:masterClrMapping/>
+  </p:clrMapOvr>
+</p:sld>
+</file>
+
+<file path=ppt/slides/slide15.xml><?xml version="1.0" encoding="utf-8"?>
+<p:sld xmlns:a="http://schemas.openxmlformats.org/drawingml/2006/main" xmlns:r="http://schemas.openxmlformats.org/officeDocument/2006/relationships" xmlns:p="http://schemas.openxmlformats.org/presentationml/2006/main">
+  <p:cSld>
+    <p:spTree>
+      <p:nvGrpSpPr>
+        <p:cNvPr id="1" name=""/>
+        <p:cNvGrpSpPr/>
+        <p:nvPr/>
+      </p:nvGrpSpPr>
+      <p:grpSpPr>
+        <a:xfrm>
+          <a:off x="0" y="0"/>
+          <a:ext cx="0" cy="0"/>
+          <a:chOff x="0" y="0"/>
+          <a:chExt cx="0" cy="0"/>
+        </a:xfrm>
+      </p:grpSpPr>
+      <p:sp>
+        <p:nvSpPr>
+          <p:cNvPr id="2" name="Title 1">
+            <a:extLst>
+              <a:ext uri="{FF2B5EF4-FFF2-40B4-BE49-F238E27FC236}">
+                <a16:creationId xmlns:a16="http://schemas.microsoft.com/office/drawing/2014/main" id="{E61C96F7-28E6-F8BB-9DA2-7CA826CCA4F6}"/>
+              </a:ext>
+            </a:extLst>
+          </p:cNvPr>
+          <p:cNvSpPr>
+            <a:spLocks noGrp="1"/>
+          </p:cNvSpPr>
+          <p:nvPr>
+            <p:ph type="title"/>
+          </p:nvPr>
+        </p:nvSpPr>
+        <p:spPr>
+          <a:xfrm>
+            <a:off x="0" y="0"/>
+            <a:ext cx="10690253" cy="476447"/>
+          </a:xfrm>
+        </p:spPr>
+        <p:txBody>
+          <a:bodyPr>
+            <a:noAutofit/>
+          </a:bodyPr>
+          <a:lstStyle/>
+          <a:p>
+            <a:r>
+              <a:rPr lang="en-IN" sz="3200" dirty="0">
+                <a:latin typeface="Times New Roman" panose="02020603050405020304" pitchFamily="18" charset="0"/>
+                <a:cs typeface="Times New Roman" panose="02020603050405020304" pitchFamily="18" charset="0"/>
+              </a:rPr>
+              <a:t>Working / Application Output</a:t>
+            </a:r>
+          </a:p>
+        </p:txBody>
+      </p:sp>
+      <p:pic>
+        <p:nvPicPr>
+          <p:cNvPr id="5" name="Content Placeholder 4">
+            <a:extLst>
+              <a:ext uri="{FF2B5EF4-FFF2-40B4-BE49-F238E27FC236}">
+                <a16:creationId xmlns:a16="http://schemas.microsoft.com/office/drawing/2014/main" id="{E0F4FF88-C00F-5551-8827-4583339DC454}"/>
+              </a:ext>
+            </a:extLst>
+          </p:cNvPr>
+          <p:cNvPicPr>
+            <a:picLocks noGrp="1" noChangeAspect="1"/>
+          </p:cNvPicPr>
+          <p:nvPr>
+            <p:ph idx="1"/>
+          </p:nvPr>
+        </p:nvPicPr>
+        <p:blipFill>
+          <a:blip r:embed="rId2"/>
+          <a:stretch>
+            <a:fillRect/>
+          </a:stretch>
+        </p:blipFill>
+        <p:spPr>
+          <a:xfrm>
+            <a:off x="363857" y="946500"/>
+            <a:ext cx="5171471" cy="5324827"/>
+          </a:xfrm>
+          <a:prstGeom prst="rect">
+            <a:avLst/>
+          </a:prstGeom>
+        </p:spPr>
+      </p:pic>
+      <p:pic>
+        <p:nvPicPr>
+          <p:cNvPr id="7" name="Picture 6">
+            <a:extLst>
+              <a:ext uri="{FF2B5EF4-FFF2-40B4-BE49-F238E27FC236}">
+                <a16:creationId xmlns:a16="http://schemas.microsoft.com/office/drawing/2014/main" id="{71907D83-DB5C-BD79-5DAC-C1EA18A29A41}"/>
+              </a:ext>
+            </a:extLst>
+          </p:cNvPr>
+          <p:cNvPicPr>
+            <a:picLocks noChangeAspect="1"/>
+          </p:cNvPicPr>
+          <p:nvPr/>
+        </p:nvPicPr>
+        <p:blipFill>
+          <a:blip r:embed="rId3"/>
+          <a:stretch>
+            <a:fillRect/>
+          </a:stretch>
+        </p:blipFill>
+        <p:spPr>
+          <a:xfrm>
+            <a:off x="6971769" y="5628968"/>
+            <a:ext cx="4413724" cy="1057280"/>
+          </a:xfrm>
+          <a:prstGeom prst="rect">
+            <a:avLst/>
+          </a:prstGeom>
+        </p:spPr>
+      </p:pic>
+      <p:pic>
+        <p:nvPicPr>
+          <p:cNvPr id="11" name="Picture 10">
+            <a:extLst>
+              <a:ext uri="{FF2B5EF4-FFF2-40B4-BE49-F238E27FC236}">
+                <a16:creationId xmlns:a16="http://schemas.microsoft.com/office/drawing/2014/main" id="{04F27179-5FC2-B0C5-529E-24E9F816569E}"/>
+              </a:ext>
+            </a:extLst>
+          </p:cNvPr>
+          <p:cNvPicPr>
+            <a:picLocks noChangeAspect="1"/>
+          </p:cNvPicPr>
+          <p:nvPr/>
+        </p:nvPicPr>
+        <p:blipFill>
+          <a:blip r:embed="rId4"/>
+          <a:stretch>
+            <a:fillRect/>
+          </a:stretch>
+        </p:blipFill>
+        <p:spPr>
+          <a:xfrm>
+            <a:off x="5895274" y="303942"/>
+            <a:ext cx="6151354" cy="4993054"/>
+          </a:xfrm>
+          <a:prstGeom prst="rect">
+            <a:avLst/>
+          </a:prstGeom>
+        </p:spPr>
+      </p:pic>
+    </p:spTree>
+    <p:extLst>
+      <p:ext uri="{BB962C8B-B14F-4D97-AF65-F5344CB8AC3E}">
+        <p14:creationId xmlns:p14="http://schemas.microsoft.com/office/powerpoint/2010/main" val="1449950846"/>
+      </p:ext>
+    </p:extLst>
+  </p:cSld>
+  <p:clrMapOvr>
+    <a:masterClrMapping/>
+  </p:clrMapOvr>
+</p:sld>
+</file>
+
+<file path=ppt/slides/slide16.xml><?xml version="1.0" encoding="utf-8"?>
+<p:sld xmlns:a="http://schemas.openxmlformats.org/drawingml/2006/main" xmlns:r="http://schemas.openxmlformats.org/officeDocument/2006/relationships" xmlns:p="http://schemas.openxmlformats.org/presentationml/2006/main">
+  <p:cSld>
+    <p:spTree>
+      <p:nvGrpSpPr>
+        <p:cNvPr id="1" name=""/>
+        <p:cNvGrpSpPr/>
+        <p:nvPr/>
+      </p:nvGrpSpPr>
+      <p:grpSpPr>
+        <a:xfrm>
+          <a:off x="0" y="0"/>
+          <a:ext cx="0" cy="0"/>
+          <a:chOff x="0" y="0"/>
+          <a:chExt cx="0" cy="0"/>
+        </a:xfrm>
+      </p:grpSpPr>
+      <p:sp>
+        <p:nvSpPr>
+          <p:cNvPr id="2" name="Title 1">
+            <a:extLst>
+              <a:ext uri="{FF2B5EF4-FFF2-40B4-BE49-F238E27FC236}">
+                <a16:creationId xmlns:a16="http://schemas.microsoft.com/office/drawing/2014/main" id="{6891F2F0-A874-7D7C-0C9A-6B05CBF89127}"/>
+              </a:ext>
+            </a:extLst>
+          </p:cNvPr>
+          <p:cNvSpPr>
+            <a:spLocks noGrp="1"/>
+          </p:cNvSpPr>
+          <p:nvPr>
+            <p:ph type="title"/>
+          </p:nvPr>
+        </p:nvSpPr>
+        <p:spPr>
+          <a:xfrm>
+            <a:off x="0" y="0"/>
+            <a:ext cx="11127223" cy="605919"/>
+          </a:xfrm>
+        </p:spPr>
+        <p:txBody>
+          <a:bodyPr>
+            <a:normAutofit/>
+          </a:bodyPr>
+          <a:lstStyle/>
+          <a:p>
+            <a:r>
+              <a:rPr lang="en-IN" sz="3200" dirty="0">
+                <a:latin typeface="Times New Roman" panose="02020603050405020304" pitchFamily="18" charset="0"/>
+                <a:cs typeface="Times New Roman" panose="02020603050405020304" pitchFamily="18" charset="0"/>
+              </a:rPr>
+              <a:t>Conclusion</a:t>
+            </a:r>
+          </a:p>
+        </p:txBody>
+      </p:sp>
+      <p:sp>
+        <p:nvSpPr>
+          <p:cNvPr id="3" name="Content Placeholder 2">
+            <a:extLst>
+              <a:ext uri="{FF2B5EF4-FFF2-40B4-BE49-F238E27FC236}">
+                <a16:creationId xmlns:a16="http://schemas.microsoft.com/office/drawing/2014/main" id="{7701026A-2893-A414-D702-726F63256E3F}"/>
+              </a:ext>
+            </a:extLst>
+          </p:cNvPr>
+          <p:cNvSpPr>
+            <a:spLocks noGrp="1"/>
+          </p:cNvSpPr>
+          <p:nvPr>
+            <p:ph idx="1"/>
+          </p:nvPr>
+        </p:nvSpPr>
+        <p:spPr>
+          <a:xfrm>
+            <a:off x="773464" y="725108"/>
             <a:ext cx="10515600" cy="4351338"/>
           </a:xfrm>
         </p:spPr>
         <p:txBody>
           <a:bodyPr>
-            <a:normAutofit fontScale="85000" lnSpcReduction="20000"/>
+            <a:normAutofit/>
           </a:bodyPr>
           <a:lstStyle/>
           <a:p>
@@ -5650,133 +6325,33 @@
               <a:buNone/>
             </a:pPr>
             <a:r>
-              <a:rPr lang="en-IN" sz="3000" dirty="0">
-                <a:latin typeface="Times New Roman" panose="02020603050405020304" pitchFamily="18" charset="0"/>
-                <a:cs typeface="Times New Roman" panose="02020603050405020304" pitchFamily="18" charset="0"/>
-              </a:rPr>
-              <a:t>Prediction</a:t>
-            </a:r>
-          </a:p>
-          <a:p>
-            <a:pPr marL="0" indent="0">
-              <a:buNone/>
-            </a:pPr>
-            <a:r>
-              <a:rPr lang="en-IN" sz="3000" dirty="0">
-                <a:latin typeface="Times New Roman" panose="02020603050405020304" pitchFamily="18" charset="0"/>
-                <a:cs typeface="Times New Roman" panose="02020603050405020304" pitchFamily="18" charset="0"/>
-              </a:rPr>
-              <a:t>“Is this employee likely to leave?”</a:t>
-            </a:r>
-          </a:p>
-          <a:p>
-            <a:pPr marL="0" indent="0">
-              <a:buNone/>
-            </a:pPr>
-            <a:r>
-              <a:rPr lang="en-IN" sz="3000" dirty="0">
-                <a:latin typeface="Times New Roman" panose="02020603050405020304" pitchFamily="18" charset="0"/>
-                <a:cs typeface="Times New Roman" panose="02020603050405020304" pitchFamily="18" charset="0"/>
-              </a:rPr>
-              <a:t>Risk</a:t>
-            </a:r>
-          </a:p>
-          <a:p>
-            <a:pPr marL="0" indent="0">
-              <a:buNone/>
-            </a:pPr>
-            <a:r>
-              <a:rPr lang="en-IN" sz="3000" dirty="0">
-                <a:latin typeface="Times New Roman" panose="02020603050405020304" pitchFamily="18" charset="0"/>
-                <a:cs typeface="Times New Roman" panose="02020603050405020304" pitchFamily="18" charset="0"/>
-              </a:rPr>
-              <a:t>“How high is the predicted risk?”</a:t>
-            </a:r>
-          </a:p>
-          <a:p>
-            <a:pPr marL="0" indent="0">
-              <a:buNone/>
-            </a:pPr>
-            <a:r>
-              <a:rPr lang="en-IN" sz="3000" dirty="0">
-                <a:latin typeface="Times New Roman" panose="02020603050405020304" pitchFamily="18" charset="0"/>
-                <a:cs typeface="Times New Roman" panose="02020603050405020304" pitchFamily="18" charset="0"/>
-              </a:rPr>
-              <a:t>Explanation</a:t>
-            </a:r>
-          </a:p>
-          <a:p>
-            <a:pPr marL="0" indent="0">
-              <a:buNone/>
-            </a:pPr>
-            <a:r>
-              <a:rPr lang="en-IN" sz="3000" dirty="0">
-                <a:latin typeface="Times New Roman" panose="02020603050405020304" pitchFamily="18" charset="0"/>
-                <a:cs typeface="Times New Roman" panose="02020603050405020304" pitchFamily="18" charset="0"/>
-              </a:rPr>
-              <a:t>“Which factors influenced the prediction?”</a:t>
-            </a:r>
-          </a:p>
-          <a:p>
-            <a:pPr marL="0" indent="0">
-              <a:buNone/>
-            </a:pPr>
-            <a:r>
-              <a:rPr lang="en-IN" sz="3000" dirty="0">
-                <a:latin typeface="Times New Roman" panose="02020603050405020304" pitchFamily="18" charset="0"/>
-                <a:cs typeface="Times New Roman" panose="02020603050405020304" pitchFamily="18" charset="0"/>
-              </a:rPr>
-              <a:t>Decision Support</a:t>
-            </a:r>
-          </a:p>
-          <a:p>
-            <a:pPr marL="0" indent="0">
-              <a:buNone/>
-            </a:pPr>
-            <a:r>
-              <a:rPr lang="en-IN" sz="3000" dirty="0">
-                <a:latin typeface="Times New Roman" panose="02020603050405020304" pitchFamily="18" charset="0"/>
-                <a:cs typeface="Times New Roman" panose="02020603050405020304" pitchFamily="18" charset="0"/>
-              </a:rPr>
-              <a:t>“What information should HR consider?”</a:t>
-            </a:r>
-          </a:p>
-          <a:p>
-            <a:pPr marL="0" indent="0">
-              <a:buNone/>
-            </a:pPr>
-            <a:r>
-              <a:rPr lang="en-IN" sz="3000" dirty="0">
-                <a:latin typeface="Times New Roman" panose="02020603050405020304" pitchFamily="18" charset="0"/>
-                <a:cs typeface="Times New Roman" panose="02020603050405020304" pitchFamily="18" charset="0"/>
-              </a:rPr>
-              <a:t>Final idea:</a:t>
-            </a:r>
-          </a:p>
-          <a:p>
-            <a:pPr marL="0" indent="0">
-              <a:buNone/>
-            </a:pPr>
-            <a:r>
-              <a:rPr lang="en-IN" sz="3000" dirty="0">
-                <a:latin typeface="Times New Roman" panose="02020603050405020304" pitchFamily="18" charset="0"/>
-                <a:cs typeface="Times New Roman" panose="02020603050405020304" pitchFamily="18" charset="0"/>
-              </a:rPr>
-              <a:t>Our goal is not only to predict employee attrition, but to make the prediction understandable and useful for HR.</a:t>
-            </a:r>
-          </a:p>
-          <a:p>
-            <a:pPr marL="0" indent="0">
-              <a:buNone/>
-            </a:pPr>
-            <a:endParaRPr lang="en-IN" dirty="0"/>
+              <a:rPr lang="en-IN" sz="2400" dirty="0">
+                <a:latin typeface="Times New Roman" panose="02020603050405020304" pitchFamily="18" charset="0"/>
+                <a:cs typeface="Times New Roman" panose="02020603050405020304" pitchFamily="18" charset="0"/>
+              </a:rPr>
+              <a:t>The project successfully implements an Explainable AI framework for employee attrition prediction using the IBM HR dataset. Multiple Machine Learning models were trained and evaluated, with </a:t>
+            </a:r>
+            <a:r>
+              <a:rPr lang="en-IN" sz="2400" dirty="0" err="1">
+                <a:latin typeface="Times New Roman" panose="02020603050405020304" pitchFamily="18" charset="0"/>
+                <a:cs typeface="Times New Roman" panose="02020603050405020304" pitchFamily="18" charset="0"/>
+              </a:rPr>
+              <a:t>XGBoost</a:t>
+            </a:r>
+            <a:r>
+              <a:rPr lang="en-IN" sz="2400" dirty="0">
+                <a:latin typeface="Times New Roman" panose="02020603050405020304" pitchFamily="18" charset="0"/>
+                <a:cs typeface="Times New Roman" panose="02020603050405020304" pitchFamily="18" charset="0"/>
+              </a:rPr>
+              <a:t> selected based on ROC-AUC. SHAP and LIME were integrated to explain individual predictions. The developed web application provides an understandable prediction, probability and contributing factors for HR analysis.</a:t>
+            </a:r>
           </a:p>
         </p:txBody>
       </p:sp>
     </p:spTree>
     <p:extLst>
       <p:ext uri="{BB962C8B-B14F-4D97-AF65-F5344CB8AC3E}">
-        <p14:creationId xmlns:p14="http://schemas.microsoft.com/office/powerpoint/2010/main" val="1549260721"/>
+        <p14:creationId xmlns:p14="http://schemas.microsoft.com/office/powerpoint/2010/main" val="3085829887"/>
       </p:ext>
     </p:extLst>
   </p:cSld>
@@ -5821,7 +6396,7 @@
         </p:nvSpPr>
         <p:spPr>
           <a:xfrm>
-            <a:off x="914400" y="365125"/>
+            <a:off x="169933" y="154732"/>
             <a:ext cx="10439400" cy="614011"/>
           </a:xfrm>
         </p:spPr>
@@ -5859,16 +6434,18 @@
         </p:nvSpPr>
         <p:spPr>
           <a:xfrm>
-            <a:off x="838200" y="1526220"/>
+            <a:off x="838200" y="967869"/>
             <a:ext cx="10515600" cy="4351338"/>
           </a:xfrm>
         </p:spPr>
         <p:txBody>
-          <a:bodyPr/>
+          <a:bodyPr>
+            <a:normAutofit/>
+          </a:bodyPr>
           <a:lstStyle/>
           <a:p>
             <a:r>
-              <a:rPr lang="en-IN" dirty="0">
+              <a:rPr lang="en-IN" sz="2400" dirty="0">
                 <a:latin typeface="Times New Roman" panose="02020603050405020304" pitchFamily="18" charset="0"/>
                 <a:cs typeface="Times New Roman" panose="02020603050405020304" pitchFamily="18" charset="0"/>
               </a:rPr>
@@ -5877,52 +6454,27 @@
           </a:p>
           <a:p>
             <a:r>
-              <a:rPr lang="en-IN" dirty="0">
-                <a:latin typeface="Times New Roman" panose="02020603050405020304" pitchFamily="18" charset="0"/>
-                <a:cs typeface="Times New Roman" panose="02020603050405020304" pitchFamily="18" charset="0"/>
-              </a:rPr>
-              <a:t>Machine Learning can help predict employees who are more likely to leave. However, prediction alone is not enough for HR. The organization also needs to understand </a:t>
-            </a:r>
-            <a:r>
-              <a:rPr lang="en-IN" b="1" dirty="0">
-                <a:latin typeface="Times New Roman" panose="02020603050405020304" pitchFamily="18" charset="0"/>
-                <a:cs typeface="Times New Roman" panose="02020603050405020304" pitchFamily="18" charset="0"/>
-              </a:rPr>
-              <a:t>why the model gives that prediction</a:t>
-            </a:r>
-            <a:r>
-              <a:rPr lang="en-IN" dirty="0">
-                <a:latin typeface="Times New Roman" panose="02020603050405020304" pitchFamily="18" charset="0"/>
-                <a:cs typeface="Times New Roman" panose="02020603050405020304" pitchFamily="18" charset="0"/>
-              </a:rPr>
-              <a:t>.</a:t>
-            </a:r>
-          </a:p>
-          <a:p>
-            <a:r>
-              <a:rPr lang="en-IN" dirty="0">
-                <a:latin typeface="Times New Roman" panose="02020603050405020304" pitchFamily="18" charset="0"/>
-                <a:cs typeface="Times New Roman" panose="02020603050405020304" pitchFamily="18" charset="0"/>
-              </a:rPr>
-              <a:t>Our project therefore combines </a:t>
-            </a:r>
-            <a:r>
-              <a:rPr lang="en-IN" b="1" dirty="0">
-                <a:latin typeface="Times New Roman" panose="02020603050405020304" pitchFamily="18" charset="0"/>
-                <a:cs typeface="Times New Roman" panose="02020603050405020304" pitchFamily="18" charset="0"/>
-              </a:rPr>
-              <a:t>Machine Learning with Explainable AI</a:t>
-            </a:r>
-            <a:r>
-              <a:rPr lang="en-IN" dirty="0">
-                <a:latin typeface="Times New Roman" panose="02020603050405020304" pitchFamily="18" charset="0"/>
-                <a:cs typeface="Times New Roman" panose="02020603050405020304" pitchFamily="18" charset="0"/>
-              </a:rPr>
-              <a:t> to make employee attrition predictions more understandable and useful for HR decision-making.</a:t>
-            </a:r>
-          </a:p>
-          <a:p>
-            <a:endParaRPr lang="en-IN" dirty="0"/>
+              <a:rPr lang="en-IN" sz="2400" dirty="0">
+                <a:latin typeface="Times New Roman" panose="02020603050405020304" pitchFamily="18" charset="0"/>
+                <a:cs typeface="Times New Roman" panose="02020603050405020304" pitchFamily="18" charset="0"/>
+              </a:rPr>
+              <a:t>Machine Learning can help predict employees who are more likely to leave. However, prediction alone is not enough for HR. The organization also needs to understand why the model gives that prediction.</a:t>
+            </a:r>
+          </a:p>
+          <a:p>
+            <a:r>
+              <a:rPr lang="en-IN" sz="2400" dirty="0">
+                <a:latin typeface="Times New Roman" panose="02020603050405020304" pitchFamily="18" charset="0"/>
+                <a:cs typeface="Times New Roman" panose="02020603050405020304" pitchFamily="18" charset="0"/>
+              </a:rPr>
+              <a:t>Our project therefore combines Machine Learning with Explainable AI to make employee attrition predictions more understandable and useful for HR decision-making.</a:t>
+            </a:r>
+          </a:p>
+          <a:p>
+            <a:endParaRPr lang="en-IN" sz="2400" dirty="0">
+              <a:latin typeface="Times New Roman" panose="02020603050405020304" pitchFamily="18" charset="0"/>
+              <a:cs typeface="Times New Roman" panose="02020603050405020304" pitchFamily="18" charset="0"/>
+            </a:endParaRPr>
           </a:p>
         </p:txBody>
       </p:sp>
@@ -5980,7 +6532,7 @@
         </p:nvSpPr>
         <p:spPr>
           <a:xfrm>
-            <a:off x="914400" y="365125"/>
+            <a:off x="309857" y="122364"/>
             <a:ext cx="10439400" cy="614011"/>
           </a:xfrm>
         </p:spPr>
@@ -6018,97 +6570,80 @@
         </p:nvSpPr>
         <p:spPr>
           <a:xfrm>
-            <a:off x="835840" y="1388656"/>
+            <a:off x="1094786" y="886950"/>
             <a:ext cx="10520320" cy="4478070"/>
           </a:xfrm>
         </p:spPr>
         <p:txBody>
           <a:bodyPr>
-            <a:normAutofit lnSpcReduction="10000"/>
+            <a:normAutofit/>
           </a:bodyPr>
           <a:lstStyle/>
           <a:p>
-            <a:r>
-              <a:rPr lang="en-IN" dirty="0">
-                <a:latin typeface="Times New Roman" panose="02020603050405020304" pitchFamily="18" charset="0"/>
-                <a:cs typeface="Times New Roman" panose="02020603050405020304" pitchFamily="18" charset="0"/>
-              </a:rPr>
-              <a:t>Organizations often have employee data, but identifying employees who may leave is difficult.</a:t>
-            </a:r>
-          </a:p>
-          <a:p>
-            <a:pPr marL="0" indent="0">
-              <a:buNone/>
-            </a:pPr>
-            <a:endParaRPr lang="en-IN" dirty="0">
+            <a:pPr lvl="0"/>
+            <a:r>
+              <a:rPr lang="en-IN" sz="2400" dirty="0">
+                <a:latin typeface="Times New Roman" panose="02020603050405020304" pitchFamily="18" charset="0"/>
+                <a:cs typeface="Times New Roman" panose="02020603050405020304" pitchFamily="18" charset="0"/>
+              </a:rPr>
+              <a:t>Organizations have large amounts of employee data. </a:t>
+            </a:r>
+          </a:p>
+          <a:p>
+            <a:pPr lvl="0"/>
+            <a:r>
+              <a:rPr lang="en-IN" sz="2400" dirty="0">
+                <a:latin typeface="Times New Roman" panose="02020603050405020304" pitchFamily="18" charset="0"/>
+                <a:cs typeface="Times New Roman" panose="02020603050405020304" pitchFamily="18" charset="0"/>
+              </a:rPr>
+              <a:t>Identifying employees who may leave is difficult. </a:t>
+            </a:r>
+          </a:p>
+          <a:p>
+            <a:pPr lvl="0"/>
+            <a:r>
+              <a:rPr lang="en-IN" sz="2400" dirty="0">
+                <a:latin typeface="Times New Roman" panose="02020603050405020304" pitchFamily="18" charset="0"/>
+                <a:cs typeface="Times New Roman" panose="02020603050405020304" pitchFamily="18" charset="0"/>
+              </a:rPr>
+              <a:t>Employee attrition depends on multiple factors. </a:t>
+            </a:r>
+          </a:p>
+          <a:p>
+            <a:pPr lvl="0"/>
+            <a:r>
+              <a:rPr lang="en-IN" sz="2400" dirty="0">
+                <a:latin typeface="Times New Roman" panose="02020603050405020304" pitchFamily="18" charset="0"/>
+                <a:cs typeface="Times New Roman" panose="02020603050405020304" pitchFamily="18" charset="0"/>
+              </a:rPr>
+              <a:t>ML models may provide predictions without understandable reasons. </a:t>
+            </a:r>
+          </a:p>
+          <a:p>
+            <a:pPr lvl="0"/>
+            <a:r>
+              <a:rPr lang="en-IN" sz="2400" dirty="0">
+                <a:latin typeface="Times New Roman" panose="02020603050405020304" pitchFamily="18" charset="0"/>
+                <a:cs typeface="Times New Roman" panose="02020603050405020304" pitchFamily="18" charset="0"/>
+              </a:rPr>
+              <a:t>HR requires clear information about the factors influencing attrition. </a:t>
+            </a:r>
+          </a:p>
+          <a:p>
+            <a:pPr lvl="0"/>
+            <a:r>
+              <a:rPr lang="en-IN" sz="2400" dirty="0">
+                <a:latin typeface="Times New Roman" panose="02020603050405020304" pitchFamily="18" charset="0"/>
+                <a:cs typeface="Times New Roman" panose="02020603050405020304" pitchFamily="18" charset="0"/>
+              </a:rPr>
+              <a:t>Employee attrition data is imbalanced. </a:t>
+            </a:r>
+          </a:p>
+          <a:p>
+            <a:endParaRPr lang="en-IN" sz="2400" dirty="0">
               <a:latin typeface="Times New Roman" panose="02020603050405020304" pitchFamily="18" charset="0"/>
               <a:cs typeface="Times New Roman" panose="02020603050405020304" pitchFamily="18" charset="0"/>
             </a:endParaRPr>
-          </a:p>
-          <a:p>
-            <a:pPr marL="0" indent="0">
-              <a:buNone/>
-            </a:pPr>
-            <a:r>
-              <a:rPr lang="en-IN" b="1" dirty="0">
-                <a:latin typeface="Times New Roman" panose="02020603050405020304" pitchFamily="18" charset="0"/>
-                <a:cs typeface="Times New Roman" panose="02020603050405020304" pitchFamily="18" charset="0"/>
-              </a:rPr>
-              <a:t>Existing challenges:</a:t>
-            </a:r>
-          </a:p>
-          <a:p>
-            <a:pPr lvl="0"/>
-            <a:r>
-              <a:rPr lang="en-IN" dirty="0">
-                <a:latin typeface="Times New Roman" panose="02020603050405020304" pitchFamily="18" charset="0"/>
-                <a:cs typeface="Times New Roman" panose="02020603050405020304" pitchFamily="18" charset="0"/>
-              </a:rPr>
-              <a:t>Employee attrition is influenced by multiple factors. </a:t>
-            </a:r>
-          </a:p>
-          <a:p>
-            <a:pPr lvl="0"/>
-            <a:r>
-              <a:rPr lang="en-IN" dirty="0">
-                <a:latin typeface="Times New Roman" panose="02020603050405020304" pitchFamily="18" charset="0"/>
-                <a:cs typeface="Times New Roman" panose="02020603050405020304" pitchFamily="18" charset="0"/>
-              </a:rPr>
-              <a:t>Traditional ML models may behave like black boxes. </a:t>
-            </a:r>
-          </a:p>
-          <a:p>
-            <a:pPr lvl="0"/>
-            <a:r>
-              <a:rPr lang="en-IN" dirty="0">
-                <a:latin typeface="Times New Roman" panose="02020603050405020304" pitchFamily="18" charset="0"/>
-                <a:cs typeface="Times New Roman" panose="02020603050405020304" pitchFamily="18" charset="0"/>
-              </a:rPr>
-              <a:t>A prediction alone does not explain the reason. </a:t>
-            </a:r>
-          </a:p>
-          <a:p>
-            <a:pPr lvl="0"/>
-            <a:r>
-              <a:rPr lang="en-IN" dirty="0">
-                <a:latin typeface="Times New Roman" panose="02020603050405020304" pitchFamily="18" charset="0"/>
-                <a:cs typeface="Times New Roman" panose="02020603050405020304" pitchFamily="18" charset="0"/>
-              </a:rPr>
-              <a:t>HR needs understandable information before taking action. </a:t>
-            </a:r>
-          </a:p>
-          <a:p>
-            <a:pPr lvl="0"/>
-            <a:r>
-              <a:rPr lang="en-IN" dirty="0">
-                <a:latin typeface="Times New Roman" panose="02020603050405020304" pitchFamily="18" charset="0"/>
-                <a:cs typeface="Times New Roman" panose="02020603050405020304" pitchFamily="18" charset="0"/>
-              </a:rPr>
-              <a:t>Employee data can be imbalanced, making attrition prediction difficult.</a:t>
-            </a:r>
-          </a:p>
-          <a:p>
-            <a:endParaRPr lang="en-IN" dirty="0"/>
           </a:p>
         </p:txBody>
       </p:sp>
@@ -6126,214 +6661,6 @@
 </file>
 
 <file path=ppt/slides/slide4.xml><?xml version="1.0" encoding="utf-8"?>
-<p:sld xmlns:a="http://schemas.openxmlformats.org/drawingml/2006/main" xmlns:r="http://schemas.openxmlformats.org/officeDocument/2006/relationships" xmlns:p="http://schemas.openxmlformats.org/presentationml/2006/main">
-  <p:cSld>
-    <p:spTree>
-      <p:nvGrpSpPr>
-        <p:cNvPr id="1" name="">
-          <a:extLst>
-            <a:ext uri="{FF2B5EF4-FFF2-40B4-BE49-F238E27FC236}">
-              <a16:creationId xmlns:a16="http://schemas.microsoft.com/office/drawing/2014/main" id="{C6E46532-D44A-EA60-5368-C8F4DD8B177B}"/>
-            </a:ext>
-          </a:extLst>
-        </p:cNvPr>
-        <p:cNvGrpSpPr/>
-        <p:nvPr/>
-      </p:nvGrpSpPr>
-      <p:grpSpPr>
-        <a:xfrm>
-          <a:off x="0" y="0"/>
-          <a:ext cx="0" cy="0"/>
-          <a:chOff x="0" y="0"/>
-          <a:chExt cx="0" cy="0"/>
-        </a:xfrm>
-      </p:grpSpPr>
-      <p:sp>
-        <p:nvSpPr>
-          <p:cNvPr id="2" name="Title 1">
-            <a:extLst>
-              <a:ext uri="{FF2B5EF4-FFF2-40B4-BE49-F238E27FC236}">
-                <a16:creationId xmlns:a16="http://schemas.microsoft.com/office/drawing/2014/main" id="{1CCC314A-FC4E-F0E5-C416-0855703A9922}"/>
-              </a:ext>
-            </a:extLst>
-          </p:cNvPr>
-          <p:cNvSpPr>
-            <a:spLocks noGrp="1"/>
-          </p:cNvSpPr>
-          <p:nvPr>
-            <p:ph type="title"/>
-          </p:nvPr>
-        </p:nvSpPr>
-        <p:spPr>
-          <a:xfrm>
-            <a:off x="914400" y="365125"/>
-            <a:ext cx="10439400" cy="614011"/>
-          </a:xfrm>
-        </p:spPr>
-        <p:txBody>
-          <a:bodyPr>
-            <a:normAutofit/>
-          </a:bodyPr>
-          <a:lstStyle/>
-          <a:p>
-            <a:r>
-              <a:rPr lang="en-IN" sz="3200" dirty="0">
-                <a:latin typeface="Times New Roman" panose="02020603050405020304" pitchFamily="18" charset="0"/>
-                <a:cs typeface="Times New Roman" panose="02020603050405020304" pitchFamily="18" charset="0"/>
-              </a:rPr>
-              <a:t>Objectives:</a:t>
-            </a:r>
-          </a:p>
-        </p:txBody>
-      </p:sp>
-      <p:sp>
-        <p:nvSpPr>
-          <p:cNvPr id="3" name="Content Placeholder 2">
-            <a:extLst>
-              <a:ext uri="{FF2B5EF4-FFF2-40B4-BE49-F238E27FC236}">
-                <a16:creationId xmlns:a16="http://schemas.microsoft.com/office/drawing/2014/main" id="{C9E729DB-7546-7386-FD50-F6C6D594CA08}"/>
-              </a:ext>
-            </a:extLst>
-          </p:cNvPr>
-          <p:cNvSpPr>
-            <a:spLocks noGrp="1"/>
-          </p:cNvSpPr>
-          <p:nvPr>
-            <p:ph idx="1"/>
-          </p:nvPr>
-        </p:nvSpPr>
-        <p:spPr>
-          <a:xfrm>
-            <a:off x="835840" y="1558589"/>
-            <a:ext cx="10520320" cy="4478070"/>
-          </a:xfrm>
-        </p:spPr>
-        <p:txBody>
-          <a:bodyPr>
-            <a:normAutofit fontScale="92500" lnSpcReduction="20000"/>
-          </a:bodyPr>
-          <a:lstStyle/>
-          <a:p>
-            <a:pPr lvl="0"/>
-            <a:r>
-              <a:rPr lang="en-IN" sz="3000" dirty="0">
-                <a:latin typeface="Times New Roman" panose="02020603050405020304" pitchFamily="18" charset="0"/>
-                <a:cs typeface="Times New Roman" panose="02020603050405020304" pitchFamily="18" charset="0"/>
-              </a:rPr>
-              <a:t>To develop a Machine Learning model for predicting employee attrition. </a:t>
-            </a:r>
-          </a:p>
-          <a:p>
-            <a:pPr lvl="0"/>
-            <a:r>
-              <a:rPr lang="en-IN" sz="3000" dirty="0">
-                <a:latin typeface="Times New Roman" panose="02020603050405020304" pitchFamily="18" charset="0"/>
-                <a:cs typeface="Times New Roman" panose="02020603050405020304" pitchFamily="18" charset="0"/>
-              </a:rPr>
-              <a:t>To identify the important employee and job-related factors influencing attrition. </a:t>
-            </a:r>
-          </a:p>
-          <a:p>
-            <a:pPr lvl="0"/>
-            <a:r>
-              <a:rPr lang="en-IN" sz="3000" dirty="0">
-                <a:latin typeface="Times New Roman" panose="02020603050405020304" pitchFamily="18" charset="0"/>
-                <a:cs typeface="Times New Roman" panose="02020603050405020304" pitchFamily="18" charset="0"/>
-              </a:rPr>
-              <a:t>To apply </a:t>
-            </a:r>
-            <a:r>
-              <a:rPr lang="en-IN" sz="3000" b="1" dirty="0">
-                <a:latin typeface="Times New Roman" panose="02020603050405020304" pitchFamily="18" charset="0"/>
-                <a:cs typeface="Times New Roman" panose="02020603050405020304" pitchFamily="18" charset="0"/>
-              </a:rPr>
-              <a:t>Explainable AI techniques such as SHAP and LIME</a:t>
-            </a:r>
-            <a:r>
-              <a:rPr lang="en-IN" sz="3000" dirty="0">
-                <a:latin typeface="Times New Roman" panose="02020603050405020304" pitchFamily="18" charset="0"/>
-                <a:cs typeface="Times New Roman" panose="02020603050405020304" pitchFamily="18" charset="0"/>
-              </a:rPr>
-              <a:t> to explain model predictions. </a:t>
-            </a:r>
-          </a:p>
-          <a:p>
-            <a:pPr lvl="0"/>
-            <a:r>
-              <a:rPr lang="en-IN" sz="3000" dirty="0">
-                <a:latin typeface="Times New Roman" panose="02020603050405020304" pitchFamily="18" charset="0"/>
-                <a:cs typeface="Times New Roman" panose="02020603050405020304" pitchFamily="18" charset="0"/>
-              </a:rPr>
-              <a:t>To provide both </a:t>
-            </a:r>
-            <a:r>
-              <a:rPr lang="en-IN" sz="3000" b="1" dirty="0">
-                <a:latin typeface="Times New Roman" panose="02020603050405020304" pitchFamily="18" charset="0"/>
-                <a:cs typeface="Times New Roman" panose="02020603050405020304" pitchFamily="18" charset="0"/>
-              </a:rPr>
-              <a:t>overall feature importance and individual employee explanations</a:t>
-            </a:r>
-            <a:r>
-              <a:rPr lang="en-IN" sz="3000" dirty="0">
-                <a:latin typeface="Times New Roman" panose="02020603050405020304" pitchFamily="18" charset="0"/>
-                <a:cs typeface="Times New Roman" panose="02020603050405020304" pitchFamily="18" charset="0"/>
-              </a:rPr>
-              <a:t>. </a:t>
-            </a:r>
-          </a:p>
-          <a:p>
-            <a:pPr lvl="0"/>
-            <a:r>
-              <a:rPr lang="en-IN" sz="3000" dirty="0">
-                <a:latin typeface="Times New Roman" panose="02020603050405020304" pitchFamily="18" charset="0"/>
-                <a:cs typeface="Times New Roman" panose="02020603050405020304" pitchFamily="18" charset="0"/>
-              </a:rPr>
-              <a:t>To evaluate the model using </a:t>
-            </a:r>
-            <a:r>
-              <a:rPr lang="en-IN" sz="3000" b="1" dirty="0">
-                <a:latin typeface="Times New Roman" panose="02020603050405020304" pitchFamily="18" charset="0"/>
-                <a:cs typeface="Times New Roman" panose="02020603050405020304" pitchFamily="18" charset="0"/>
-              </a:rPr>
-              <a:t>Accuracy, Precision, Recall, F1-score and ROC-AUC</a:t>
-            </a:r>
-            <a:r>
-              <a:rPr lang="en-IN" sz="3000" dirty="0">
-                <a:latin typeface="Times New Roman" panose="02020603050405020304" pitchFamily="18" charset="0"/>
-                <a:cs typeface="Times New Roman" panose="02020603050405020304" pitchFamily="18" charset="0"/>
-              </a:rPr>
-              <a:t>. </a:t>
-            </a:r>
-          </a:p>
-          <a:p>
-            <a:pPr lvl="0"/>
-            <a:r>
-              <a:rPr lang="en-IN" sz="3000" dirty="0">
-                <a:latin typeface="Times New Roman" panose="02020603050405020304" pitchFamily="18" charset="0"/>
-                <a:cs typeface="Times New Roman" panose="02020603050405020304" pitchFamily="18" charset="0"/>
-              </a:rPr>
-              <a:t>To present the results in a simple form that can support HR decision-making.</a:t>
-            </a:r>
-          </a:p>
-          <a:p>
-            <a:endParaRPr lang="en-IN" dirty="0"/>
-          </a:p>
-        </p:txBody>
-      </p:sp>
-    </p:spTree>
-    <p:extLst>
-      <p:ext uri="{BB962C8B-B14F-4D97-AF65-F5344CB8AC3E}">
-        <p14:creationId xmlns:p14="http://schemas.microsoft.com/office/powerpoint/2010/main" val="3084787290"/>
-      </p:ext>
-    </p:extLst>
-  </p:cSld>
-  <p:clrMapOvr>
-    <a:masterClrMapping/>
-  </p:clrMapOvr>
-</p:sld>
-</file>
-
-<file path=ppt/slides/slide5.xml><?xml version="1.0" encoding="utf-8"?>
 <p:sld xmlns:a="http://schemas.openxmlformats.org/drawingml/2006/main" xmlns:r="http://schemas.openxmlformats.org/officeDocument/2006/relationships" xmlns:p="http://schemas.openxmlformats.org/presentationml/2006/main">
   <p:cSld>
     <p:spTree>
@@ -6374,7 +6701,7 @@
         </p:nvSpPr>
         <p:spPr>
           <a:xfrm>
-            <a:off x="914400" y="365125"/>
+            <a:off x="145656" y="154732"/>
             <a:ext cx="10439400" cy="614011"/>
           </a:xfrm>
         </p:spPr>
@@ -6412,119 +6739,94 @@
         </p:nvSpPr>
         <p:spPr>
           <a:xfrm>
-            <a:off x="835840" y="1558589"/>
+            <a:off x="916759" y="992146"/>
             <a:ext cx="10520320" cy="4478070"/>
           </a:xfrm>
         </p:spPr>
         <p:txBody>
           <a:bodyPr>
-            <a:normAutofit lnSpcReduction="10000"/>
+            <a:normAutofit/>
           </a:bodyPr>
           <a:lstStyle/>
           <a:p>
             <a:pPr lvl="0"/>
             <a:r>
-              <a:rPr lang="en-IN" sz="2600" dirty="0">
-                <a:latin typeface="Times New Roman" panose="02020603050405020304" pitchFamily="18" charset="0"/>
-                <a:cs typeface="Times New Roman" panose="02020603050405020304" pitchFamily="18" charset="0"/>
-              </a:rPr>
-              <a:t>To develop a Machine Learning model for predicting employee attrition. </a:t>
+              <a:rPr lang="en-IN" sz="2400" dirty="0">
+                <a:latin typeface="Times New Roman" panose="02020603050405020304" pitchFamily="18" charset="0"/>
+                <a:cs typeface="Times New Roman" panose="02020603050405020304" pitchFamily="18" charset="0"/>
+              </a:rPr>
+              <a:t>Predict employee attrition using Machine Learning. </a:t>
             </a:r>
           </a:p>
           <a:p>
             <a:pPr lvl="0"/>
             <a:r>
-              <a:rPr lang="en-IN" sz="2600" dirty="0">
-                <a:latin typeface="Times New Roman" panose="02020603050405020304" pitchFamily="18" charset="0"/>
-                <a:cs typeface="Times New Roman" panose="02020603050405020304" pitchFamily="18" charset="0"/>
-              </a:rPr>
-              <a:t>To identify the important employee and job-related factors influencing attrition. </a:t>
+              <a:rPr lang="en-IN" sz="2400" dirty="0">
+                <a:latin typeface="Times New Roman" panose="02020603050405020304" pitchFamily="18" charset="0"/>
+                <a:cs typeface="Times New Roman" panose="02020603050405020304" pitchFamily="18" charset="0"/>
+              </a:rPr>
+              <a:t>Identify important factors influencing employee attrition. </a:t>
             </a:r>
           </a:p>
           <a:p>
             <a:pPr lvl="0"/>
             <a:r>
-              <a:rPr lang="en-IN" sz="2600" dirty="0">
-                <a:latin typeface="Times New Roman" panose="02020603050405020304" pitchFamily="18" charset="0"/>
-                <a:cs typeface="Times New Roman" panose="02020603050405020304" pitchFamily="18" charset="0"/>
-              </a:rPr>
-              <a:t>To apply </a:t>
-            </a:r>
-            <a:r>
-              <a:rPr lang="en-IN" sz="2600" b="1" dirty="0">
-                <a:latin typeface="Times New Roman" panose="02020603050405020304" pitchFamily="18" charset="0"/>
-                <a:cs typeface="Times New Roman" panose="02020603050405020304" pitchFamily="18" charset="0"/>
-              </a:rPr>
-              <a:t>Explainable AI techniques such as SHAP and LIME</a:t>
-            </a:r>
-            <a:r>
-              <a:rPr lang="en-IN" sz="2600" dirty="0">
-                <a:latin typeface="Times New Roman" panose="02020603050405020304" pitchFamily="18" charset="0"/>
-                <a:cs typeface="Times New Roman" panose="02020603050405020304" pitchFamily="18" charset="0"/>
-              </a:rPr>
-              <a:t> to explain model predictions. </a:t>
+              <a:rPr lang="en-IN" sz="2400" dirty="0">
+                <a:latin typeface="Times New Roman" panose="02020603050405020304" pitchFamily="18" charset="0"/>
+                <a:cs typeface="Times New Roman" panose="02020603050405020304" pitchFamily="18" charset="0"/>
+              </a:rPr>
+              <a:t>Use </a:t>
+            </a:r>
+            <a:r>
+              <a:rPr lang="en-IN" sz="2400" b="1" dirty="0">
+                <a:latin typeface="Times New Roman" panose="02020603050405020304" pitchFamily="18" charset="0"/>
+                <a:cs typeface="Times New Roman" panose="02020603050405020304" pitchFamily="18" charset="0"/>
+              </a:rPr>
+              <a:t>SHAP and LIME</a:t>
+            </a:r>
+            <a:r>
+              <a:rPr lang="en-IN" sz="2400" dirty="0">
+                <a:latin typeface="Times New Roman" panose="02020603050405020304" pitchFamily="18" charset="0"/>
+                <a:cs typeface="Times New Roman" panose="02020603050405020304" pitchFamily="18" charset="0"/>
+              </a:rPr>
+              <a:t> for explainability. </a:t>
             </a:r>
           </a:p>
           <a:p>
             <a:pPr lvl="0"/>
             <a:r>
-              <a:rPr lang="en-IN" sz="2600" dirty="0">
-                <a:latin typeface="Times New Roman" panose="02020603050405020304" pitchFamily="18" charset="0"/>
-                <a:cs typeface="Times New Roman" panose="02020603050405020304" pitchFamily="18" charset="0"/>
-              </a:rPr>
-              <a:t>To provide both </a:t>
-            </a:r>
-            <a:r>
-              <a:rPr lang="en-IN" sz="2600" b="1" dirty="0">
-                <a:latin typeface="Times New Roman" panose="02020603050405020304" pitchFamily="18" charset="0"/>
-                <a:cs typeface="Times New Roman" panose="02020603050405020304" pitchFamily="18" charset="0"/>
-              </a:rPr>
-              <a:t>overall feature importance and individual employee explanations</a:t>
-            </a:r>
-            <a:r>
-              <a:rPr lang="en-IN" sz="2600" dirty="0">
-                <a:latin typeface="Times New Roman" panose="02020603050405020304" pitchFamily="18" charset="0"/>
-                <a:cs typeface="Times New Roman" panose="02020603050405020304" pitchFamily="18" charset="0"/>
-              </a:rPr>
-              <a:t>. </a:t>
+              <a:rPr lang="en-IN" sz="2400" dirty="0">
+                <a:latin typeface="Times New Roman" panose="02020603050405020304" pitchFamily="18" charset="0"/>
+                <a:cs typeface="Times New Roman" panose="02020603050405020304" pitchFamily="18" charset="0"/>
+              </a:rPr>
+              <a:t>Provide both overall and individual-level explanations. </a:t>
             </a:r>
           </a:p>
           <a:p>
             <a:pPr lvl="0"/>
             <a:r>
-              <a:rPr lang="en-IN" sz="2600" dirty="0">
-                <a:latin typeface="Times New Roman" panose="02020603050405020304" pitchFamily="18" charset="0"/>
-                <a:cs typeface="Times New Roman" panose="02020603050405020304" pitchFamily="18" charset="0"/>
-              </a:rPr>
-              <a:t>To evaluate the model using </a:t>
-            </a:r>
-            <a:r>
-              <a:rPr lang="en-IN" sz="2600" b="1" dirty="0">
-                <a:latin typeface="Times New Roman" panose="02020603050405020304" pitchFamily="18" charset="0"/>
-                <a:cs typeface="Times New Roman" panose="02020603050405020304" pitchFamily="18" charset="0"/>
-              </a:rPr>
-              <a:t>Accuracy, Precision, Recall, F1-score and ROC-AUC</a:t>
-            </a:r>
-            <a:r>
-              <a:rPr lang="en-IN" sz="2600" dirty="0">
-                <a:latin typeface="Times New Roman" panose="02020603050405020304" pitchFamily="18" charset="0"/>
-                <a:cs typeface="Times New Roman" panose="02020603050405020304" pitchFamily="18" charset="0"/>
-              </a:rPr>
-              <a:t>. </a:t>
+              <a:rPr lang="en-IN" sz="2400" dirty="0">
+                <a:latin typeface="Times New Roman" panose="02020603050405020304" pitchFamily="18" charset="0"/>
+                <a:cs typeface="Times New Roman" panose="02020603050405020304" pitchFamily="18" charset="0"/>
+              </a:rPr>
+              <a:t>Evaluate models using Accuracy, Precision, Recall, F1-Score and ROC-AUC. </a:t>
             </a:r>
           </a:p>
           <a:p>
             <a:pPr lvl="0"/>
             <a:r>
-              <a:rPr lang="en-IN" sz="2600" dirty="0">
-                <a:latin typeface="Times New Roman" panose="02020603050405020304" pitchFamily="18" charset="0"/>
-                <a:cs typeface="Times New Roman" panose="02020603050405020304" pitchFamily="18" charset="0"/>
-              </a:rPr>
-              <a:t>To present the results in a simple form that can support HR decision-making.</a:t>
-            </a:r>
-          </a:p>
-          <a:p>
-            <a:endParaRPr lang="en-IN" dirty="0"/>
+              <a:rPr lang="en-IN" sz="2400" dirty="0">
+                <a:latin typeface="Times New Roman" panose="02020603050405020304" pitchFamily="18" charset="0"/>
+                <a:cs typeface="Times New Roman" panose="02020603050405020304" pitchFamily="18" charset="0"/>
+              </a:rPr>
+              <a:t>Provide understandable information for HR decision support. </a:t>
+            </a:r>
+          </a:p>
+          <a:p>
+            <a:endParaRPr lang="en-IN" sz="2400" dirty="0">
+              <a:latin typeface="Times New Roman" panose="02020603050405020304" pitchFamily="18" charset="0"/>
+              <a:cs typeface="Times New Roman" panose="02020603050405020304" pitchFamily="18" charset="0"/>
+            </a:endParaRPr>
           </a:p>
         </p:txBody>
       </p:sp>
@@ -6541,7 +6843,7 @@
 </p:sld>
 </file>
 
-<file path=ppt/slides/slide6.xml><?xml version="1.0" encoding="utf-8"?>
+<file path=ppt/slides/slide5.xml><?xml version="1.0" encoding="utf-8"?>
 <p:sld xmlns:a="http://schemas.openxmlformats.org/drawingml/2006/main" xmlns:r="http://schemas.openxmlformats.org/officeDocument/2006/relationships" xmlns:p="http://schemas.openxmlformats.org/presentationml/2006/main">
   <p:cSld>
     <p:spTree>
@@ -6582,7 +6884,7 @@
         </p:nvSpPr>
         <p:spPr>
           <a:xfrm>
-            <a:off x="388755" y="365125"/>
+            <a:off x="178362" y="146640"/>
             <a:ext cx="10965045" cy="614011"/>
           </a:xfrm>
         </p:spPr>
@@ -6618,7 +6920,7 @@
             <p:ph idx="1"/>
             <p:extLst>
               <p:ext uri="{D42A27DB-BD31-4B8C-83A1-F6EECF244321}">
-                <p14:modId xmlns:p14="http://schemas.microsoft.com/office/powerpoint/2010/main" val="2564523335"/>
+                <p14:modId xmlns:p14="http://schemas.microsoft.com/office/powerpoint/2010/main" val="169891185"/>
               </p:ext>
             </p:extLst>
           </p:nvPr>
@@ -6677,7 +6979,10 @@
                     <a:lstStyle/>
                     <a:p>
                       <a:r>
-                        <a:rPr lang="en-IN" dirty="0"/>
+                        <a:rPr lang="en-IN" dirty="0">
+                          <a:latin typeface="Times New Roman" panose="02020603050405020304" pitchFamily="18" charset="0"/>
+                          <a:cs typeface="Times New Roman" panose="02020603050405020304" pitchFamily="18" charset="0"/>
+                        </a:rPr>
                         <a:t>YEAR</a:t>
                       </a:r>
                     </a:p>
@@ -6690,7 +6995,10 @@
                     <a:lstStyle/>
                     <a:p>
                       <a:r>
-                        <a:rPr lang="en-IN" dirty="0"/>
+                        <a:rPr lang="en-IN" dirty="0">
+                          <a:latin typeface="Times New Roman" panose="02020603050405020304" pitchFamily="18" charset="0"/>
+                          <a:cs typeface="Times New Roman" panose="02020603050405020304" pitchFamily="18" charset="0"/>
+                        </a:rPr>
                         <a:t>RESEARCH</a:t>
                       </a:r>
                     </a:p>
@@ -6703,7 +7011,10 @@
                     <a:lstStyle/>
                     <a:p>
                       <a:r>
-                        <a:rPr lang="en-IN" dirty="0"/>
+                        <a:rPr lang="en-IN" dirty="0">
+                          <a:latin typeface="Times New Roman" panose="02020603050405020304" pitchFamily="18" charset="0"/>
+                          <a:cs typeface="Times New Roman" panose="02020603050405020304" pitchFamily="18" charset="0"/>
+                        </a:rPr>
                         <a:t>TECHNIQUE</a:t>
                       </a:r>
                     </a:p>
@@ -6716,7 +7027,10 @@
                     <a:lstStyle/>
                     <a:p>
                       <a:r>
-                        <a:rPr lang="en-IN" dirty="0"/>
+                        <a:rPr lang="en-IN" dirty="0">
+                          <a:latin typeface="Times New Roman" panose="02020603050405020304" pitchFamily="18" charset="0"/>
+                          <a:cs typeface="Times New Roman" panose="02020603050405020304" pitchFamily="18" charset="0"/>
+                        </a:rPr>
                         <a:t>PURPOSE</a:t>
                       </a:r>
                     </a:p>
@@ -6729,7 +7043,10 @@
                     <a:lstStyle/>
                     <a:p>
                       <a:r>
-                        <a:rPr lang="en-IN" dirty="0"/>
+                        <a:rPr lang="en-IN" dirty="0">
+                          <a:latin typeface="Times New Roman" panose="02020603050405020304" pitchFamily="18" charset="0"/>
+                          <a:cs typeface="Times New Roman" panose="02020603050405020304" pitchFamily="18" charset="0"/>
+                        </a:rPr>
                         <a:t>LIMITATION/GAP</a:t>
                       </a:r>
                     </a:p>
@@ -6765,13 +7082,12 @@
                     <a:lstStyle/>
                     <a:p>
                       <a:r>
-                        <a:rPr lang="en-IN" sz="1400" dirty="0"/>
+                        <a:rPr lang="en-IN" sz="1400" dirty="0">
+                          <a:latin typeface="Times New Roman" panose="02020603050405020304" pitchFamily="18" charset="0"/>
+                          <a:cs typeface="Times New Roman" panose="02020603050405020304" pitchFamily="18" charset="0"/>
+                        </a:rPr>
                         <a:t>Interpreting the Factors of Employee Attrition using Explainable AI</a:t>
                       </a:r>
-                      <a:endParaRPr lang="en-IN" sz="1400" dirty="0">
-                        <a:latin typeface="Times New Roman" panose="02020603050405020304" pitchFamily="18" charset="0"/>
-                        <a:cs typeface="Times New Roman" panose="02020603050405020304" pitchFamily="18" charset="0"/>
-                      </a:endParaRPr>
                     </a:p>
                   </a:txBody>
                   <a:tcPr/>
@@ -7226,7 +7542,7 @@
 </p:sld>
 </file>
 
-<file path=ppt/slides/slide7.xml><?xml version="1.0" encoding="utf-8"?>
+<file path=ppt/slides/slide6.xml><?xml version="1.0" encoding="utf-8"?>
 <p:sld xmlns:a="http://schemas.openxmlformats.org/drawingml/2006/main" xmlns:r="http://schemas.openxmlformats.org/officeDocument/2006/relationships" xmlns:p="http://schemas.openxmlformats.org/presentationml/2006/main">
   <p:cSld>
     <p:spTree>
@@ -7261,7 +7577,7 @@
         </p:nvSpPr>
         <p:spPr>
           <a:xfrm>
-            <a:off x="627807" y="146641"/>
+            <a:off x="198929" y="98088"/>
             <a:ext cx="10515600" cy="743484"/>
           </a:xfrm>
         </p:spPr>
@@ -7297,110 +7613,92 @@
             <p:ph idx="1"/>
           </p:nvPr>
         </p:nvSpPr>
-        <p:spPr/>
-        <p:txBody>
-          <a:bodyPr/>
+        <p:spPr>
+          <a:xfrm>
+            <a:off x="708727" y="1010570"/>
+            <a:ext cx="10515600" cy="4351338"/>
+          </a:xfrm>
+        </p:spPr>
+        <p:txBody>
+          <a:bodyPr>
+            <a:normAutofit/>
+          </a:bodyPr>
           <a:lstStyle/>
           <a:p>
-            <a:r>
-              <a:rPr lang="en-IN" b="1" dirty="0">
-                <a:latin typeface="Times New Roman" panose="02020603050405020304" pitchFamily="18" charset="0"/>
-                <a:cs typeface="Times New Roman" panose="02020603050405020304" pitchFamily="18" charset="0"/>
-              </a:rPr>
-              <a:t>Existing research already provides:</a:t>
-            </a:r>
-          </a:p>
-          <a:p>
-            <a:pPr marL="0" indent="0">
-              <a:buNone/>
-            </a:pPr>
-            <a:r>
-              <a:rPr lang="en-IN" dirty="0">
-                <a:latin typeface="Times New Roman" panose="02020603050405020304" pitchFamily="18" charset="0"/>
-                <a:cs typeface="Times New Roman" panose="02020603050405020304" pitchFamily="18" charset="0"/>
-              </a:rPr>
-              <a:t> Attrition prediction</a:t>
-            </a:r>
-            <a:br>
-              <a:rPr lang="en-IN" dirty="0">
-                <a:latin typeface="Times New Roman" panose="02020603050405020304" pitchFamily="18" charset="0"/>
-                <a:cs typeface="Times New Roman" panose="02020603050405020304" pitchFamily="18" charset="0"/>
-              </a:rPr>
-            </a:br>
-            <a:r>
-              <a:rPr lang="en-IN" dirty="0">
-                <a:latin typeface="Times New Roman" panose="02020603050405020304" pitchFamily="18" charset="0"/>
-                <a:cs typeface="Times New Roman" panose="02020603050405020304" pitchFamily="18" charset="0"/>
-              </a:rPr>
-              <a:t> SHAP-based explanations</a:t>
-            </a:r>
-            <a:br>
-              <a:rPr lang="en-IN" dirty="0">
-                <a:latin typeface="Times New Roman" panose="02020603050405020304" pitchFamily="18" charset="0"/>
-                <a:cs typeface="Times New Roman" panose="02020603050405020304" pitchFamily="18" charset="0"/>
-              </a:rPr>
-            </a:br>
-            <a:r>
-              <a:rPr lang="en-IN" dirty="0">
-                <a:latin typeface="Times New Roman" panose="02020603050405020304" pitchFamily="18" charset="0"/>
-                <a:cs typeface="Times New Roman" panose="02020603050405020304" pitchFamily="18" charset="0"/>
-              </a:rPr>
-              <a:t> LIME-based individual explanations</a:t>
-            </a:r>
-          </a:p>
-          <a:p>
-            <a:pPr marL="0" indent="0">
-              <a:buNone/>
-            </a:pPr>
-            <a:r>
-              <a:rPr lang="en-IN" dirty="0">
-                <a:latin typeface="Times New Roman" panose="02020603050405020304" pitchFamily="18" charset="0"/>
-                <a:cs typeface="Times New Roman" panose="02020603050405020304" pitchFamily="18" charset="0"/>
-              </a:rPr>
-              <a:t> Ensemble models</a:t>
-            </a:r>
-            <a:br>
-              <a:rPr lang="en-IN" dirty="0">
-                <a:latin typeface="Times New Roman" panose="02020603050405020304" pitchFamily="18" charset="0"/>
-                <a:cs typeface="Times New Roman" panose="02020603050405020304" pitchFamily="18" charset="0"/>
-              </a:rPr>
-            </a:br>
-            <a:r>
-              <a:rPr lang="en-IN" dirty="0">
-                <a:latin typeface="Times New Roman" panose="02020603050405020304" pitchFamily="18" charset="0"/>
-                <a:cs typeface="Times New Roman" panose="02020603050405020304" pitchFamily="18" charset="0"/>
-              </a:rPr>
-              <a:t> Risk scoring</a:t>
-            </a:r>
-            <a:br>
-              <a:rPr lang="en-IN" dirty="0">
-                <a:latin typeface="Times New Roman" panose="02020603050405020304" pitchFamily="18" charset="0"/>
-                <a:cs typeface="Times New Roman" panose="02020603050405020304" pitchFamily="18" charset="0"/>
-              </a:rPr>
-            </a:br>
-            <a:r>
-              <a:rPr lang="en-IN" dirty="0">
-                <a:latin typeface="Times New Roman" panose="02020603050405020304" pitchFamily="18" charset="0"/>
-                <a:cs typeface="Times New Roman" panose="02020603050405020304" pitchFamily="18" charset="0"/>
-              </a:rPr>
-              <a:t> Fairness analysis</a:t>
-            </a:r>
-            <a:br>
-              <a:rPr lang="en-IN" dirty="0">
-                <a:latin typeface="Times New Roman" panose="02020603050405020304" pitchFamily="18" charset="0"/>
-                <a:cs typeface="Times New Roman" panose="02020603050405020304" pitchFamily="18" charset="0"/>
-              </a:rPr>
-            </a:br>
-            <a:r>
-              <a:rPr lang="en-IN" dirty="0">
-                <a:latin typeface="Times New Roman" panose="02020603050405020304" pitchFamily="18" charset="0"/>
-                <a:cs typeface="Times New Roman" panose="02020603050405020304" pitchFamily="18" charset="0"/>
-              </a:rPr>
-              <a:t> HR decision support</a:t>
-            </a:r>
-          </a:p>
-          <a:p>
-            <a:endParaRPr lang="en-IN" dirty="0"/>
+            <a:pPr lvl="0"/>
+            <a:r>
+              <a:rPr lang="en-IN" sz="2400" dirty="0">
+                <a:latin typeface="Times New Roman" panose="02020603050405020304" pitchFamily="18" charset="0"/>
+                <a:cs typeface="Times New Roman" panose="02020603050405020304" pitchFamily="18" charset="0"/>
+              </a:rPr>
+              <a:t>Existing research focuses on employee attrition prediction. </a:t>
+            </a:r>
+          </a:p>
+          <a:p>
+            <a:pPr lvl="0"/>
+            <a:r>
+              <a:rPr lang="en-IN" sz="2400" dirty="0">
+                <a:latin typeface="Times New Roman" panose="02020603050405020304" pitchFamily="18" charset="0"/>
+                <a:cs typeface="Times New Roman" panose="02020603050405020304" pitchFamily="18" charset="0"/>
+              </a:rPr>
+              <a:t>SHAP is used for model explanations. </a:t>
+            </a:r>
+          </a:p>
+          <a:p>
+            <a:pPr lvl="0"/>
+            <a:r>
+              <a:rPr lang="en-IN" sz="2400" dirty="0">
+                <a:latin typeface="Times New Roman" panose="02020603050405020304" pitchFamily="18" charset="0"/>
+                <a:cs typeface="Times New Roman" panose="02020603050405020304" pitchFamily="18" charset="0"/>
+              </a:rPr>
+              <a:t>LIME is used for individual explanations. </a:t>
+            </a:r>
+          </a:p>
+          <a:p>
+            <a:pPr lvl="0"/>
+            <a:r>
+              <a:rPr lang="en-IN" sz="2400" dirty="0">
+                <a:latin typeface="Times New Roman" panose="02020603050405020304" pitchFamily="18" charset="0"/>
+                <a:cs typeface="Times New Roman" panose="02020603050405020304" pitchFamily="18" charset="0"/>
+              </a:rPr>
+              <a:t>Ensemble models are used for prediction. </a:t>
+            </a:r>
+          </a:p>
+          <a:p>
+            <a:pPr lvl="0"/>
+            <a:r>
+              <a:rPr lang="en-IN" sz="2400" dirty="0">
+                <a:latin typeface="Times New Roman" panose="02020603050405020304" pitchFamily="18" charset="0"/>
+                <a:cs typeface="Times New Roman" panose="02020603050405020304" pitchFamily="18" charset="0"/>
+              </a:rPr>
+              <a:t>Risk scoring is used in some approaches. </a:t>
+            </a:r>
+          </a:p>
+          <a:p>
+            <a:pPr lvl="0"/>
+            <a:r>
+              <a:rPr lang="en-IN" sz="2400" dirty="0">
+                <a:latin typeface="Times New Roman" panose="02020603050405020304" pitchFamily="18" charset="0"/>
+                <a:cs typeface="Times New Roman" panose="02020603050405020304" pitchFamily="18" charset="0"/>
+              </a:rPr>
+              <a:t>Fairness analysis is considered in some research. </a:t>
+            </a:r>
+          </a:p>
+          <a:p>
+            <a:pPr lvl="0"/>
+            <a:r>
+              <a:rPr lang="en-IN" sz="2400" dirty="0">
+                <a:latin typeface="Times New Roman" panose="02020603050405020304" pitchFamily="18" charset="0"/>
+                <a:cs typeface="Times New Roman" panose="02020603050405020304" pitchFamily="18" charset="0"/>
+              </a:rPr>
+              <a:t>An integrated prediction + explanation + HR decision-support framework is still needed. </a:t>
+            </a:r>
+          </a:p>
+          <a:p>
+            <a:endParaRPr lang="en-IN" sz="2400" dirty="0">
+              <a:latin typeface="Times New Roman" panose="02020603050405020304" pitchFamily="18" charset="0"/>
+              <a:cs typeface="Times New Roman" panose="02020603050405020304" pitchFamily="18" charset="0"/>
+            </a:endParaRPr>
           </a:p>
         </p:txBody>
       </p:sp>
@@ -7417,7 +7715,7 @@
 </p:sld>
 </file>
 
-<file path=ppt/slides/slide8.xml><?xml version="1.0" encoding="utf-8"?>
+<file path=ppt/slides/slide7.xml><?xml version="1.0" encoding="utf-8"?>
 <p:sld xmlns:a="http://schemas.openxmlformats.org/drawingml/2006/main" xmlns:r="http://schemas.openxmlformats.org/officeDocument/2006/relationships" xmlns:p="http://schemas.openxmlformats.org/presentationml/2006/main">
   <p:cSld>
     <p:spTree>
@@ -7458,8 +7756,8 @@
         </p:nvSpPr>
         <p:spPr>
           <a:xfrm>
-            <a:off x="627807" y="146641"/>
-            <a:ext cx="10515600" cy="743484"/>
+            <a:off x="64736" y="0"/>
+            <a:ext cx="11078671" cy="890125"/>
           </a:xfrm>
         </p:spPr>
         <p:txBody>
@@ -7469,13 +7767,12 @@
           <a:lstStyle/>
           <a:p>
             <a:r>
-              <a:rPr lang="en-IN" sz="3200" dirty="0"/>
-              <a:t>Innovation</a:t>
-            </a:r>
-            <a:endParaRPr lang="en-IN" sz="3200" dirty="0">
-              <a:latin typeface="Times New Roman" panose="02020603050405020304" pitchFamily="18" charset="0"/>
-              <a:cs typeface="Times New Roman" panose="02020603050405020304" pitchFamily="18" charset="0"/>
-            </a:endParaRPr>
+              <a:rPr lang="en-IN" sz="3200" dirty="0">
+                <a:latin typeface="Times New Roman" panose="02020603050405020304" pitchFamily="18" charset="0"/>
+                <a:cs typeface="Times New Roman" panose="02020603050405020304" pitchFamily="18" charset="0"/>
+              </a:rPr>
+              <a:t>Innovation, Creativity &amp; Novelty</a:t>
+            </a:r>
           </a:p>
         </p:txBody>
       </p:sp>
@@ -7497,13 +7794,13 @@
         </p:nvSpPr>
         <p:spPr>
           <a:xfrm>
-            <a:off x="627807" y="1081157"/>
+            <a:off x="964300" y="890125"/>
             <a:ext cx="10645073" cy="5473391"/>
           </a:xfrm>
         </p:spPr>
         <p:txBody>
           <a:bodyPr>
-            <a:normAutofit fontScale="47500" lnSpcReduction="20000"/>
+            <a:normAutofit/>
           </a:bodyPr>
           <a:lstStyle/>
           <a:p>
@@ -7511,25 +7808,11 @@
               <a:buNone/>
             </a:pPr>
             <a:r>
-              <a:rPr lang="en-IN" sz="5100" dirty="0">
-                <a:latin typeface="Times New Roman" panose="02020603050405020304" pitchFamily="18" charset="0"/>
-                <a:cs typeface="Times New Roman" panose="02020603050405020304" pitchFamily="18" charset="0"/>
-              </a:rPr>
-              <a:t>Employee</a:t>
-            </a:r>
-            <a:r>
-              <a:rPr lang="en-IN" sz="5100" b="1" dirty="0">
-                <a:latin typeface="Times New Roman" panose="02020603050405020304" pitchFamily="18" charset="0"/>
-                <a:cs typeface="Times New Roman" panose="02020603050405020304" pitchFamily="18" charset="0"/>
-              </a:rPr>
-              <a:t> </a:t>
-            </a:r>
-            <a:r>
-              <a:rPr lang="en-IN" sz="5100" dirty="0">
-                <a:latin typeface="Times New Roman" panose="02020603050405020304" pitchFamily="18" charset="0"/>
-                <a:cs typeface="Times New Roman" panose="02020603050405020304" pitchFamily="18" charset="0"/>
-              </a:rPr>
-              <a:t>Attrition Risk Profile</a:t>
+              <a:rPr lang="en-IN" sz="2400" b="1" dirty="0">
+                <a:latin typeface="Times New Roman" panose="02020603050405020304" pitchFamily="18" charset="0"/>
+                <a:cs typeface="Times New Roman" panose="02020603050405020304" pitchFamily="18" charset="0"/>
+              </a:rPr>
+              <a:t>Employee Attrition Risk Profile</a:t>
             </a:r>
           </a:p>
           <a:p>
@@ -7537,171 +7820,72 @@
               <a:buNone/>
             </a:pPr>
             <a:r>
-              <a:rPr lang="en-IN" sz="5100" dirty="0">
-                <a:latin typeface="Times New Roman" panose="02020603050405020304" pitchFamily="18" charset="0"/>
-                <a:cs typeface="Times New Roman" panose="02020603050405020304" pitchFamily="18" charset="0"/>
-              </a:rPr>
-              <a:t>Instead of giving only:</a:t>
-            </a:r>
-          </a:p>
-          <a:p>
-            <a:pPr marL="0" indent="0">
-              <a:buNone/>
-            </a:pPr>
-            <a:r>
-              <a:rPr lang="en-IN" sz="5100" dirty="0">
-                <a:latin typeface="Times New Roman" panose="02020603050405020304" pitchFamily="18" charset="0"/>
-                <a:cs typeface="Times New Roman" panose="02020603050405020304" pitchFamily="18" charset="0"/>
-              </a:rPr>
-              <a:t>Prediction: Employee may leave</a:t>
-            </a:r>
-          </a:p>
-          <a:p>
-            <a:pPr marL="0" indent="0">
-              <a:buNone/>
-            </a:pPr>
-            <a:r>
-              <a:rPr lang="en-IN" sz="5100" dirty="0">
-                <a:latin typeface="Times New Roman" panose="02020603050405020304" pitchFamily="18" charset="0"/>
-                <a:cs typeface="Times New Roman" panose="02020603050405020304" pitchFamily="18" charset="0"/>
-              </a:rPr>
-              <a:t>our system produces an understandable profile:</a:t>
-            </a:r>
-          </a:p>
-          <a:p>
-            <a:pPr marL="0" indent="0">
-              <a:buNone/>
-            </a:pPr>
-            <a:r>
-              <a:rPr lang="en-IN" sz="5100" dirty="0">
-                <a:latin typeface="Times New Roman" panose="02020603050405020304" pitchFamily="18" charset="0"/>
-                <a:cs typeface="Times New Roman" panose="02020603050405020304" pitchFamily="18" charset="0"/>
-              </a:rPr>
-              <a:t>Employee Risk Profile</a:t>
-            </a:r>
-          </a:p>
-          <a:p>
-            <a:pPr marL="0" indent="0">
-              <a:buNone/>
-            </a:pPr>
-            <a:r>
-              <a:rPr lang="en-IN" sz="5100" dirty="0">
-                <a:latin typeface="Times New Roman" panose="02020603050405020304" pitchFamily="18" charset="0"/>
-                <a:cs typeface="Times New Roman" panose="02020603050405020304" pitchFamily="18" charset="0"/>
-              </a:rPr>
-              <a:t>Attrition Risk: High</a:t>
-            </a:r>
-            <a:br>
-              <a:rPr lang="en-IN" sz="5100" dirty="0">
-                <a:latin typeface="Times New Roman" panose="02020603050405020304" pitchFamily="18" charset="0"/>
-                <a:cs typeface="Times New Roman" panose="02020603050405020304" pitchFamily="18" charset="0"/>
-              </a:rPr>
-            </a:br>
-            <a:r>
-              <a:rPr lang="en-IN" sz="5100" dirty="0">
-                <a:latin typeface="Times New Roman" panose="02020603050405020304" pitchFamily="18" charset="0"/>
-                <a:cs typeface="Times New Roman" panose="02020603050405020304" pitchFamily="18" charset="0"/>
-              </a:rPr>
-              <a:t>Probability: 82%</a:t>
-            </a:r>
-          </a:p>
-          <a:p>
-            <a:pPr marL="0" indent="0">
-              <a:buNone/>
-            </a:pPr>
-            <a:r>
-              <a:rPr lang="en-IN" sz="5100" dirty="0">
-                <a:latin typeface="Times New Roman" panose="02020603050405020304" pitchFamily="18" charset="0"/>
-                <a:cs typeface="Times New Roman" panose="02020603050405020304" pitchFamily="18" charset="0"/>
-              </a:rPr>
-              <a:t>Main factors:</a:t>
-            </a:r>
-          </a:p>
-          <a:p>
-            <a:pPr marL="0" lvl="0" indent="0">
-              <a:buNone/>
-            </a:pPr>
-            <a:r>
-              <a:rPr lang="en-IN" sz="5100" dirty="0">
-                <a:latin typeface="Times New Roman" panose="02020603050405020304" pitchFamily="18" charset="0"/>
-                <a:cs typeface="Times New Roman" panose="02020603050405020304" pitchFamily="18" charset="0"/>
-              </a:rPr>
-              <a:t>High </a:t>
-            </a:r>
-            <a:r>
-              <a:rPr lang="en-IN" sz="5100" dirty="0" err="1">
-                <a:latin typeface="Times New Roman" panose="02020603050405020304" pitchFamily="18" charset="0"/>
-                <a:cs typeface="Times New Roman" panose="02020603050405020304" pitchFamily="18" charset="0"/>
-              </a:rPr>
-              <a:t>OverTime</a:t>
-            </a:r>
-            <a:r>
-              <a:rPr lang="en-IN" sz="5100" dirty="0">
-                <a:latin typeface="Times New Roman" panose="02020603050405020304" pitchFamily="18" charset="0"/>
-                <a:cs typeface="Times New Roman" panose="02020603050405020304" pitchFamily="18" charset="0"/>
-              </a:rPr>
-              <a:t> </a:t>
-            </a:r>
-          </a:p>
-          <a:p>
-            <a:pPr marL="0" lvl="0" indent="0">
-              <a:buNone/>
-            </a:pPr>
-            <a:r>
-              <a:rPr lang="en-IN" sz="5100" dirty="0">
-                <a:latin typeface="Times New Roman" panose="02020603050405020304" pitchFamily="18" charset="0"/>
-                <a:cs typeface="Times New Roman" panose="02020603050405020304" pitchFamily="18" charset="0"/>
-              </a:rPr>
-              <a:t>Low Job Satisfaction </a:t>
-            </a:r>
-          </a:p>
-          <a:p>
-            <a:pPr marL="0" lvl="0" indent="0">
-              <a:buNone/>
-            </a:pPr>
-            <a:r>
-              <a:rPr lang="en-IN" sz="5100" dirty="0">
-                <a:latin typeface="Times New Roman" panose="02020603050405020304" pitchFamily="18" charset="0"/>
-                <a:cs typeface="Times New Roman" panose="02020603050405020304" pitchFamily="18" charset="0"/>
-              </a:rPr>
-              <a:t>Low Work-Life Balance</a:t>
-            </a:r>
-          </a:p>
-          <a:p>
-            <a:pPr marL="0" lvl="0" indent="0">
-              <a:buNone/>
-            </a:pPr>
-            <a:endParaRPr lang="en-IN" sz="5100" dirty="0">
-              <a:latin typeface="Times New Roman" panose="02020603050405020304" pitchFamily="18" charset="0"/>
-              <a:cs typeface="Times New Roman" panose="02020603050405020304" pitchFamily="18" charset="0"/>
-            </a:endParaRPr>
-          </a:p>
-          <a:p>
-            <a:r>
-              <a:rPr lang="en-IN" sz="5100" b="1" dirty="0">
-                <a:latin typeface="Times New Roman" panose="02020603050405020304" pitchFamily="18" charset="0"/>
-                <a:cs typeface="Times New Roman" panose="02020603050405020304" pitchFamily="18" charset="0"/>
-              </a:rPr>
-              <a:t>Why this is useful</a:t>
-            </a:r>
-          </a:p>
-          <a:p>
-            <a:r>
-              <a:rPr lang="en-IN" sz="5100" dirty="0">
-                <a:latin typeface="Times New Roman" panose="02020603050405020304" pitchFamily="18" charset="0"/>
-                <a:cs typeface="Times New Roman" panose="02020603050405020304" pitchFamily="18" charset="0"/>
-              </a:rPr>
-              <a:t>HR can see the prediction + probability + reasons in one place, instead of interpreting separate ML outputs.</a:t>
-            </a:r>
-          </a:p>
-          <a:p>
-            <a:pPr marL="0" lvl="0" indent="0">
-              <a:buNone/>
-            </a:pPr>
-            <a:endParaRPr lang="en-IN" sz="3000" dirty="0">
-              <a:latin typeface="Times New Roman" panose="02020603050405020304" pitchFamily="18" charset="0"/>
-              <a:cs typeface="Times New Roman" panose="02020603050405020304" pitchFamily="18" charset="0"/>
-            </a:endParaRPr>
+              <a:rPr lang="en-IN" sz="2400" dirty="0">
+                <a:latin typeface="Times New Roman" panose="02020603050405020304" pitchFamily="18" charset="0"/>
+                <a:cs typeface="Times New Roman" panose="02020603050405020304" pitchFamily="18" charset="0"/>
+              </a:rPr>
+              <a:t>Our system provides:</a:t>
+            </a:r>
+          </a:p>
+          <a:p>
+            <a:pPr lvl="0"/>
+            <a:r>
+              <a:rPr lang="en-IN" sz="2400" dirty="0">
+                <a:latin typeface="Times New Roman" panose="02020603050405020304" pitchFamily="18" charset="0"/>
+                <a:cs typeface="Times New Roman" panose="02020603050405020304" pitchFamily="18" charset="0"/>
+              </a:rPr>
+              <a:t>Attrition prediction </a:t>
+            </a:r>
+          </a:p>
+          <a:p>
+            <a:pPr lvl="0"/>
+            <a:r>
+              <a:rPr lang="en-IN" sz="2400" dirty="0">
+                <a:latin typeface="Times New Roman" panose="02020603050405020304" pitchFamily="18" charset="0"/>
+                <a:cs typeface="Times New Roman" panose="02020603050405020304" pitchFamily="18" charset="0"/>
+              </a:rPr>
+              <a:t>Attrition probability </a:t>
+            </a:r>
+          </a:p>
+          <a:p>
+            <a:pPr lvl="0"/>
+            <a:r>
+              <a:rPr lang="en-IN" sz="2400" dirty="0">
+                <a:latin typeface="Times New Roman" panose="02020603050405020304" pitchFamily="18" charset="0"/>
+                <a:cs typeface="Times New Roman" panose="02020603050405020304" pitchFamily="18" charset="0"/>
+              </a:rPr>
+              <a:t>Important contributing factors </a:t>
+            </a:r>
+          </a:p>
+          <a:p>
+            <a:pPr lvl="0"/>
+            <a:r>
+              <a:rPr lang="en-IN" sz="2400" dirty="0">
+                <a:latin typeface="Times New Roman" panose="02020603050405020304" pitchFamily="18" charset="0"/>
+                <a:cs typeface="Times New Roman" panose="02020603050405020304" pitchFamily="18" charset="0"/>
+              </a:rPr>
+              <a:t>SHAP explanation </a:t>
+            </a:r>
+          </a:p>
+          <a:p>
+            <a:pPr lvl="0"/>
+            <a:r>
+              <a:rPr lang="en-IN" sz="2400" dirty="0">
+                <a:latin typeface="Times New Roman" panose="02020603050405020304" pitchFamily="18" charset="0"/>
+                <a:cs typeface="Times New Roman" panose="02020603050405020304" pitchFamily="18" charset="0"/>
+              </a:rPr>
+              <a:t>Individual employee explanation </a:t>
+            </a:r>
+          </a:p>
+          <a:p>
+            <a:pPr lvl="0"/>
+            <a:r>
+              <a:rPr lang="en-IN" sz="2400" dirty="0">
+                <a:latin typeface="Times New Roman" panose="02020603050405020304" pitchFamily="18" charset="0"/>
+                <a:cs typeface="Times New Roman" panose="02020603050405020304" pitchFamily="18" charset="0"/>
+              </a:rPr>
+              <a:t>Simple HR-oriented output</a:t>
+            </a:r>
           </a:p>
           <a:p>
             <a:pPr marL="0" indent="0">
@@ -7715,6 +7899,511 @@
     <p:extLst>
       <p:ext uri="{BB962C8B-B14F-4D97-AF65-F5344CB8AC3E}">
         <p14:creationId xmlns:p14="http://schemas.microsoft.com/office/powerpoint/2010/main" val="2199623713"/>
+      </p:ext>
+    </p:extLst>
+  </p:cSld>
+  <p:clrMapOvr>
+    <a:masterClrMapping/>
+  </p:clrMapOvr>
+</p:sld>
+</file>
+
+<file path=ppt/slides/slide8.xml><?xml version="1.0" encoding="utf-8"?>
+<p:sld xmlns:a="http://schemas.openxmlformats.org/drawingml/2006/main" xmlns:r="http://schemas.openxmlformats.org/officeDocument/2006/relationships" xmlns:p="http://schemas.openxmlformats.org/presentationml/2006/main">
+  <p:cSld>
+    <p:spTree>
+      <p:nvGrpSpPr>
+        <p:cNvPr id="1" name=""/>
+        <p:cNvGrpSpPr/>
+        <p:nvPr/>
+      </p:nvGrpSpPr>
+      <p:grpSpPr>
+        <a:xfrm>
+          <a:off x="0" y="0"/>
+          <a:ext cx="0" cy="0"/>
+          <a:chOff x="0" y="0"/>
+          <a:chExt cx="0" cy="0"/>
+        </a:xfrm>
+      </p:grpSpPr>
+      <p:sp>
+        <p:nvSpPr>
+          <p:cNvPr id="2" name="Title 1">
+            <a:extLst>
+              <a:ext uri="{FF2B5EF4-FFF2-40B4-BE49-F238E27FC236}">
+                <a16:creationId xmlns:a16="http://schemas.microsoft.com/office/drawing/2014/main" id="{A5F9CF26-7B56-4609-3012-226B60DA67C3}"/>
+              </a:ext>
+            </a:extLst>
+          </p:cNvPr>
+          <p:cNvSpPr>
+            <a:spLocks noGrp="1"/>
+          </p:cNvSpPr>
+          <p:nvPr>
+            <p:ph type="title"/>
+          </p:nvPr>
+        </p:nvSpPr>
+        <p:spPr>
+          <a:xfrm>
+            <a:off x="80919" y="89996"/>
+            <a:ext cx="10272839" cy="662564"/>
+          </a:xfrm>
+        </p:spPr>
+        <p:txBody>
+          <a:bodyPr>
+            <a:normAutofit/>
+          </a:bodyPr>
+          <a:lstStyle/>
+          <a:p>
+            <a:r>
+              <a:rPr lang="en-IN" sz="3200" dirty="0">
+                <a:latin typeface="Times New Roman" panose="02020603050405020304" pitchFamily="18" charset="0"/>
+                <a:cs typeface="Times New Roman" panose="02020603050405020304" pitchFamily="18" charset="0"/>
+              </a:rPr>
+              <a:t>Methodology</a:t>
+            </a:r>
+          </a:p>
+        </p:txBody>
+      </p:sp>
+      <p:sp>
+        <p:nvSpPr>
+          <p:cNvPr id="7" name="Content Placeholder 6">
+            <a:extLst>
+              <a:ext uri="{FF2B5EF4-FFF2-40B4-BE49-F238E27FC236}">
+                <a16:creationId xmlns:a16="http://schemas.microsoft.com/office/drawing/2014/main" id="{B59C6479-741E-55DD-3E3E-B3AFDC386903}"/>
+              </a:ext>
+            </a:extLst>
+          </p:cNvPr>
+          <p:cNvSpPr>
+            <a:spLocks noGrp="1"/>
+          </p:cNvSpPr>
+          <p:nvPr>
+            <p:ph idx="1"/>
+          </p:nvPr>
+        </p:nvSpPr>
+        <p:spPr>
+          <a:xfrm>
+            <a:off x="1242800" y="842556"/>
+            <a:ext cx="4672477" cy="5925448"/>
+          </a:xfrm>
+        </p:spPr>
+        <p:txBody>
+          <a:bodyPr>
+            <a:noAutofit/>
+          </a:bodyPr>
+          <a:lstStyle/>
+          <a:p>
+            <a:pPr marL="0" indent="0">
+              <a:buNone/>
+            </a:pPr>
+            <a:r>
+              <a:rPr lang="en-IN" sz="1800" b="1" dirty="0">
+                <a:latin typeface="Times New Roman" panose="02020603050405020304" pitchFamily="18" charset="0"/>
+                <a:cs typeface="Times New Roman" panose="02020603050405020304" pitchFamily="18" charset="0"/>
+              </a:rPr>
+              <a:t>IBM HR Dataset</a:t>
+            </a:r>
+            <a:endParaRPr lang="en-IN" sz="1800" dirty="0">
+              <a:latin typeface="Times New Roman" panose="02020603050405020304" pitchFamily="18" charset="0"/>
+              <a:cs typeface="Times New Roman" panose="02020603050405020304" pitchFamily="18" charset="0"/>
+            </a:endParaRPr>
+          </a:p>
+          <a:p>
+            <a:pPr marL="0" indent="0">
+              <a:buNone/>
+            </a:pPr>
+            <a:r>
+              <a:rPr lang="en-IN" sz="1800" dirty="0">
+                <a:latin typeface="Times New Roman" panose="02020603050405020304" pitchFamily="18" charset="0"/>
+                <a:cs typeface="Times New Roman" panose="02020603050405020304" pitchFamily="18" charset="0"/>
+              </a:rPr>
+              <a:t>             ↓</a:t>
+            </a:r>
+          </a:p>
+          <a:p>
+            <a:pPr marL="0" indent="0">
+              <a:buNone/>
+            </a:pPr>
+            <a:r>
+              <a:rPr lang="en-IN" sz="1800" b="1" dirty="0">
+                <a:latin typeface="Times New Roman" panose="02020603050405020304" pitchFamily="18" charset="0"/>
+                <a:cs typeface="Times New Roman" panose="02020603050405020304" pitchFamily="18" charset="0"/>
+              </a:rPr>
+              <a:t>Data Preprocessing</a:t>
+            </a:r>
+            <a:endParaRPr lang="en-IN" sz="1800" dirty="0">
+              <a:latin typeface="Times New Roman" panose="02020603050405020304" pitchFamily="18" charset="0"/>
+              <a:cs typeface="Times New Roman" panose="02020603050405020304" pitchFamily="18" charset="0"/>
+            </a:endParaRPr>
+          </a:p>
+          <a:p>
+            <a:pPr marL="0" lvl="0" indent="0">
+              <a:buNone/>
+            </a:pPr>
+            <a:r>
+              <a:rPr lang="en-IN" sz="1800" dirty="0">
+                <a:latin typeface="Times New Roman" panose="02020603050405020304" pitchFamily="18" charset="0"/>
+                <a:cs typeface="Times New Roman" panose="02020603050405020304" pitchFamily="18" charset="0"/>
+              </a:rPr>
+              <a:t>Missing-value check </a:t>
+            </a:r>
+          </a:p>
+          <a:p>
+            <a:pPr marL="0" lvl="0" indent="0">
+              <a:buNone/>
+            </a:pPr>
+            <a:r>
+              <a:rPr lang="en-IN" sz="1800" dirty="0">
+                <a:latin typeface="Times New Roman" panose="02020603050405020304" pitchFamily="18" charset="0"/>
+                <a:cs typeface="Times New Roman" panose="02020603050405020304" pitchFamily="18" charset="0"/>
+              </a:rPr>
+              <a:t>Duplicate check </a:t>
+            </a:r>
+          </a:p>
+          <a:p>
+            <a:pPr marL="0" lvl="0" indent="0">
+              <a:buNone/>
+            </a:pPr>
+            <a:r>
+              <a:rPr lang="en-IN" sz="1800" dirty="0">
+                <a:latin typeface="Times New Roman" panose="02020603050405020304" pitchFamily="18" charset="0"/>
+                <a:cs typeface="Times New Roman" panose="02020603050405020304" pitchFamily="18" charset="0"/>
+              </a:rPr>
+              <a:t>Remove unnecessary columns </a:t>
+            </a:r>
+          </a:p>
+          <a:p>
+            <a:pPr marL="0" lvl="0" indent="0">
+              <a:buNone/>
+            </a:pPr>
+            <a:r>
+              <a:rPr lang="en-IN" sz="1800" dirty="0">
+                <a:latin typeface="Times New Roman" panose="02020603050405020304" pitchFamily="18" charset="0"/>
+                <a:cs typeface="Times New Roman" panose="02020603050405020304" pitchFamily="18" charset="0"/>
+              </a:rPr>
+              <a:t>Categorical encoding </a:t>
+            </a:r>
+          </a:p>
+          <a:p>
+            <a:pPr marL="0" indent="0">
+              <a:buNone/>
+            </a:pPr>
+            <a:r>
+              <a:rPr lang="en-IN" sz="1800" dirty="0">
+                <a:latin typeface="Times New Roman" panose="02020603050405020304" pitchFamily="18" charset="0"/>
+                <a:cs typeface="Times New Roman" panose="02020603050405020304" pitchFamily="18" charset="0"/>
+              </a:rPr>
+              <a:t>             ↓</a:t>
+            </a:r>
+          </a:p>
+          <a:p>
+            <a:pPr marL="0" indent="0">
+              <a:buNone/>
+            </a:pPr>
+            <a:r>
+              <a:rPr lang="en-IN" sz="1800" b="1" dirty="0">
+                <a:latin typeface="Times New Roman" panose="02020603050405020304" pitchFamily="18" charset="0"/>
+                <a:cs typeface="Times New Roman" panose="02020603050405020304" pitchFamily="18" charset="0"/>
+              </a:rPr>
+              <a:t>Data Balancing</a:t>
+            </a:r>
+            <a:endParaRPr lang="en-IN" sz="1800" dirty="0">
+              <a:latin typeface="Times New Roman" panose="02020603050405020304" pitchFamily="18" charset="0"/>
+              <a:cs typeface="Times New Roman" panose="02020603050405020304" pitchFamily="18" charset="0"/>
+            </a:endParaRPr>
+          </a:p>
+          <a:p>
+            <a:pPr marL="0" indent="0">
+              <a:buNone/>
+            </a:pPr>
+            <a:r>
+              <a:rPr lang="en-IN" sz="1800" b="1" dirty="0">
+                <a:latin typeface="Times New Roman" panose="02020603050405020304" pitchFamily="18" charset="0"/>
+                <a:cs typeface="Times New Roman" panose="02020603050405020304" pitchFamily="18" charset="0"/>
+              </a:rPr>
+              <a:t>SMOTE</a:t>
+            </a:r>
+            <a:endParaRPr lang="en-IN" sz="1800" dirty="0">
+              <a:latin typeface="Times New Roman" panose="02020603050405020304" pitchFamily="18" charset="0"/>
+              <a:cs typeface="Times New Roman" panose="02020603050405020304" pitchFamily="18" charset="0"/>
+            </a:endParaRPr>
+          </a:p>
+          <a:p>
+            <a:pPr marL="0" indent="0">
+              <a:buNone/>
+            </a:pPr>
+            <a:r>
+              <a:rPr lang="en-IN" sz="1800" dirty="0">
+                <a:latin typeface="Times New Roman" panose="02020603050405020304" pitchFamily="18" charset="0"/>
+                <a:cs typeface="Times New Roman" panose="02020603050405020304" pitchFamily="18" charset="0"/>
+              </a:rPr>
+              <a:t>             ↓</a:t>
+            </a:r>
+          </a:p>
+          <a:p>
+            <a:pPr marL="0" indent="0">
+              <a:buNone/>
+            </a:pPr>
+            <a:r>
+              <a:rPr lang="en-IN" sz="1800" b="1" dirty="0">
+                <a:latin typeface="Times New Roman" panose="02020603050405020304" pitchFamily="18" charset="0"/>
+                <a:cs typeface="Times New Roman" panose="02020603050405020304" pitchFamily="18" charset="0"/>
+              </a:rPr>
+              <a:t>Machine Learning</a:t>
+            </a:r>
+            <a:endParaRPr lang="en-IN" sz="1800" dirty="0">
+              <a:latin typeface="Times New Roman" panose="02020603050405020304" pitchFamily="18" charset="0"/>
+              <a:cs typeface="Times New Roman" panose="02020603050405020304" pitchFamily="18" charset="0"/>
+            </a:endParaRPr>
+          </a:p>
+          <a:p>
+            <a:pPr marL="0" lvl="0" indent="0">
+              <a:buNone/>
+            </a:pPr>
+            <a:r>
+              <a:rPr lang="en-IN" sz="1800" dirty="0">
+                <a:latin typeface="Times New Roman" panose="02020603050405020304" pitchFamily="18" charset="0"/>
+                <a:cs typeface="Times New Roman" panose="02020603050405020304" pitchFamily="18" charset="0"/>
+              </a:rPr>
+              <a:t>Logistic Regression </a:t>
+            </a:r>
+          </a:p>
+          <a:p>
+            <a:pPr marL="0" lvl="0" indent="0">
+              <a:buNone/>
+            </a:pPr>
+            <a:r>
+              <a:rPr lang="en-IN" sz="1800" dirty="0">
+                <a:latin typeface="Times New Roman" panose="02020603050405020304" pitchFamily="18" charset="0"/>
+                <a:cs typeface="Times New Roman" panose="02020603050405020304" pitchFamily="18" charset="0"/>
+              </a:rPr>
+              <a:t>Random Forest </a:t>
+            </a:r>
+          </a:p>
+          <a:p>
+            <a:pPr marL="0" lvl="0" indent="0">
+              <a:buNone/>
+            </a:pPr>
+            <a:r>
+              <a:rPr lang="en-IN" sz="1800" dirty="0" err="1">
+                <a:latin typeface="Times New Roman" panose="02020603050405020304" pitchFamily="18" charset="0"/>
+                <a:cs typeface="Times New Roman" panose="02020603050405020304" pitchFamily="18" charset="0"/>
+              </a:rPr>
+              <a:t>XGBoost</a:t>
+            </a:r>
+            <a:r>
+              <a:rPr lang="en-IN" sz="1800" dirty="0">
+                <a:latin typeface="Times New Roman" panose="02020603050405020304" pitchFamily="18" charset="0"/>
+                <a:cs typeface="Times New Roman" panose="02020603050405020304" pitchFamily="18" charset="0"/>
+              </a:rPr>
+              <a:t> </a:t>
+            </a:r>
+          </a:p>
+          <a:p>
+            <a:pPr marL="0" indent="0">
+              <a:buNone/>
+            </a:pPr>
+            <a:r>
+              <a:rPr lang="en-IN" sz="1800" dirty="0">
+                <a:latin typeface="Times New Roman" panose="02020603050405020304" pitchFamily="18" charset="0"/>
+                <a:cs typeface="Times New Roman" panose="02020603050405020304" pitchFamily="18" charset="0"/>
+              </a:rPr>
+              <a:t>            ↓</a:t>
+            </a:r>
+          </a:p>
+          <a:p>
+            <a:endParaRPr lang="en-IN" sz="2000" dirty="0">
+              <a:latin typeface="Times New Roman" panose="02020603050405020304" pitchFamily="18" charset="0"/>
+              <a:cs typeface="Times New Roman" panose="02020603050405020304" pitchFamily="18" charset="0"/>
+            </a:endParaRPr>
+          </a:p>
+        </p:txBody>
+      </p:sp>
+      <p:sp>
+        <p:nvSpPr>
+          <p:cNvPr id="8" name="TextBox 7">
+            <a:extLst>
+              <a:ext uri="{FF2B5EF4-FFF2-40B4-BE49-F238E27FC236}">
+                <a16:creationId xmlns:a16="http://schemas.microsoft.com/office/drawing/2014/main" id="{82CA1F3C-F875-53C8-0BED-4DA7D412675D}"/>
+              </a:ext>
+            </a:extLst>
+          </p:cNvPr>
+          <p:cNvSpPr txBox="1"/>
+          <p:nvPr/>
+        </p:nvSpPr>
+        <p:spPr>
+          <a:xfrm>
+            <a:off x="6635468" y="939660"/>
+            <a:ext cx="5114167" cy="4524315"/>
+          </a:xfrm>
+          <a:prstGeom prst="rect">
+            <a:avLst/>
+          </a:prstGeom>
+          <a:noFill/>
+        </p:spPr>
+        <p:txBody>
+          <a:bodyPr wrap="square" rtlCol="0">
+            <a:spAutoFit/>
+          </a:bodyPr>
+          <a:lstStyle/>
+          <a:p>
+            <a:r>
+              <a:rPr lang="en-IN" b="1" dirty="0">
+                <a:latin typeface="Times New Roman" panose="02020603050405020304" pitchFamily="18" charset="0"/>
+                <a:cs typeface="Times New Roman" panose="02020603050405020304" pitchFamily="18" charset="0"/>
+              </a:rPr>
+              <a:t>Model Evaluation</a:t>
+            </a:r>
+            <a:endParaRPr lang="en-IN" dirty="0">
+              <a:latin typeface="Times New Roman" panose="02020603050405020304" pitchFamily="18" charset="0"/>
+              <a:cs typeface="Times New Roman" panose="02020603050405020304" pitchFamily="18" charset="0"/>
+            </a:endParaRPr>
+          </a:p>
+          <a:p>
+            <a:pPr lvl="0"/>
+            <a:r>
+              <a:rPr lang="en-IN" dirty="0">
+                <a:latin typeface="Times New Roman" panose="02020603050405020304" pitchFamily="18" charset="0"/>
+                <a:cs typeface="Times New Roman" panose="02020603050405020304" pitchFamily="18" charset="0"/>
+              </a:rPr>
+              <a:t>Accuracy </a:t>
+            </a:r>
+          </a:p>
+          <a:p>
+            <a:pPr lvl="0"/>
+            <a:r>
+              <a:rPr lang="en-IN" dirty="0">
+                <a:latin typeface="Times New Roman" panose="02020603050405020304" pitchFamily="18" charset="0"/>
+                <a:cs typeface="Times New Roman" panose="02020603050405020304" pitchFamily="18" charset="0"/>
+              </a:rPr>
+              <a:t>Precision </a:t>
+            </a:r>
+          </a:p>
+          <a:p>
+            <a:pPr lvl="0"/>
+            <a:r>
+              <a:rPr lang="en-IN" dirty="0">
+                <a:latin typeface="Times New Roman" panose="02020603050405020304" pitchFamily="18" charset="0"/>
+                <a:cs typeface="Times New Roman" panose="02020603050405020304" pitchFamily="18" charset="0"/>
+              </a:rPr>
+              <a:t>Recall </a:t>
+            </a:r>
+          </a:p>
+          <a:p>
+            <a:pPr lvl="0"/>
+            <a:r>
+              <a:rPr lang="en-IN" dirty="0">
+                <a:latin typeface="Times New Roman" panose="02020603050405020304" pitchFamily="18" charset="0"/>
+                <a:cs typeface="Times New Roman" panose="02020603050405020304" pitchFamily="18" charset="0"/>
+              </a:rPr>
+              <a:t>F1-Score </a:t>
+            </a:r>
+          </a:p>
+          <a:p>
+            <a:pPr lvl="0"/>
+            <a:r>
+              <a:rPr lang="en-IN" dirty="0">
+                <a:latin typeface="Times New Roman" panose="02020603050405020304" pitchFamily="18" charset="0"/>
+                <a:cs typeface="Times New Roman" panose="02020603050405020304" pitchFamily="18" charset="0"/>
+              </a:rPr>
+              <a:t>ROC-AUC </a:t>
+            </a:r>
+          </a:p>
+          <a:p>
+            <a:r>
+              <a:rPr lang="en-IN" dirty="0">
+                <a:latin typeface="Times New Roman" panose="02020603050405020304" pitchFamily="18" charset="0"/>
+                <a:cs typeface="Times New Roman" panose="02020603050405020304" pitchFamily="18" charset="0"/>
+              </a:rPr>
+              <a:t>            ↓</a:t>
+            </a:r>
+          </a:p>
+          <a:p>
+            <a:r>
+              <a:rPr lang="en-IN" b="1" dirty="0">
+                <a:latin typeface="Times New Roman" panose="02020603050405020304" pitchFamily="18" charset="0"/>
+                <a:cs typeface="Times New Roman" panose="02020603050405020304" pitchFamily="18" charset="0"/>
+              </a:rPr>
+              <a:t>Explainable AI</a:t>
+            </a:r>
+            <a:endParaRPr lang="en-IN" dirty="0">
+              <a:latin typeface="Times New Roman" panose="02020603050405020304" pitchFamily="18" charset="0"/>
+              <a:cs typeface="Times New Roman" panose="02020603050405020304" pitchFamily="18" charset="0"/>
+            </a:endParaRPr>
+          </a:p>
+          <a:p>
+            <a:pPr lvl="0"/>
+            <a:r>
+              <a:rPr lang="en-IN" dirty="0">
+                <a:latin typeface="Times New Roman" panose="02020603050405020304" pitchFamily="18" charset="0"/>
+                <a:cs typeface="Times New Roman" panose="02020603050405020304" pitchFamily="18" charset="0"/>
+              </a:rPr>
+              <a:t>SHAP </a:t>
+            </a:r>
+          </a:p>
+          <a:p>
+            <a:pPr lvl="0"/>
+            <a:r>
+              <a:rPr lang="en-IN" dirty="0">
+                <a:latin typeface="Times New Roman" panose="02020603050405020304" pitchFamily="18" charset="0"/>
+                <a:cs typeface="Times New Roman" panose="02020603050405020304" pitchFamily="18" charset="0"/>
+              </a:rPr>
+              <a:t>LIME </a:t>
+            </a:r>
+          </a:p>
+          <a:p>
+            <a:r>
+              <a:rPr lang="en-IN" dirty="0">
+                <a:latin typeface="Times New Roman" panose="02020603050405020304" pitchFamily="18" charset="0"/>
+                <a:cs typeface="Times New Roman" panose="02020603050405020304" pitchFamily="18" charset="0"/>
+              </a:rPr>
+              <a:t>            ↓</a:t>
+            </a:r>
+          </a:p>
+          <a:p>
+            <a:r>
+              <a:rPr lang="en-IN" b="1" dirty="0">
+                <a:latin typeface="Times New Roman" panose="02020603050405020304" pitchFamily="18" charset="0"/>
+                <a:cs typeface="Times New Roman" panose="02020603050405020304" pitchFamily="18" charset="0"/>
+              </a:rPr>
+              <a:t>Prediction + Explanation</a:t>
+            </a:r>
+            <a:endParaRPr lang="en-IN" dirty="0">
+              <a:latin typeface="Times New Roman" panose="02020603050405020304" pitchFamily="18" charset="0"/>
+              <a:cs typeface="Times New Roman" panose="02020603050405020304" pitchFamily="18" charset="0"/>
+            </a:endParaRPr>
+          </a:p>
+          <a:p>
+            <a:r>
+              <a:rPr lang="en-IN" dirty="0">
+                <a:latin typeface="Times New Roman" panose="02020603050405020304" pitchFamily="18" charset="0"/>
+                <a:cs typeface="Times New Roman" panose="02020603050405020304" pitchFamily="18" charset="0"/>
+              </a:rPr>
+              <a:t>This is your methodology.</a:t>
+            </a:r>
+          </a:p>
+          <a:p>
+            <a:br>
+              <a:rPr lang="en-IN" dirty="0">
+                <a:latin typeface="Times New Roman" panose="02020603050405020304" pitchFamily="18" charset="0"/>
+                <a:cs typeface="Times New Roman" panose="02020603050405020304" pitchFamily="18" charset="0"/>
+              </a:rPr>
+            </a:br>
+            <a:endParaRPr lang="en-IN" dirty="0">
+              <a:latin typeface="Times New Roman" panose="02020603050405020304" pitchFamily="18" charset="0"/>
+              <a:cs typeface="Times New Roman" panose="02020603050405020304" pitchFamily="18" charset="0"/>
+            </a:endParaRPr>
+          </a:p>
+          <a:p>
+            <a:endParaRPr lang="en-IN" dirty="0">
+              <a:latin typeface="Times New Roman" panose="02020603050405020304" pitchFamily="18" charset="0"/>
+              <a:cs typeface="Times New Roman" panose="02020603050405020304" pitchFamily="18" charset="0"/>
+            </a:endParaRPr>
+          </a:p>
+        </p:txBody>
+      </p:sp>
+    </p:spTree>
+    <p:extLst>
+      <p:ext uri="{BB962C8B-B14F-4D97-AF65-F5344CB8AC3E}">
+        <p14:creationId xmlns:p14="http://schemas.microsoft.com/office/powerpoint/2010/main" val="3987732700"/>
       </p:ext>
     </p:extLst>
   </p:cSld>
@@ -7729,13 +8418,7 @@
   <p:cSld>
     <p:spTree>
       <p:nvGrpSpPr>
-        <p:cNvPr id="1" name="">
-          <a:extLst>
-            <a:ext uri="{FF2B5EF4-FFF2-40B4-BE49-F238E27FC236}">
-              <a16:creationId xmlns:a16="http://schemas.microsoft.com/office/drawing/2014/main" id="{FE2362D4-16B0-6394-B3E2-A957D030CD8A}"/>
-            </a:ext>
-          </a:extLst>
-        </p:cNvPr>
+        <p:cNvPr id="1" name=""/>
         <p:cNvGrpSpPr/>
         <p:nvPr/>
       </p:nvGrpSpPr>
@@ -7752,7 +8435,7 @@
           <p:cNvPr id="2" name="Title 1">
             <a:extLst>
               <a:ext uri="{FF2B5EF4-FFF2-40B4-BE49-F238E27FC236}">
-                <a16:creationId xmlns:a16="http://schemas.microsoft.com/office/drawing/2014/main" id="{BB83C016-A2EB-8CFE-5D72-2C6B2B06E23D}"/>
+                <a16:creationId xmlns:a16="http://schemas.microsoft.com/office/drawing/2014/main" id="{4D34CC90-2BB9-2FF6-B91F-6388D314AB34}"/>
               </a:ext>
             </a:extLst>
           </p:cNvPr>
@@ -7765,271 +8448,62 @@
         </p:nvSpPr>
         <p:spPr>
           <a:xfrm>
-            <a:off x="627807" y="146641"/>
-            <a:ext cx="10515600" cy="743484"/>
+            <a:off x="60352" y="130455"/>
+            <a:ext cx="11078671" cy="476447"/>
           </a:xfrm>
         </p:spPr>
         <p:txBody>
           <a:bodyPr>
-            <a:normAutofit/>
+            <a:noAutofit/>
           </a:bodyPr>
           <a:lstStyle/>
           <a:p>
             <a:r>
-              <a:rPr lang="en-IN" sz="3200" dirty="0"/>
-              <a:t>Creativity &amp; Novelty</a:t>
-            </a:r>
-            <a:endParaRPr lang="en-IN" sz="3200" dirty="0">
-              <a:latin typeface="Times New Roman" panose="02020603050405020304" pitchFamily="18" charset="0"/>
-              <a:cs typeface="Times New Roman" panose="02020603050405020304" pitchFamily="18" charset="0"/>
-            </a:endParaRPr>
-          </a:p>
-        </p:txBody>
-      </p:sp>
-      <p:sp>
-        <p:nvSpPr>
-          <p:cNvPr id="3" name="Content Placeholder 2">
-            <a:extLst>
-              <a:ext uri="{FF2B5EF4-FFF2-40B4-BE49-F238E27FC236}">
-                <a16:creationId xmlns:a16="http://schemas.microsoft.com/office/drawing/2014/main" id="{8E95B99C-B6F8-CDE8-82B3-8775003D9B9D}"/>
-              </a:ext>
-            </a:extLst>
-          </p:cNvPr>
-          <p:cNvSpPr>
-            <a:spLocks noGrp="1"/>
-          </p:cNvSpPr>
+              <a:rPr lang="en-IN" sz="3200" dirty="0">
+                <a:latin typeface="Times New Roman" panose="02020603050405020304" pitchFamily="18" charset="0"/>
+                <a:cs typeface="Times New Roman" panose="02020603050405020304" pitchFamily="18" charset="0"/>
+              </a:rPr>
+              <a:t>System Design</a:t>
+            </a:r>
+          </a:p>
+        </p:txBody>
+      </p:sp>
+      <p:pic>
+        <p:nvPicPr>
+          <p:cNvPr id="8" name="Content Placeholder 7">
+            <a:extLst>
+              <a:ext uri="{FF2B5EF4-FFF2-40B4-BE49-F238E27FC236}">
+                <a16:creationId xmlns:a16="http://schemas.microsoft.com/office/drawing/2014/main" id="{398C5780-86C8-3DB0-29D8-0A692AE61DB0}"/>
+              </a:ext>
+            </a:extLst>
+          </p:cNvPr>
+          <p:cNvPicPr>
+            <a:picLocks noGrp="1" noChangeAspect="1"/>
+          </p:cNvPicPr>
           <p:nvPr>
             <p:ph idx="1"/>
           </p:nvPr>
-        </p:nvSpPr>
+        </p:nvPicPr>
+        <p:blipFill>
+          <a:blip r:embed="rId2"/>
+          <a:stretch>
+            <a:fillRect/>
+          </a:stretch>
+        </p:blipFill>
         <p:spPr>
           <a:xfrm>
-            <a:off x="627808" y="1068149"/>
-            <a:ext cx="4138402" cy="5486399"/>
-          </a:xfrm>
-        </p:spPr>
-        <p:txBody>
-          <a:bodyPr>
-            <a:normAutofit/>
-          </a:bodyPr>
-          <a:lstStyle/>
-          <a:p>
-            <a:r>
-              <a:rPr lang="en-IN" sz="2400" b="1" dirty="0">
-                <a:latin typeface="Times New Roman" panose="02020603050405020304" pitchFamily="18" charset="0"/>
-                <a:cs typeface="Times New Roman" panose="02020603050405020304" pitchFamily="18" charset="0"/>
-              </a:rPr>
-              <a:t>Creativity</a:t>
-            </a:r>
-          </a:p>
-          <a:p>
-            <a:r>
-              <a:rPr lang="en-IN" sz="2400" dirty="0">
-                <a:latin typeface="Times New Roman" panose="02020603050405020304" pitchFamily="18" charset="0"/>
-                <a:cs typeface="Times New Roman" panose="02020603050405020304" pitchFamily="18" charset="0"/>
-              </a:rPr>
-              <a:t>The project combines:</a:t>
-            </a:r>
-          </a:p>
-          <a:p>
-            <a:pPr lvl="0"/>
-            <a:r>
-              <a:rPr lang="en-IN" sz="2400" dirty="0">
-                <a:latin typeface="Times New Roman" panose="02020603050405020304" pitchFamily="18" charset="0"/>
-                <a:cs typeface="Times New Roman" panose="02020603050405020304" pitchFamily="18" charset="0"/>
-              </a:rPr>
-              <a:t>Machine Learning </a:t>
-            </a:r>
-          </a:p>
-          <a:p>
-            <a:pPr lvl="0"/>
-            <a:r>
-              <a:rPr lang="en-IN" sz="2400" dirty="0">
-                <a:latin typeface="Times New Roman" panose="02020603050405020304" pitchFamily="18" charset="0"/>
-                <a:cs typeface="Times New Roman" panose="02020603050405020304" pitchFamily="18" charset="0"/>
-              </a:rPr>
-              <a:t>Explainable AI </a:t>
-            </a:r>
-          </a:p>
-          <a:p>
-            <a:pPr lvl="0"/>
-            <a:r>
-              <a:rPr lang="en-IN" sz="2400" dirty="0">
-                <a:latin typeface="Times New Roman" panose="02020603050405020304" pitchFamily="18" charset="0"/>
-                <a:cs typeface="Times New Roman" panose="02020603050405020304" pitchFamily="18" charset="0"/>
-              </a:rPr>
-              <a:t>Employee risk scoring </a:t>
-            </a:r>
-          </a:p>
-          <a:p>
-            <a:pPr lvl="0"/>
-            <a:r>
-              <a:rPr lang="en-IN" sz="2400" dirty="0">
-                <a:latin typeface="Times New Roman" panose="02020603050405020304" pitchFamily="18" charset="0"/>
-                <a:cs typeface="Times New Roman" panose="02020603050405020304" pitchFamily="18" charset="0"/>
-              </a:rPr>
-              <a:t>Individual-level explanations </a:t>
-            </a:r>
-          </a:p>
-          <a:p>
-            <a:pPr lvl="0"/>
-            <a:r>
-              <a:rPr lang="en-IN" sz="2400" dirty="0">
-                <a:latin typeface="Times New Roman" panose="02020603050405020304" pitchFamily="18" charset="0"/>
-                <a:cs typeface="Times New Roman" panose="02020603050405020304" pitchFamily="18" charset="0"/>
-              </a:rPr>
-              <a:t>Simple HR visualization </a:t>
-            </a:r>
-          </a:p>
-          <a:p>
-            <a:pPr marL="0" indent="0">
-              <a:buNone/>
-            </a:pPr>
-            <a:endParaRPr lang="en-IN" sz="2400" dirty="0">
-              <a:latin typeface="Times New Roman" panose="02020603050405020304" pitchFamily="18" charset="0"/>
-              <a:cs typeface="Times New Roman" panose="02020603050405020304" pitchFamily="18" charset="0"/>
-            </a:endParaRPr>
-          </a:p>
-        </p:txBody>
-      </p:sp>
-      <p:sp>
-        <p:nvSpPr>
-          <p:cNvPr id="4" name="TextBox 3">
-            <a:extLst>
-              <a:ext uri="{FF2B5EF4-FFF2-40B4-BE49-F238E27FC236}">
-                <a16:creationId xmlns:a16="http://schemas.microsoft.com/office/drawing/2014/main" id="{F8322ABE-466B-7993-3F3A-556D9283DEE1}"/>
-              </a:ext>
-            </a:extLst>
-          </p:cNvPr>
-          <p:cNvSpPr txBox="1"/>
-          <p:nvPr/>
-        </p:nvSpPr>
-        <p:spPr>
-          <a:xfrm>
-            <a:off x="6295604" y="1068149"/>
-            <a:ext cx="5510676" cy="4431983"/>
+            <a:off x="469338" y="1227337"/>
+            <a:ext cx="10972799" cy="5081797"/>
           </a:xfrm>
           <a:prstGeom prst="rect">
             <a:avLst/>
           </a:prstGeom>
-          <a:noFill/>
         </p:spPr>
-        <p:txBody>
-          <a:bodyPr wrap="square" rtlCol="0">
-            <a:spAutoFit/>
-          </a:bodyPr>
-          <a:lstStyle/>
-          <a:p>
-            <a:r>
-              <a:rPr lang="en-IN" sz="2400" b="1" dirty="0">
-                <a:latin typeface="Times New Roman" panose="02020603050405020304" pitchFamily="18" charset="0"/>
-                <a:cs typeface="Times New Roman" panose="02020603050405020304" pitchFamily="18" charset="0"/>
-              </a:rPr>
-              <a:t>Novelty</a:t>
-            </a:r>
-          </a:p>
-          <a:p>
-            <a:r>
-              <a:rPr lang="en-IN" sz="2400" dirty="0">
-                <a:latin typeface="Times New Roman" panose="02020603050405020304" pitchFamily="18" charset="0"/>
-                <a:cs typeface="Times New Roman" panose="02020603050405020304" pitchFamily="18" charset="0"/>
-              </a:rPr>
-              <a:t>Our proposed framework integrates:</a:t>
-            </a:r>
-          </a:p>
-          <a:p>
-            <a:r>
-              <a:rPr lang="en-IN" sz="2400" dirty="0">
-                <a:latin typeface="Times New Roman" panose="02020603050405020304" pitchFamily="18" charset="0"/>
-                <a:cs typeface="Times New Roman" panose="02020603050405020304" pitchFamily="18" charset="0"/>
-              </a:rPr>
-              <a:t>Prediction</a:t>
-            </a:r>
-          </a:p>
-          <a:p>
-            <a:r>
-              <a:rPr lang="en-IN" sz="2400" dirty="0">
-                <a:latin typeface="Times New Roman" panose="02020603050405020304" pitchFamily="18" charset="0"/>
-                <a:cs typeface="Times New Roman" panose="02020603050405020304" pitchFamily="18" charset="0"/>
-              </a:rPr>
-              <a:t>↓</a:t>
-            </a:r>
-          </a:p>
-          <a:p>
-            <a:r>
-              <a:rPr lang="en-IN" sz="2400" dirty="0">
-                <a:latin typeface="Times New Roman" panose="02020603050405020304" pitchFamily="18" charset="0"/>
-                <a:cs typeface="Times New Roman" panose="02020603050405020304" pitchFamily="18" charset="0"/>
-              </a:rPr>
-              <a:t>Risk Score</a:t>
-            </a:r>
-          </a:p>
-          <a:p>
-            <a:r>
-              <a:rPr lang="en-IN" sz="2400" dirty="0">
-                <a:latin typeface="Times New Roman" panose="02020603050405020304" pitchFamily="18" charset="0"/>
-                <a:cs typeface="Times New Roman" panose="02020603050405020304" pitchFamily="18" charset="0"/>
-              </a:rPr>
-              <a:t>↓</a:t>
-            </a:r>
-          </a:p>
-          <a:p>
-            <a:r>
-              <a:rPr lang="en-IN" sz="2400" dirty="0">
-                <a:latin typeface="Times New Roman" panose="02020603050405020304" pitchFamily="18" charset="0"/>
-                <a:cs typeface="Times New Roman" panose="02020603050405020304" pitchFamily="18" charset="0"/>
-              </a:rPr>
-              <a:t>Why? — SHAP/LIME</a:t>
-            </a:r>
-          </a:p>
-          <a:p>
-            <a:r>
-              <a:rPr lang="en-IN" sz="2400" dirty="0">
-                <a:latin typeface="Times New Roman" panose="02020603050405020304" pitchFamily="18" charset="0"/>
-                <a:cs typeface="Times New Roman" panose="02020603050405020304" pitchFamily="18" charset="0"/>
-              </a:rPr>
-              <a:t>↓</a:t>
-            </a:r>
-          </a:p>
-          <a:p>
-            <a:r>
-              <a:rPr lang="en-IN" sz="2400" dirty="0">
-                <a:latin typeface="Times New Roman" panose="02020603050405020304" pitchFamily="18" charset="0"/>
-                <a:cs typeface="Times New Roman" panose="02020603050405020304" pitchFamily="18" charset="0"/>
-              </a:rPr>
-              <a:t>Employee Risk Profile</a:t>
-            </a:r>
-          </a:p>
-          <a:p>
-            <a:r>
-              <a:rPr lang="en-IN" sz="2400" dirty="0">
-                <a:latin typeface="Times New Roman" panose="02020603050405020304" pitchFamily="18" charset="0"/>
-                <a:cs typeface="Times New Roman" panose="02020603050405020304" pitchFamily="18" charset="0"/>
-              </a:rPr>
-              <a:t>↓</a:t>
-            </a:r>
-          </a:p>
-          <a:p>
-            <a:r>
-              <a:rPr lang="en-IN" sz="2400" dirty="0">
-                <a:latin typeface="Times New Roman" panose="02020603050405020304" pitchFamily="18" charset="0"/>
-                <a:cs typeface="Times New Roman" panose="02020603050405020304" pitchFamily="18" charset="0"/>
-              </a:rPr>
-              <a:t>HR Decision Support</a:t>
-            </a:r>
-          </a:p>
-          <a:p>
-            <a:endParaRPr lang="en-IN" dirty="0">
-              <a:latin typeface="Times New Roman" panose="02020603050405020304" pitchFamily="18" charset="0"/>
-              <a:cs typeface="Times New Roman" panose="02020603050405020304" pitchFamily="18" charset="0"/>
-            </a:endParaRPr>
-          </a:p>
-        </p:txBody>
-      </p:sp>
+      </p:pic>
     </p:spTree>
     <p:extLst>
       <p:ext uri="{BB962C8B-B14F-4D97-AF65-F5344CB8AC3E}">
-        <p14:creationId xmlns:p14="http://schemas.microsoft.com/office/powerpoint/2010/main" val="1454107209"/>
+        <p14:creationId xmlns:p14="http://schemas.microsoft.com/office/powerpoint/2010/main" val="901369976"/>
       </p:ext>
     </p:extLst>
   </p:cSld>
